--- a/assets/presentation-template.pptx
+++ b/assets/presentation-template.pptx
@@ -599,7 +599,7 @@
                 <a:latin typeface="Calibri"/>
                 <a:ea typeface="Calibri"/>
               </a:rPr>
-              <a:t>WONDER DIAMOND</a:t>
+              <a:t>[НАЗВАНИЕ ПРОЕКТА]</a:t>
             </a:r>
             <a:endParaRPr b="0" lang="en-US" sz="3800" spc="-1" strike="noStrike">
               <a:solidFill>
@@ -656,7 +656,7 @@
                 <a:latin typeface="Calibri"/>
                 <a:ea typeface="Calibri"/>
               </a:rPr>
-              <a:t>CVD-бриллиантовые украшения 6ct+ от производителя — в 10–50× дешевле натуральных</a:t>
+              <a:t>[Краткий слоган: суть продукта в одном предложении]</a:t>
             </a:r>
             <a:endParaRPr b="0" lang="en-US" sz="1500" spc="-1" strike="noStrike">
               <a:solidFill>
@@ -713,7 +713,7 @@
                 <a:latin typeface="Calibri"/>
                 <a:ea typeface="Calibri"/>
               </a:rPr>
-              <a:t>Россия, B2C  ·  Апрель 2026  ·  Этап: Verification</a:t>
+              <a:t>[Рынок], [B2B / B2C]  ·  [месяц год]  ·  Этап: Verification</a:t>
             </a:r>
             <a:endParaRPr b="0" lang="en-US" sz="900" spc="-1" strike="noStrike">
               <a:solidFill>
@@ -1019,7 +1019,7 @@
                 <a:latin typeface="Calibri"/>
                 <a:ea typeface="Calibri"/>
               </a:rPr>
-              <a:t>Источник: probpalata.gov.ru, Минфин РФ, Ассоциация ювелиров РФ 2025–2026</a:t>
+              <a:t>Источник: [регуляторы, отраслевые ассоциации, статистика — задача 6]</a:t>
             </a:r>
             <a:endParaRPr b="0" lang="en-US" sz="800" spc="-1" strike="noStrike">
               <a:solidFill>
@@ -1182,7 +1182,7 @@
                 <a:latin typeface="Calibri"/>
                 <a:ea typeface="Calibri"/>
               </a:rPr>
-              <a:t>POLITICAL: Закон 334-ФЗ (ГИИС ДМДК с 01.03.2026): 3×5=15 ⚠️ Compliance обязателен. Санкции → усложнение импорта: 2×3=6</a:t>
+              <a:t>POLITICAL: [фактор]: [значимость]×[вероятность]=[оценка] [⚠️ / ✅] [следствие]</a:t>
             </a:r>
             <a:endParaRPr b="0" lang="en-US" sz="950" spc="-1" strike="noStrike">
               <a:solidFill>
@@ -1345,7 +1345,7 @@
                 <a:latin typeface="Calibri"/>
                 <a:ea typeface="Calibri"/>
               </a:rPr>
-              <a:t>ECONOMIC: Рост цены золота +45% (2024): 3×4=12 ⚠️ Рост COGS. Высокая ставка ЦБ: 2×4=8. Рост ювелирки +17%: 2×4=8 ✅</a:t>
+              <a:t>ECONOMIC: [фактор]: [значимость]×[вероятность]=[оценка] [⚠️ / ✅] [следствие]</a:t>
             </a:r>
             <a:endParaRPr b="0" lang="en-US" sz="950" spc="-1" strike="noStrike">
               <a:solidFill>
@@ -1508,7 +1508,7 @@
                 <a:latin typeface="Calibri"/>
                 <a:ea typeface="Calibri"/>
               </a:rPr>
-              <a:t>SOCIAL: Премиализация, доля украшений с камнями 45–50%: 3×4=12 ✅ спрос растёт. Стигма «синтетика» у 45+: 3×3=9 ⚠️ ограничивает TAM. ESG-тренд: 2×3=6 ✅</a:t>
+              <a:t>SOCIAL: [фактор]: [значимость]×[вероятность]=[оценка] [⚠️ / ✅] [следствие]</a:t>
             </a:r>
             <a:endParaRPr b="0" lang="en-US" sz="950" spc="-1" strike="noStrike">
               <a:solidFill>
@@ -1671,7 +1671,7 @@
                 <a:latin typeface="Calibri"/>
                 <a:ea typeface="Calibri"/>
               </a:rPr>
-              <a:t>TECHNOLOGICAL: CVD дешевеет, рост маржи: 2×5=10 ✅. AR-примерка как UX-барьер: 1×3=3 ✅ дифференциация</a:t>
+              <a:t>TECHNOLOGICAL: [фактор]: [значимость]×[вероятность]=[оценка] [⚠️ / ✅] [следствие]</a:t>
             </a:r>
             <a:endParaRPr b="0" lang="en-US" sz="950" spc="-1" strike="noStrike">
               <a:solidFill>
@@ -1834,7 +1834,7 @@
                 <a:latin typeface="Calibri"/>
                 <a:ea typeface="Calibri"/>
               </a:rPr>
-              <a:t>LEGAL: 2D-маркировка с сент. 2025: 2×5=10 ⚠️ операционный риск. ГИИС ДМДК compliance: 3×5=15 — критично проверить до первых продаж</a:t>
+              <a:t>ENVIRONMENTAL / LEGAL: [фактор]: [значимость]×[вероятность]=[оценка] [⚠️ / ✅] [следствие]</a:t>
             </a:r>
             <a:endParaRPr b="0" lang="en-US" sz="950" spc="-1" strike="noStrike">
               <a:solidFill>
@@ -2340,7 +2340,7 @@
                 <a:latin typeface="Calibri"/>
                 <a:ea typeface="Calibri"/>
               </a:rPr>
-              <a:t>Источник: Jobs-to-be-Done (Ulwick/Christensen); PD WD 2026</a:t>
+              <a:t>Источник: Jobs-to-be-Done (Ulwick/Christensen); задача 7</a:t>
             </a:r>
             <a:endParaRPr b="0" lang="en-US" sz="800" spc="-1" strike="noStrike">
               <a:solidFill>
@@ -2618,7 +2618,7 @@
                 <a:latin typeface="Calibri"/>
                 <a:ea typeface="Calibri"/>
               </a:rPr>
-              <a:t>Купить ювелирное украшение с крупным бриллиантом; выбрать из ассортимента подходящее; получить доставку на 200K+ ₽</a:t>
+              <a:t>[Функциональные работы: что клиент делает практически — 2–3 формулировки]</a:t>
             </a:r>
             <a:endParaRPr b="0" lang="en-US" sz="950" spc="-1" strike="noStrike">
               <a:solidFill>
@@ -2839,7 +2839,7 @@
                 <a:latin typeface="Calibri"/>
                 <a:ea typeface="Calibri"/>
               </a:rPr>
-              <a:t>Уверенность в покупке; гордость за качество; ощущение роскоши без финансового напряжения</a:t>
+              <a:t>[Эмоциональные работы: что клиент хочет чувствовать]</a:t>
             </a:r>
             <a:endParaRPr b="0" lang="en-US" sz="950" spc="-1" strike="noStrike">
               <a:solidFill>
@@ -3060,7 +3060,7 @@
                 <a:latin typeface="Calibri"/>
                 <a:ea typeface="Calibri"/>
               </a:rPr>
-              <a:t>Статусной, успешной; человеком со вкусом; «при деньгах» без показного расточительства</a:t>
+              <a:t>[Социальные работы: как клиент хочет выглядеть в глазах других]</a:t>
             </a:r>
             <a:endParaRPr b="0" lang="en-US" sz="950" spc="-1" strike="noStrike">
               <a:solidFill>
@@ -3272,7 +3272,7 @@
                 <a:latin typeface="Calibri"/>
                 <a:ea typeface="Calibri"/>
               </a:rPr>
-              <a:t>Когда я хочу украшение с крупным бриллиантом, я хочу найти доступный вариант 6ct+, чтобы выглядеть статусно без затрат 1–5 млн ₽.</a:t>
+              <a:t>Когда [ситуация], я хочу [работа], чтобы [результат].</a:t>
             </a:r>
             <a:endParaRPr b="0" lang="en-US" sz="1000" spc="-1" strike="noStrike">
               <a:solidFill>
@@ -3427,7 +3427,7 @@
                 <a:latin typeface="Calibri"/>
                 <a:ea typeface="Calibri"/>
               </a:rPr>
-              <a:t>Когда я выбираю подарок на юбилей, я хочу вложиться в украшение с эффектом, чтобы запомниться без бюджета ювелирного бутика.</a:t>
+              <a:t>Когда [ситуация], я хочу [работа], чтобы [результат].</a:t>
             </a:r>
             <a:endParaRPr b="0" lang="en-US" sz="1000" spc="-1" strike="noStrike">
               <a:solidFill>
@@ -3582,7 +3582,7 @@
                 <a:latin typeface="Calibri"/>
                 <a:ea typeface="Calibri"/>
               </a:rPr>
-              <a:t>Когда я узнаю про CVD, я хочу убедиться в подлинности через IGI-сертификат, чтобы не выглядеть глупо перед окружением.</a:t>
+              <a:t>Когда [ситуация], я хочу [работа], чтобы [результат].</a:t>
             </a:r>
             <a:endParaRPr b="0" lang="en-US" sz="1000" spc="-1" strike="noStrike">
               <a:solidFill>
@@ -8385,7 +8385,7 @@
                 <a:latin typeface="Calibri"/>
                 <a:ea typeface="Calibri"/>
               </a:rPr>
-              <a:t>Источник: Суррогатные данные — отзывы IQ Diamonds, Bright Spark, Ozon; форумы VC.ru; PD WD 2026</a:t>
+              <a:t>Источник: [интервью или суррогатные данные — отзывы, форумы; задача 9]</a:t>
             </a:r>
             <a:endParaRPr b="0" lang="en-US" sz="800" spc="-1" strike="noStrike">
               <a:solidFill>
@@ -8548,7 +8548,7 @@
                 <a:latin typeface="Calibri"/>
                 <a:ea typeface="Calibri"/>
               </a:rPr>
-              <a:t>5/7</a:t>
+              <a:t>[N/M]</a:t>
             </a:r>
             <a:endParaRPr b="0" lang="en-US" sz="1300" spc="-1" strike="noStrike">
               <a:solidFill>
@@ -8711,7 +8711,7 @@
                 <a:latin typeface="Calibri"/>
                 <a:ea typeface="Calibri"/>
               </a:rPr>
-              <a:t>Ищут крупный камень (5ct+), но в каталогах РФ не находят — уходят или ждут</a:t>
+              <a:t>[Паттерн 1: что респонденты делают или чувствуют]</a:t>
             </a:r>
             <a:endParaRPr b="0" lang="en-US" sz="1000" spc="-1" strike="noStrike">
               <a:solidFill>
@@ -8817,7 +8817,7 @@
                 <a:latin typeface="Calibri"/>
                 <a:ea typeface="Calibri"/>
               </a:rPr>
-              <a:t>7/7</a:t>
+              <a:t>[N/M]</a:t>
             </a:r>
             <a:endParaRPr b="0" lang="en-US" sz="1300" spc="-1" strike="noStrike">
               <a:solidFill>
@@ -8980,7 +8980,7 @@
                 <a:latin typeface="Calibri"/>
                 <a:ea typeface="Calibri"/>
               </a:rPr>
-              <a:t>Убедиться в подлинности — барьер #1: требуют IGI/GIA, фото сертификата</a:t>
+              <a:t>[Паттерн 2: что респонденты делают или чувствуют]</a:t>
             </a:r>
             <a:endParaRPr b="0" lang="en-US" sz="1000" spc="-1" strike="noStrike">
               <a:solidFill>
@@ -9086,7 +9086,7 @@
                 <a:latin typeface="Calibri"/>
                 <a:ea typeface="Calibri"/>
               </a:rPr>
-              <a:t>6/7</a:t>
+              <a:t>[N/M]</a:t>
             </a:r>
             <a:endParaRPr b="0" lang="en-US" sz="1300" spc="-1" strike="noStrike">
               <a:solidFill>
@@ -9249,7 +9249,7 @@
                 <a:latin typeface="Calibri"/>
                 <a:ea typeface="Calibri"/>
               </a:rPr>
-              <a:t>Нет уверенности покупать 200K+ онлайн без физической примерки</a:t>
+              <a:t>[Паттерн 3: что респонденты делают или чувствуют]</a:t>
             </a:r>
             <a:endParaRPr b="0" lang="en-US" sz="1000" spc="-1" strike="noStrike">
               <a:solidFill>
@@ -9355,7 +9355,7 @@
                 <a:latin typeface="Calibri"/>
                 <a:ea typeface="Calibri"/>
               </a:rPr>
-              <a:t>4/7</a:t>
+              <a:t>[N/M]</a:t>
             </a:r>
             <a:endParaRPr b="0" lang="en-US" sz="1300" spc="-1" strike="noStrike">
               <a:solidFill>
@@ -9518,7 +9518,7 @@
                 <a:latin typeface="Calibri"/>
                 <a:ea typeface="Calibri"/>
               </a:rPr>
-              <a:t>Премиум-покупатели готовы платить за upgrade — «а если камень мне разонравится, можно поменять?»</a:t>
+              <a:t>[Паттерн 4: что респонденты делают или чувствуют]</a:t>
             </a:r>
             <a:endParaRPr b="0" lang="en-US" sz="1000" spc="-1" strike="noStrike">
               <a:solidFill>
@@ -9624,7 +9624,7 @@
                 <a:latin typeface="Calibri"/>
                 <a:ea typeface="Calibri"/>
               </a:rPr>
-              <a:t>3/7</a:t>
+              <a:t>[N/M]</a:t>
             </a:r>
             <a:endParaRPr b="0" lang="en-US" sz="1300" spc="-1" strike="noStrike">
               <a:solidFill>
@@ -9787,7 +9787,7 @@
                 <a:latin typeface="Calibri"/>
                 <a:ea typeface="Calibri"/>
               </a:rPr>
-              <a:t>Социальное давление на сегмент 40+: «а это точно настоящий бриллиант?» от окружения</a:t>
+              <a:t>[Паттерн 5: что респонденты делают или чувствуют]</a:t>
             </a:r>
             <a:endParaRPr b="0" lang="en-US" sz="1000" spc="-1" strike="noStrike">
               <a:solidFill>
@@ -10093,7 +10093,7 @@
                 <a:latin typeface="Calibri"/>
                 <a:ea typeface="Calibri"/>
               </a:rPr>
-              <a:t>Источник: Opportunity Score (Ulwick); PD WD 2026</a:t>
+              <a:t>Источник: Opportunity Score (Ulwick); задачи 7, 17</a:t>
             </a:r>
             <a:endParaRPr b="0" lang="en-US" sz="800" spc="-1" strike="noStrike">
               <a:solidFill>
@@ -10786,7 +10786,7 @@
                 <a:latin typeface="Calibri"/>
                 <a:ea typeface="Calibri"/>
               </a:rPr>
-              <a:t>Доступный крупный CVD-бриллиант (6ct+)</a:t>
+              <a:t>[Outcome 1 из Job Map]</a:t>
             </a:r>
             <a:endParaRPr b="0" lang="en-US" sz="950" spc="-1" strike="noStrike">
               <a:solidFill>
@@ -11326,7 +11326,7 @@
                 <a:latin typeface="Calibri"/>
                 <a:ea typeface="Calibri"/>
               </a:rPr>
-              <a:t>Уверенность в подлинности (IGI-сертификат)</a:t>
+              <a:t>[Outcome 2 из Job Map]</a:t>
             </a:r>
             <a:endParaRPr b="0" lang="en-US" sz="950" spc="-1" strike="noStrike">
               <a:solidFill>
@@ -11866,7 +11866,7 @@
                 <a:latin typeface="Calibri"/>
                 <a:ea typeface="Calibri"/>
               </a:rPr>
-              <a:t>Украшение «смотрится дорого» — социальный сигнал</a:t>
+              <a:t>[Outcome 3 из Job Map]</a:t>
             </a:r>
             <a:endParaRPr b="0" lang="en-US" sz="950" spc="-1" strike="noStrike">
               <a:solidFill>
@@ -12406,7 +12406,7 @@
                 <a:latin typeface="Calibri"/>
                 <a:ea typeface="Calibri"/>
               </a:rPr>
-              <a:t>Безопасность онлайн-покупки 200K+ ₽</a:t>
+              <a:t>[Outcome 4 из Job Map]</a:t>
             </a:r>
             <a:endParaRPr b="0" lang="en-US" sz="950" spc="-1" strike="noStrike">
               <a:solidFill>
@@ -12946,7 +12946,7 @@
                 <a:latin typeface="Calibri"/>
                 <a:ea typeface="Calibri"/>
               </a:rPr>
-              <a:t>Понимание разницы CVD / натуральный / фианит</a:t>
+              <a:t>[Outcome 5 из Job Map]</a:t>
             </a:r>
             <a:endParaRPr b="0" lang="en-US" sz="950" spc="-1" strike="noStrike">
               <a:solidFill>
@@ -13496,7 +13496,7 @@
                 <a:latin typeface="Calibri"/>
                 <a:ea typeface="Calibri"/>
               </a:rPr>
-              <a:t>Outcome 1 — критически незакрытая потребность → приоритетная возможность для OST</a:t>
+              <a:t>[Outcome с наивысшим OS] — критически незакрытая потребность → приоритетная возможность для OST</a:t>
             </a:r>
             <a:endParaRPr b="0" lang="en-US" sz="900" spc="-1" strike="noStrike">
               <a:solidFill>
@@ -15824,7 +15824,7 @@
                 <a:latin typeface="Calibri"/>
                 <a:ea typeface="Calibri"/>
               </a:rPr>
-              <a:t>Источник: PD WD 2026; финансовая модель (базовый сценарий)</a:t>
+              <a:t>Источник: задача 12; финансовая модель (базовый сценарий)</a:t>
             </a:r>
             <a:endParaRPr b="0" lang="en-US" sz="800" spc="-1" strike="noStrike">
               <a:solidFill>
@@ -15986,7 +15986,7 @@
                 <a:latin typeface="Calibri"/>
                 <a:ea typeface="Calibri"/>
               </a:rPr>
-              <a:t>0.5</a:t>
+              <a:t>[N]</a:t>
             </a:r>
             <a:endParaRPr b="0" lang="en-US" sz="2800" spc="-1" strike="noStrike">
               <a:solidFill>
@@ -16205,7 +16205,7 @@
                 <a:latin typeface="Calibri"/>
                 <a:ea typeface="Calibri"/>
               </a:rPr>
-              <a:t>25 млн ₽</a:t>
+              <a:t>[X млн ₽]</a:t>
             </a:r>
             <a:endParaRPr b="0" lang="en-US" sz="2800" spc="-1" strike="noStrike">
               <a:solidFill>
@@ -16424,7 +16424,7 @@
                 <a:latin typeface="Calibri"/>
                 <a:ea typeface="Calibri"/>
               </a:rPr>
-              <a:t>2.4%</a:t>
+              <a:t>[Y%]</a:t>
             </a:r>
             <a:endParaRPr b="0" lang="en-US" sz="2800" spc="-1" strike="noStrike">
               <a:solidFill>
@@ -16702,7 +16702,7 @@
                 <a:latin typeface="Calibri"/>
                 <a:ea typeface="Calibri"/>
               </a:rPr>
-              <a:t>Цель 1 (6–12 мес.): 10 платящих клиентов к мес. 3; GMV 25 млн ₽ за год 1; LTV/CAC ≥ 3x к мес. 6</a:t>
+              <a:t>Цель 1 (6–12 мес.): [измеримая цель с цифрой и сроком]</a:t>
             </a:r>
             <a:endParaRPr b="0" lang="en-US" sz="950" spc="-1" strike="noStrike">
               <a:solidFill>
@@ -16730,7 +16730,7 @@
                 <a:latin typeface="Calibri"/>
                 <a:ea typeface="Calibri"/>
               </a:rPr>
-              <a:t>Цель 2 (1–2 года): 200+ клиентов/год; GMV 80–100 млн ₽; pop-up шоурум в Москве</a:t>
+              <a:t>Цель 2 (1–2 года): [измеримая цель с цифрой и сроком]</a:t>
             </a:r>
             <a:endParaRPr b="0" lang="en-US" sz="950" spc="-1" strike="noStrike">
               <a:solidFill>
@@ -16758,7 +16758,7 @@
                 <a:latin typeface="Calibri"/>
                 <a:ea typeface="Calibri"/>
               </a:rPr>
-              <a:t>Цель 3 (3–5 лет): лидер ниши «крупные CVD-украшения» РФ; 10% SOM сегмента; экспансия в СНГ</a:t>
+              <a:t>Цель 3 (3–5 лет): [измеримая цель с цифрой и сроком]</a:t>
             </a:r>
             <a:endParaRPr b="0" lang="en-US" sz="950" spc="-1" strike="noStrike">
               <a:solidFill>
@@ -16786,7 +16786,7 @@
                 <a:latin typeface="Calibri"/>
                 <a:ea typeface="Calibri"/>
               </a:rPr>
-              <a:t>KPI: новые клиенты/мес, GMV, LTV/CAC, Gross Margin, Break-even month, Retention 3 мес.</a:t>
+              <a:t>KPI: [ключевые метрики, по которым отслеживается прогресс]</a:t>
             </a:r>
             <a:endParaRPr b="0" lang="en-US" sz="950" spc="-1" strike="noStrike">
               <a:solidFill>
@@ -19180,7 +19180,7 @@
                 <a:latin typeface="Calibri"/>
                 <a:ea typeface="Calibri"/>
               </a:rPr>
-              <a:t>Источник: Product Discovery Wonder Diamond, апрель 2026</a:t>
+              <a:t>Источник: Product Discovery [название проекта], [месяц год]</a:t>
             </a:r>
             <a:endParaRPr b="0" lang="en-US" sz="800" spc="-1" strike="noStrike">
               <a:solidFill>
@@ -20806,7 +20806,7 @@
                 <a:latin typeface="Calibri"/>
                 <a:ea typeface="Calibri"/>
               </a:rPr>
-              <a:t>Источник: PAC (Product Attribute Canvas); PD WD 2026</a:t>
+              <a:t>Источник: PAC (Product Attribute Canvas); задача 10</a:t>
             </a:r>
             <a:endParaRPr b="0" lang="en-US" sz="800" spc="-1" strike="noStrike">
               <a:solidFill>
@@ -21037,7 +21037,7 @@
                 <a:latin typeface="Calibri"/>
                 <a:ea typeface="Calibri"/>
               </a:rPr>
-              <a:t>Сегмент: Анна 28–42, доход 200K+ ₽/мес. Ситуация: хочет украшение с крупным бриллиантом, но нат. 5ct = 1–5M ₽</a:t>
+              <a:t>Сегмент: [персона, возраст, доход]. Ситуация: [что хочет и что мешает]</a:t>
             </a:r>
             <a:endParaRPr b="0" lang="en-US" sz="950" spc="-1" strike="noStrike">
               <a:solidFill>
@@ -21065,7 +21065,7 @@
                 <a:latin typeface="Calibri"/>
                 <a:ea typeface="Calibri"/>
               </a:rPr>
-              <a:t>Jobs: 1) Купить украшение с крупным бриллиантом 2) Выглядеть дорого и статусно 3) Убедиться в подлинности</a:t>
+              <a:t>Jobs: 1) [работа 1] 2) [работа 2] 3) [работа 3]</a:t>
             </a:r>
             <a:endParaRPr b="0" lang="en-US" sz="950" spc="-1" strike="noStrike">
               <a:solidFill>
@@ -21093,7 +21093,7 @@
                 <a:latin typeface="Calibri"/>
                 <a:ea typeface="Calibri"/>
               </a:rPr>
-              <a:t>ЦП «CVD 6ct+ от производителя с IGI» закрывает все 3 Jobs: доступная цена × размер × сертификат</a:t>
+              <a:t>ЦП «[ценностное предложение]» закрывает Jobs: [чем именно]</a:t>
             </a:r>
             <a:endParaRPr b="0" lang="en-US" sz="950" spc="-1" strike="noStrike">
               <a:solidFill>
@@ -21324,7 +21324,7 @@
                 <a:latin typeface="Calibri"/>
                 <a:ea typeface="Calibri"/>
               </a:rPr>
-              <a:t>IQ Diamonds/EcoDiam: нет камней &gt;3ct. Bright Spark: кастом долго. WD: готовые 6ct+ D2C</a:t>
+              <a:t>[Конкурент 1]: [слабость]. [Конкурент 2]: [слабость]. Мы: [чем отличаемся]</a:t>
             </a:r>
             <a:endParaRPr b="0" lang="en-US" sz="950" spc="-1" strike="noStrike">
               <a:solidFill>
@@ -21352,7 +21352,7 @@
                 <a:latin typeface="Calibri"/>
                 <a:ea typeface="Calibri"/>
               </a:rPr>
-              <a:t>Sunlight: мелкие камни (мах 1ct). SOKOLOV: нат. за 1–5M. WD — нишу 6ct+ за 150–350K никто не занял</a:t>
+              <a:t>[Конкурент 3]: [слабость]. [Конкурент 4]: [слабость]. Незанятая ниша: [описание]</a:t>
             </a:r>
             <a:endParaRPr b="0" lang="en-US" sz="950" spc="-1" strike="noStrike">
               <a:solidFill>
@@ -21380,7 +21380,7 @@
                 <a:latin typeface="Calibri"/>
                 <a:ea typeface="Calibri"/>
               </a:rPr>
-              <a:t>WD закрывает OS=16 «Доступный крупный CVD 6ct+» — ни один игрок D2C этого не делает</a:t>
+              <a:t>Мы закрываем OS=[N] «[outcome]» — [почему конкуренты этого не делают]</a:t>
             </a:r>
             <a:endParaRPr b="0" lang="en-US" sz="950" spc="-1" strike="noStrike">
               <a:solidFill>
@@ -21611,7 +21611,7 @@
                 <a:latin typeface="Calibri"/>
                 <a:ea typeface="Calibri"/>
               </a:rPr>
-              <a:t>Aha: «Это IGI-сертифицированный бриллиант 6ct за 295K вместо 3M ₽» — момент сравнения цены</a:t>
+              <a:t>Aha: «[что клиент осознаёт]» — [в какой момент это происходит]</a:t>
             </a:r>
             <a:endParaRPr b="0" lang="en-US" sz="950" spc="-1" strike="noStrike">
               <a:solidFill>
@@ -21639,7 +21639,7 @@
                 <a:latin typeface="Calibri"/>
                 <a:ea typeface="Calibri"/>
               </a:rPr>
-              <a:t>Покупка → распаковка (фирм. упаковка) → контент «моё новое украшение» → реферальный бонус 5%</a:t>
+              <a:t>[Шаг 1] → [шаг 2] → [шаг 3] → [петля роста]</a:t>
             </a:r>
             <a:endParaRPr b="0" lang="en-US" sz="950" spc="-1" strike="noStrike">
               <a:solidFill>
@@ -21870,7 +21870,7 @@
                 <a:latin typeface="Calibri"/>
                 <a:ea typeface="Calibri"/>
               </a:rPr>
-              <a:t>Фича 1: Линейка Classic 6ct+ → «Когда хочу заметное украшение, беру пусеты 6ct, чтобы не платить 2M ₽»</a:t>
+              <a:t>Фича 1: [название] → «Когда [ситуация], я [действие], чтобы [результат]»</a:t>
             </a:r>
             <a:endParaRPr b="0" lang="en-US" sz="950" spc="-1" strike="noStrike">
               <a:solidFill>
@@ -21898,7 +21898,7 @@
                 <a:latin typeface="Calibri"/>
                 <a:ea typeface="Calibri"/>
               </a:rPr>
-              <a:t>Фича 2: Price-calculator: «WD vs натуральный аналог» — визуализирует экономию</a:t>
+              <a:t>Фича 2: [название] — [какую работу закрывает]</a:t>
             </a:r>
             <a:endParaRPr b="0" lang="en-US" sz="950" spc="-1" strike="noStrike">
               <a:solidFill>
@@ -21926,7 +21926,7 @@
                 <a:latin typeface="Calibri"/>
                 <a:ea typeface="Calibri"/>
               </a:rPr>
-              <a:t>Фича 3: Программа апгрейда камня через 12 мес. — удержание + рост LTV</a:t>
+              <a:t>Фича 3: [название] — [какую работу закрывает]</a:t>
             </a:r>
             <a:endParaRPr b="0" lang="en-US" sz="950" spc="-1" strike="noStrike">
               <a:solidFill>
@@ -22232,7 +22232,7 @@
                 <a:latin typeface="Calibri"/>
                 <a:ea typeface="Calibri"/>
               </a:rPr>
-              <a:t>Источник: PD WD 2026</a:t>
+              <a:t>Источник: задача 11 (SWOT), с опорой на задачи 2 и 3</a:t>
             </a:r>
             <a:endParaRPr b="0" lang="en-US" sz="800" spc="-1" strike="noStrike">
               <a:solidFill>
@@ -22453,7 +22453,7 @@
                 <a:latin typeface="Calibri"/>
                 <a:ea typeface="Calibri"/>
               </a:rPr>
-              <a:t>Собственное производство Wonder Technology — контроль COGS, D2C</a:t>
+              <a:t>[Сильная сторона 1]</a:t>
             </a:r>
             <a:endParaRPr b="0" lang="en-US" sz="950" spc="-1" strike="noStrike">
               <a:solidFill>
@@ -22481,7 +22481,7 @@
                 <a:latin typeface="Calibri"/>
                 <a:ea typeface="Calibri"/>
               </a:rPr>
-              <a:t>Специализация на CVD 6ct+ — нет аналогов на рынке РФ (white space)</a:t>
+              <a:t>[Сильная сторона 2]</a:t>
             </a:r>
             <a:endParaRPr b="0" lang="en-US" sz="950" spc="-1" strike="noStrike">
               <a:solidFill>
@@ -22509,7 +22509,7 @@
                 <a:latin typeface="Calibri"/>
                 <a:ea typeface="Calibri"/>
               </a:rPr>
-              <a:t>D2C без посредников → Gross Margin 65% (vs 30–40% у магазинов)</a:t>
+              <a:t>[Сильная сторона 3]</a:t>
             </a:r>
             <a:endParaRPr b="0" lang="en-US" sz="950" spc="-1" strike="noStrike">
               <a:solidFill>
@@ -22537,7 +22537,7 @@
                 <a:latin typeface="Calibri"/>
                 <a:ea typeface="Calibri"/>
               </a:rPr>
-              <a:t>IGI-сертификация — международный стандарт, устраняет барьер доверия</a:t>
+              <a:t>[Сильная сторона 4]</a:t>
             </a:r>
             <a:endParaRPr b="0" lang="en-US" sz="950" spc="-1" strike="noStrike">
               <a:solidFill>
@@ -22758,7 +22758,7 @@
                 <a:latin typeface="Calibri"/>
                 <a:ea typeface="Calibri"/>
               </a:rPr>
-              <a:t>Нет клиентов и выручки — MVP стадия</a:t>
+              <a:t>[Слабая сторона 1]</a:t>
             </a:r>
             <a:endParaRPr b="0" lang="en-US" sz="950" spc="-1" strike="noStrike">
               <a:solidFill>
@@ -22786,7 +22786,7 @@
                 <a:latin typeface="Calibri"/>
                 <a:ea typeface="Calibri"/>
               </a:rPr>
-              <a:t>Нет физического шоурума — барьер для покупки 200K+ ₽ онлайн</a:t>
+              <a:t>[Слабая сторона 2]</a:t>
             </a:r>
             <a:endParaRPr b="0" lang="en-US" sz="950" spc="-1" strike="noStrike">
               <a:solidFill>
@@ -22814,7 +22814,7 @@
                 <a:latin typeface="Calibri"/>
                 <a:ea typeface="Calibri"/>
               </a:rPr>
-              <a:t>LTV/CAC = 1.84x в базовом — ниже порога 3x для pre-seed</a:t>
+              <a:t>[Слабая сторона 3]</a:t>
             </a:r>
             <a:endParaRPr b="0" lang="en-US" sz="950" spc="-1" strike="noStrike">
               <a:solidFill>
@@ -23035,7 +23035,7 @@
                 <a:latin typeface="Calibri"/>
                 <a:ea typeface="Calibri"/>
               </a:rPr>
-              <a:t>CVD занял 20% глобального рынка — категория легитимизирована</a:t>
+              <a:t>[Возможность 1 — из трендов, задача 2]</a:t>
             </a:r>
             <a:endParaRPr b="0" lang="en-US" sz="950" spc="-1" strike="noStrike">
               <a:solidFill>
@@ -23063,7 +23063,7 @@
                 <a:latin typeface="Calibri"/>
                 <a:ea typeface="Calibri"/>
               </a:rPr>
-              <a:t>E-commerce ювелирки → 35% к 2026 — попутный ветер онлайн-модели</a:t>
+              <a:t>[Возможность 2 — из трендов, задача 2]</a:t>
             </a:r>
             <a:endParaRPr b="0" lang="en-US" sz="950" spc="-1" strike="noStrike">
               <a:solidFill>
@@ -23091,7 +23091,7 @@
                 <a:latin typeface="Calibri"/>
                 <a:ea typeface="Calibri"/>
               </a:rPr>
-              <a:t>Ниша 6ct+ свободна: ни Sunlight, ни SOKOLOV, ни IQ Diamonds не предлагают</a:t>
+              <a:t>[Возможность 3 — из конкурентного ландшафта, задача 3]</a:t>
             </a:r>
             <a:endParaRPr b="0" lang="en-US" sz="950" spc="-1" strike="noStrike">
               <a:solidFill>
@@ -23312,7 +23312,7 @@
                 <a:latin typeface="Calibri"/>
                 <a:ea typeface="Calibri"/>
               </a:rPr>
-              <a:t>Sunlight может запустить крупные CVD в Cold Diamonds — ценовая война</a:t>
+              <a:t>[Угроза 1 — от конкурентов]</a:t>
             </a:r>
             <a:endParaRPr b="0" lang="en-US" sz="950" spc="-1" strike="noStrike">
               <a:solidFill>
@@ -23340,7 +23340,7 @@
                 <a:latin typeface="Calibri"/>
                 <a:ea typeface="Calibri"/>
               </a:rPr>
-              <a:t>ГИИС ДМДК (334-ФЗ с 01.03.2026) — compliance обязателен, риск стопа продаж</a:t>
+              <a:t>[Угроза 2 — регуляторная, из PESTEL]</a:t>
             </a:r>
             <a:endParaRPr b="0" lang="en-US" sz="950" spc="-1" strike="noStrike">
               <a:solidFill>
@@ -23368,7 +23368,7 @@
                 <a:latin typeface="Calibri"/>
                 <a:ea typeface="Calibri"/>
               </a:rPr>
-              <a:t>Стигма «синтетика» у аудитории 45+ ограничивает addressable market</a:t>
+              <a:t>[Угроза 3 — рыночная или поведенческая]</a:t>
             </a:r>
             <a:endParaRPr b="0" lang="en-US" sz="950" spc="-1" strike="noStrike">
               <a:solidFill>
@@ -24951,7 +24951,7 @@
                 <a:latin typeface="Calibri"/>
                 <a:ea typeface="Calibri"/>
               </a:rPr>
-              <a:t>Источник: Финансовая модель Wonder Diamond 2026, базовый сценарий</a:t>
+              <a:t>Источник: финансовая модель (задача 18c), базовый сценарий</a:t>
             </a:r>
             <a:endParaRPr b="0" lang="en-US" sz="800" spc="-1" strike="noStrike">
               <a:solidFill>
@@ -25113,7 +25113,7 @@
                 <a:latin typeface="Calibri"/>
                 <a:ea typeface="Calibri"/>
               </a:rPr>
-              <a:t>184 000 ₽</a:t>
+              <a:t>[X ₽]</a:t>
             </a:r>
             <a:endParaRPr b="0" lang="en-US" sz="2800" spc="-1" strike="noStrike">
               <a:solidFill>
@@ -25332,7 +25332,7 @@
                 <a:latin typeface="Calibri"/>
                 <a:ea typeface="Calibri"/>
               </a:rPr>
-              <a:t>100 000 ₽</a:t>
+              <a:t>[Y ₽]</a:t>
             </a:r>
             <a:endParaRPr b="0" lang="en-US" sz="2800" spc="-1" strike="noStrike">
               <a:solidFill>
@@ -25551,7 +25551,7 @@
                 <a:latin typeface="Calibri"/>
                 <a:ea typeface="Calibri"/>
               </a:rPr>
-              <a:t>1.84x ⚠️</a:t>
+              <a:t>[N.Nx]</a:t>
             </a:r>
             <a:endParaRPr b="0" lang="en-US" sz="2800" spc="-1" strike="noStrike">
               <a:solidFill>
@@ -25829,7 +25829,7 @@
                 <a:latin typeface="Calibri"/>
                 <a:ea typeface="Calibri"/>
               </a:rPr>
-              <a:t>Payback period: ~5 мес. базовый | ~2 мес. оптимист (при CAC=50K ₽)</a:t>
+              <a:t>Payback period: [N] мес. базовый | [N] мес. оптимист</a:t>
             </a:r>
             <a:endParaRPr b="0" lang="en-US" sz="950" spc="-1" strike="noStrike">
               <a:solidFill>
@@ -25857,7 +25857,7 @@
                 <a:latin typeface="Calibri"/>
                 <a:ea typeface="Calibri"/>
               </a:rPr>
-              <a:t>Runway: ~5 мес. при burn rate 400K ₽/мес и капитале 2M ₽ (требуется pre-seed)</a:t>
+              <a:t>Runway: [N] мес. при burn rate [X ₽]/мес и капитале [Y ₽]</a:t>
             </a:r>
             <a:endParaRPr b="0" lang="en-US" sz="950" spc="-1" strike="noStrike">
               <a:solidFill>
@@ -25885,7 +25885,7 @@
                 <a:latin typeface="Calibri"/>
                 <a:ea typeface="Calibri"/>
               </a:rPr>
-              <a:t>Break-even: мес. 4 базовый | мес. 2–3 оптимист — накопленный P&amp;L ≥ 0</a:t>
+              <a:t>Break-even: мес. [N] базовый | мес. [N] оптимист — накопленный P&amp;L ≥ 0</a:t>
             </a:r>
             <a:endParaRPr b="0" lang="en-US" sz="950" spc="-1" strike="noStrike">
               <a:solidFill>
@@ -25913,7 +25913,7 @@
                 <a:latin typeface="Calibri"/>
                 <a:ea typeface="Calibri"/>
               </a:rPr>
-              <a:t>Gross Margin: 65% | COGS: 35% (CVD 10% + золото 15% + производство 10%)</a:t>
+              <a:t>Gross Margin: [X%] | COGS: [Y%] ([структура себестоимости])</a:t>
             </a:r>
             <a:endParaRPr b="0" lang="en-US" sz="950" spc="-1" strike="noStrike">
               <a:solidFill>
@@ -26419,7 +26419,7 @@
                 <a:latin typeface="Calibri"/>
                 <a:ea typeface="Calibri"/>
               </a:rPr>
-              <a:t>Источник: OST (Teresa Torres); PD WD 2026</a:t>
+              <a:t>Источник: OST (Teresa Torres); задача 12</a:t>
             </a:r>
             <a:endParaRPr b="0" lang="en-US" sz="800" spc="-1" strike="noStrike">
               <a:solidFill>
@@ -26589,7 +26589,7 @@
                 <a:latin typeface="Calibri"/>
                 <a:ea typeface="Calibri"/>
               </a:rPr>
-              <a:t>GMV 25 млн ₽ за 12 мес. | 10 платящих клиентов к мес. 3 | LTV/CAC ≥ 3x к мес. 6</a:t>
+              <a:t>[Измеримая бизнес-цель: метрика, текущее → целевое значение, срок]</a:t>
             </a:r>
             <a:endParaRPr b="0" lang="en-US" sz="900" spc="-1" strike="noStrike">
               <a:solidFill>
@@ -26844,7 +26844,7 @@
                 <a:latin typeface="Calibri"/>
                 <a:ea typeface="Calibri"/>
               </a:rPr>
-              <a:t>Доступный CVD 6ct+ | OS=16 🔴 Приоритет</a:t>
+              <a:t>[Возможность 1 из задачи 7] | OS=[N] 🔴 Приоритет</a:t>
             </a:r>
             <a:endParaRPr b="0" lang="en-US" sz="800" spc="-1" strike="noStrike">
               <a:solidFill>
@@ -27058,7 +27058,7 @@
                 <a:latin typeface="Calibri"/>
                 <a:ea typeface="Calibri"/>
               </a:rPr>
-              <a:t>Уверенность в подлинности (IGI) | OS=15</a:t>
+              <a:t>[Возможность 2 из задачи 7] | OS=[N]</a:t>
             </a:r>
             <a:endParaRPr b="0" lang="en-US" sz="800" spc="-1" strike="noStrike">
               <a:solidFill>
@@ -27272,7 +27272,7 @@
                 <a:latin typeface="Calibri"/>
                 <a:ea typeface="Calibri"/>
               </a:rPr>
-              <a:t>Социальный сигнал «смотрится дорого» | OS=14</a:t>
+              <a:t>[Возможность 3 из задачи 7] | OS=[N]</a:t>
             </a:r>
             <a:endParaRPr b="0" lang="en-US" sz="800" spc="-1" strike="noStrike">
               <a:solidFill>
@@ -27510,7 +27510,7 @@
                 <a:latin typeface="Calibri"/>
                 <a:ea typeface="Calibri"/>
               </a:rPr>
-              <a:t>Готовая линейка Classic: пусеты 6ct, кольца 3ct, подвески 3ct с IGI</a:t>
+              <a:t>[Решение A: что именно строим и для кого]</a:t>
             </a:r>
             <a:endParaRPr b="0" lang="en-US" sz="850" spc="-1" strike="noStrike">
               <a:solidFill>
@@ -27683,7 +27683,7 @@
                 <a:latin typeface="Calibri"/>
                 <a:ea typeface="Calibri"/>
               </a:rPr>
-              <a:t>Smoke Test: Instagram «6ct за 295K», 50K ₽, 7 дней, CTR ≥ 2%</a:t>
+              <a:t>[Метод], [бюджет], [срок], критерий [метрика ≥ значение]</a:t>
             </a:r>
             <a:endParaRPr b="0" lang="en-US" sz="750" spc="-1" strike="noStrike">
               <a:solidFill>
@@ -27815,7 +27815,7 @@
                 <a:latin typeface="Calibri"/>
                 <a:ea typeface="Calibri"/>
               </a:rPr>
-              <a:t>Price-calculator на сайте: «WD 6ct vs натуральный аналог» — экономия в ₽</a:t>
+              <a:t>[Решение B: что именно строим и для кого]</a:t>
             </a:r>
             <a:endParaRPr b="0" lang="en-US" sz="850" spc="-1" strike="noStrike">
               <a:solidFill>
@@ -27988,7 +27988,7 @@
                 <a:latin typeface="Calibri"/>
                 <a:ea typeface="Calibri"/>
               </a:rPr>
-              <a:t>Pre-sale: 5 заявок через Telegram за 2 нед., 0 ₽</a:t>
+              <a:t>[Метод], [бюджет], [срок], критерий [метрика ≥ значение]</a:t>
             </a:r>
             <a:endParaRPr b="0" lang="en-US" sz="750" spc="-1" strike="noStrike">
               <a:solidFill>
@@ -28120,7 +28120,7 @@
                 <a:latin typeface="Calibri"/>
                 <a:ea typeface="Calibri"/>
               </a:rPr>
-              <a:t>Программа апгрейда камня через 12 мес. — retention + LTV</a:t>
+              <a:t>[Решение C: что именно строим и для кого]</a:t>
             </a:r>
             <a:endParaRPr b="0" lang="en-US" sz="850" spc="-1" strike="noStrike">
               <a:solidFill>
@@ -28293,7 +28293,7 @@
                 <a:latin typeface="Calibri"/>
                 <a:ea typeface="Calibri"/>
               </a:rPr>
-              <a:t>Wizard of Oz: ручная «подписка на апгрейд» для первых 20</a:t>
+              <a:t>[Метод], [бюджет], [срок], критерий [метрика ≥ значение]</a:t>
             </a:r>
             <a:endParaRPr b="0" lang="en-US" sz="750" spc="-1" strike="noStrike">
               <a:solidFill>
@@ -30304,7 +30304,7 @@
                 <a:latin typeface="Calibri"/>
                 <a:ea typeface="Calibri"/>
               </a:rPr>
-              <a:t>Источник: Альтернативный сценарий — гибридная модель (D2C online + pop-up showroom)</a:t>
+              <a:t>Источник: альтернативный сценарий из задачи 13; скоринг из задачи 14</a:t>
             </a:r>
             <a:endParaRPr b="0" lang="en-US" sz="800" spc="-1" strike="noStrike">
               <a:solidFill>
@@ -30679,7 +30679,7 @@
                 <a:latin typeface="Calibri"/>
                 <a:ea typeface="Calibri"/>
               </a:rPr>
-              <a:t>Анна 28–42, доход 200K+, МСК/СПб, onlineonly</a:t>
+              <a:t>[Сегмент в текущем сценарии]</a:t>
             </a:r>
             <a:endParaRPr b="0" lang="en-US" sz="950" spc="-1" strike="noStrike">
               <a:solidFill>
@@ -30785,7 +30785,7 @@
                 <a:latin typeface="Calibri"/>
                 <a:ea typeface="Calibri"/>
               </a:rPr>
-              <a:t>+ Анна 28–50 (до 50 лет с расширением); MСК/СПб/Казань/Екб; готова посетить pop-up для покупки 200K+</a:t>
+              <a:t>[Сегмент в альтернативном сценарии — что меняется]</a:t>
             </a:r>
             <a:endParaRPr b="0" lang="en-US" sz="950" spc="-1" strike="noStrike">
               <a:solidFill>
@@ -31005,7 +31005,7 @@
                 <a:latin typeface="Calibri"/>
                 <a:ea typeface="Calibri"/>
               </a:rPr>
-              <a:t>«CVD 6ct+ онлайн напрямую от производителя — в 10–50× дешевле»</a:t>
+              <a:t>«[Ценностное предложение в текущем сценарии]»</a:t>
             </a:r>
             <a:endParaRPr b="0" lang="en-US" sz="950" spc="-1" strike="noStrike">
               <a:solidFill>
@@ -31111,7 +31111,7 @@
                 <a:latin typeface="Calibri"/>
                 <a:ea typeface="Calibri"/>
               </a:rPr>
-              <a:t>«CVD 6ct+ онлайн или в нашем pop-up шоуруме Москвы — примерь до покупки; IGI-сертификат»</a:t>
+              <a:t>«[Ценностное предложение в альтернативном сценарии]»</a:t>
             </a:r>
             <a:endParaRPr b="0" lang="en-US" sz="950" spc="-1" strike="noStrike">
               <a:solidFill>
@@ -31331,7 +31331,7 @@
                 <a:latin typeface="Calibri"/>
                 <a:ea typeface="Calibri"/>
               </a:rPr>
-              <a:t>Купить украшение с крупным бриллиантом онлайн без физической примерки</a:t>
+              <a:t>[Job-to-be-Done в текущем сценарии]</a:t>
             </a:r>
             <a:endParaRPr b="0" lang="en-US" sz="950" spc="-1" strike="noStrike">
               <a:solidFill>
@@ -31437,7 +31437,7 @@
                 <a:latin typeface="Calibri"/>
                 <a:ea typeface="Calibri"/>
               </a:rPr>
-              <a:t>Купить или примерить украшение с крупным бриллиантом, снизив риск онлайн-покупки 200K+ через шоурум</a:t>
+              <a:t>[Job-to-be-Done в альтернативном сценарии]</a:t>
             </a:r>
             <a:endParaRPr b="0" lang="en-US" sz="950" spc="-1" strike="noStrike">
               <a:solidFill>
@@ -31657,7 +31657,7 @@
                 <a:latin typeface="Calibri"/>
                 <a:ea typeface="Calibri"/>
               </a:rPr>
-              <a:t>Разовые продажи онлайн, средний чек 250K ₽</a:t>
+              <a:t>[Бизнес-модель в текущем сценарии: монетизация, чек]</a:t>
             </a:r>
             <a:endParaRPr b="0" lang="en-US" sz="950" spc="-1" strike="noStrike">
               <a:solidFill>
@@ -31763,7 +31763,7 @@
                 <a:latin typeface="Calibri"/>
                 <a:ea typeface="Calibri"/>
               </a:rPr>
-              <a:t>Разовые продажи + pop-up со встречей → средний чек 300K+ (upsell при личной консультации); LTV растёт на 20–30%</a:t>
+              <a:t>[Бизнес-модель в альтернативном сценарии: что меняется в экономике]</a:t>
             </a:r>
             <a:endParaRPr b="0" lang="en-US" sz="950" spc="-1" strike="noStrike">
               <a:solidFill>
@@ -32126,7 +32126,7 @@
                 <a:latin typeface="Calibri"/>
                 <a:ea typeface="Calibri"/>
               </a:rPr>
-              <a:t>Источник: RICE = (Reach × Impact × Confidence) / Effort; PD WD 2026</a:t>
+              <a:t>Источник: RICE = (Reach × Impact × Confidence) / Effort; задача 14</a:t>
             </a:r>
             <a:endParaRPr b="0" lang="en-US" sz="800" spc="-1" strike="noStrike">
               <a:solidFill>
@@ -32925,7 +32925,7 @@
                 <a:latin typeface="Calibri"/>
                 <a:ea typeface="Calibri"/>
               </a:rPr>
-              <a:t>Возможность A: Доступный крупный CVD 6ct+ (OS=16) | R=400 (лидов/мес) × I=3 × C=0.7 / E=2 = 420 | 🔴 ТОП</a:t>
+              <a:t>Возможность A: [название] (OS=[N]) | R=[охват] × I=[impact] × C=[conf] / E=[effort] = [score] | 🔴 ТОП</a:t>
             </a:r>
             <a:endParaRPr b="0" lang="en-US" sz="850" spc="-1" strike="noStrike">
               <a:solidFill>
@@ -33561,7 +33561,7 @@
                 <a:latin typeface="Calibri"/>
                 <a:ea typeface="Calibri"/>
               </a:rPr>
-              <a:t>Возможность B: Уверенность в подлинности через IGI (OS=15) | R=400 × I=2 × C=0.9 / E=1 = 720 | 🟠 ВЫСОКИЙ</a:t>
+              <a:t>Возможность B: [название] (OS=[N]) | R=[охват] × I=[impact] × C=[conf] / E=[effort] = [score] | 🟠 ВЫСОКИЙ</a:t>
             </a:r>
             <a:endParaRPr b="0" lang="en-US" sz="850" spc="-1" strike="noStrike">
               <a:solidFill>
@@ -34197,7 +34197,7 @@
                 <a:latin typeface="Calibri"/>
                 <a:ea typeface="Calibri"/>
               </a:rPr>
-              <a:t>Возможность C: «Смотрится дорого» — соц. сигнал (OS=14) | R=300 × I=2 × C=0.5 / E=3 = 100 | 🟡 СРЕДНИЙ</a:t>
+              <a:t>Возможность C: [название] (OS=[N]) | R=[охват] × I=[impact] × C=[conf] / E=[effort] = [score] | 🟡 СРЕДНИЙ</a:t>
             </a:r>
             <a:endParaRPr b="0" lang="en-US" sz="850" spc="-1" strike="noStrike">
               <a:solidFill>
@@ -35260,7 +35260,7 @@
                 <a:latin typeface="Calibri"/>
                 <a:ea typeface="Calibri"/>
               </a:rPr>
-              <a:t>Источник: Ассоциация ювелиров РФ 2025; INFOLine 2025</a:t>
+              <a:t>Источник: [отраслевые отчёты и статистика по рынку — задачи 1, 5]</a:t>
             </a:r>
             <a:endParaRPr b="0" lang="en-US" sz="800" spc="-1" strike="noStrike">
               <a:solidFill>
@@ -35480,7 +35480,7 @@
                 <a:latin typeface="Calibri"/>
                 <a:ea typeface="Calibri"/>
               </a:rPr>
-              <a:t>539 млрд ₽</a:t>
+              <a:t>[X млрд ₽]</a:t>
             </a:r>
             <a:endParaRPr b="0" lang="en-US" sz="1900" spc="-1" strike="noStrike">
               <a:solidFill>
@@ -35700,7 +35700,7 @@
                 <a:latin typeface="Calibri"/>
                 <a:ea typeface="Calibri"/>
               </a:rPr>
-              <a:t>2,1 млрд ₽</a:t>
+              <a:t>[Y млрд ₽]</a:t>
             </a:r>
             <a:endParaRPr b="0" lang="en-US" sz="1900" spc="-1" strike="noStrike">
               <a:solidFill>
@@ -35920,7 +35920,7 @@
                 <a:latin typeface="Calibri"/>
                 <a:ea typeface="Calibri"/>
               </a:rPr>
-              <a:t>50 млн ₽</a:t>
+              <a:t>[Z млн ₽]</a:t>
             </a:r>
             <a:endParaRPr b="0" lang="en-US" sz="1900" spc="-1" strike="noStrike">
               <a:solidFill>
@@ -35977,7 +35977,7 @@
                 <a:latin typeface="Calibri"/>
                 <a:ea typeface="Calibri"/>
               </a:rPr>
-              <a:t>Top-down: 539B × 15% премиум × 5% CVD × 26% онлайн = 2,1 млрд ₽. Bottom-up: 300K покупателей × 0,4 × 250K × 7% = 2,1 млрд ₽. Расхождение 1× ✅</a:t>
+              <a:t>Top-down: [расчёт по доле сегмента] = [Y]. Bottom-up: [клиенты × чек × частота] = [Y]. Расхождение [N]× [✅ / ⚠️ пересмотреть допущения]</a:t>
             </a:r>
             <a:endParaRPr b="0" lang="en-US" sz="850" spc="-1" strike="noStrike">
               <a:solidFill>
@@ -38021,7 +38021,7 @@
                 <a:latin typeface="Calibri"/>
                 <a:ea typeface="Calibri"/>
               </a:rPr>
-              <a:t>Источник: Sean Ellis Test; PMF-пороги Superhuman; benchmarks (a16z, b2b SaaS); PD WD 2026</a:t>
+              <a:t>Источник: Sean Ellis Test; отраслевые бенчмарки (a16z, B2B SaaS); задача 17</a:t>
             </a:r>
             <a:endParaRPr b="0" lang="en-US" sz="800" spc="-1" strike="noStrike">
               <a:solidFill>
@@ -40594,7 +40594,7 @@
                 <a:latin typeface="Calibri"/>
                 <a:ea typeface="Calibri"/>
               </a:rPr>
-              <a:t>Sean Ellis Test (для WD): «Как вы себя почувствуете, если Wonder Diamond больше не сможете заказывать?» → цель ≥ 40% «очень разочарован(а)» после 10-20 первых продаж</a:t>
+              <a:t>Sean Ellis Test: «Как вы себя почувствуете, если [продукт] станет недоступен?» → цель ≥ 40% «очень разочарован(а)» после 10–20 первых продаж</a:t>
             </a:r>
             <a:endParaRPr b="0" lang="en-US" sz="850" spc="-1" strike="noStrike">
               <a:solidFill>
@@ -45142,7 +45142,7 @@
                 <a:latin typeface="Calibri"/>
                 <a:ea typeface="Calibri"/>
               </a:rPr>
-              <a:t>5–7 глубинных интервью (The Mom Test) с ЦА «Анна» за 2 нед. Цель: 5/7 подтверждают боль. 0 ₽</a:t>
+              <a:t>5–7 глубинных интервью (The Mom Test) с [сегмент] за [срок]. Цель: [N/M] подтверждают боль. [бюджет]</a:t>
             </a:r>
             <a:endParaRPr b="0" lang="en-US" sz="900" spc="-1" strike="noStrike">
               <a:solidFill>
@@ -45362,7 +45362,7 @@
                 <a:latin typeface="Calibri"/>
                 <a:ea typeface="Calibri"/>
               </a:rPr>
-              <a:t>Smoke Test Instagram: «6ct за 295K vs нат. за 3M». 50 000 ₽, 7 дней. CTR ≥ 2%</a:t>
+              <a:t>Smoke Test [канал]: «[оффер]». [бюджет], [срок]. Критерий: [метрика ≥ значение]</a:t>
             </a:r>
             <a:endParaRPr b="0" lang="en-US" sz="900" spc="-1" strike="noStrike">
               <a:solidFill>
@@ -45582,7 +45582,7 @@
                 <a:latin typeface="Calibri"/>
                 <a:ea typeface="Calibri"/>
               </a:rPr>
-              <a:t>Опрос 30–50 респондентов на лендинге WD после «Что такое CVD» — верификация OS</a:t>
+              <a:t>Опрос 30–50 респондентов [канал сбора] — верификация OS из задачи 7</a:t>
             </a:r>
             <a:endParaRPr b="0" lang="en-US" sz="900" spc="-1" strike="noStrike">
               <a:solidFill>
@@ -45802,7 +45802,7 @@
                 <a:latin typeface="Calibri"/>
                 <a:ea typeface="Calibri"/>
               </a:rPr>
-              <a:t>Приоритет: «Доступный CVD 6ct+» (OS=16). Решения: линейка Classic + price-calculator</a:t>
+              <a:t>Приоритет: «[возможность]» (OS=[N]). Решения: [решение 1] + [решение 2]</a:t>
             </a:r>
             <a:endParaRPr b="0" lang="en-US" sz="900" spc="-1" strike="noStrike">
               <a:solidFill>
@@ -46022,7 +46022,7 @@
                 <a:latin typeface="Calibri"/>
                 <a:ea typeface="Calibri"/>
               </a:rPr>
-              <a:t>Value Validation после 10 продаж: Sean Ellis Test («если WD исчез?» ≥ 40% очень разочарованы)</a:t>
+              <a:t>Value Validation после [N] продаж: Sean Ellis Test (цель ≥ 40% «очень разочарованы»)</a:t>
             </a:r>
             <a:endParaRPr b="0" lang="en-US" sz="900" spc="-1" strike="noStrike">
               <a:solidFill>
@@ -46079,7 +46079,7 @@
                 <a:latin typeface="Calibri"/>
                 <a:ea typeface="Calibri"/>
               </a:rPr>
-              <a:t>Wonder Diamond  ·  wonderdiamond.ru  ·  Апрель 2026</a:t>
+              <a:t>[Название проекта]  ·  [сайт]  ·  [месяц год]</a:t>
             </a:r>
             <a:endParaRPr b="0" lang="en-US" sz="800" spc="-1" strike="noStrike">
               <a:solidFill>
@@ -46385,7 +46385,7 @@
                 <a:latin typeface="Calibri"/>
                 <a:ea typeface="Calibri"/>
               </a:rPr>
-              <a:t>Источник: INFOLine 2025; Sokolov Analytics; Ассоциация ювелиров</a:t>
+              <a:t>Источник: [источники по динамике и прогнозу рынка — задача 1]</a:t>
             </a:r>
             <a:endParaRPr b="0" lang="en-US" sz="800" spc="-1" strike="noStrike">
               <a:solidFill>
@@ -46766,7 +46766,7 @@
                 <a:latin typeface="Calibri"/>
                 <a:ea typeface="Calibri"/>
               </a:rPr>
-              <a:t>15–17%</a:t>
+              <a:t>[X–Y%]</a:t>
             </a:r>
             <a:endParaRPr b="0" lang="en-US" sz="2800" spc="-1" strike="noStrike">
               <a:solidFill>
@@ -46985,7 +46985,7 @@
                 <a:latin typeface="Calibri"/>
                 <a:ea typeface="Calibri"/>
               </a:rPr>
-              <a:t>6 ключевых</a:t>
+              <a:t>[N] ключевых</a:t>
             </a:r>
             <a:endParaRPr b="0" lang="en-US" sz="2800" spc="-1" strike="noStrike">
               <a:solidFill>
@@ -47263,7 +47263,7 @@
                 <a:latin typeface="Calibri"/>
                 <a:ea typeface="Calibri"/>
               </a:rPr>
-              <a:t>CAGR 15–17%/год за 2023–2025. Источник: INFOLine, Ассоциация ювелиров РФ</a:t>
+              <a:t>CAGR [X–Y%]/год за [период]. Источник: [источник]</a:t>
             </a:r>
             <a:endParaRPr b="0" lang="en-US" sz="950" spc="-1" strike="noStrike">
               <a:solidFill>
@@ -47291,7 +47291,7 @@
                 <a:latin typeface="Calibri"/>
                 <a:ea typeface="Calibri"/>
               </a:rPr>
-              <a:t>Прогноз: 2026: 620 млрд ₽ → 2028: ~850 млрд (при сохранении 16% CAGR)</a:t>
+              <a:t>Прогноз: [год]: [объём] → [год]: [объём] (при сохранении [Z%] CAGR)</a:t>
             </a:r>
             <a:endParaRPr b="0" lang="en-US" sz="950" spc="-1" strike="noStrike">
               <a:solidFill>
@@ -47319,7 +47319,7 @@
                 <a:latin typeface="Calibri"/>
                 <a:ea typeface="Calibri"/>
               </a:rPr>
-              <a:t>Драйверы: рост цены золота (+45%), e-commerce +35%, премиализация, CVD занял 20% рынка</a:t>
+              <a:t>Драйверы: [драйвер 1], [драйвер 2], [драйвер 3]</a:t>
             </a:r>
             <a:endParaRPr b="0" lang="en-US" sz="950" spc="-1" strike="noStrike">
               <a:solidFill>
@@ -47347,7 +47347,7 @@
                 <a:latin typeface="Calibri"/>
                 <a:ea typeface="Calibri"/>
               </a:rPr>
-              <a:t>Риски: высокая ключевая ставка ЦБ, падение покуп. способности, падение RAPI натуральных −10%</a:t>
+              <a:t>Риски: [риск 1], [риск 2], [риск 3]</a:t>
             </a:r>
             <a:endParaRPr b="0" lang="en-US" sz="950" spc="-1" strike="noStrike">
               <a:solidFill>
@@ -47653,7 +47653,7 @@
                 <a:latin typeface="Calibri"/>
                 <a:ea typeface="Calibri"/>
               </a:rPr>
-              <a:t>Источник: Ассоциация ювелиров 2025; INFOLine; Financial Times; Sokolov</a:t>
+              <a:t>Источник: [источники по трендам — задача 2]</a:t>
             </a:r>
             <a:endParaRPr b="0" lang="en-US" sz="800" spc="-1" strike="noStrike">
               <a:solidFill>
@@ -47874,7 +47874,7 @@
                 <a:latin typeface="Calibri"/>
                 <a:ea typeface="Calibri"/>
               </a:rPr>
-              <a:t>CVD занял ~20% бриллиантового рынка глобально (было 0% в 2015) — категория легитимизируется. Снижает барьер недоверия для новых CVD-брендов</a:t>
+              <a:t>[Технологический тренд: суть, цифра с источником, следствие для продукта]</a:t>
             </a:r>
             <a:endParaRPr b="0" lang="en-US" sz="950" spc="-1" strike="noStrike">
               <a:solidFill>
@@ -48095,7 +48095,7 @@
                 <a:latin typeface="Calibri"/>
                 <a:ea typeface="Calibri"/>
               </a:rPr>
-              <a:t>E-commerce ювелирки растёт: 26% → 35% к 2026 (Sokolov). Премиализация: доля украшений с камнями 42% → 45–50% (Ювелир.INFO)</a:t>
+              <a:t>[Поведенческий тренд: суть, цифра с источником, следствие для продукта]</a:t>
             </a:r>
             <a:endParaRPr b="0" lang="en-US" sz="950" spc="-1" strike="noStrike">
               <a:solidFill>
@@ -48316,7 +48316,7 @@
                 <a:latin typeface="Calibri"/>
                 <a:ea typeface="Calibri"/>
               </a:rPr>
-              <a:t>Закон 334-ФЗ (с 01.03.2026): реестр объектов розницы в ГИИС ДМДК. Обязательная 2D-маркировка (с сент. 2025)</a:t>
+              <a:t>[Регуляторный тренд: норма, дата вступления, следствие для продукта]</a:t>
             </a:r>
             <a:endParaRPr b="0" lang="en-US" sz="950" spc="-1" strike="noStrike">
               <a:solidFill>
@@ -48537,7 +48537,7 @@
                 <a:latin typeface="Calibri"/>
                 <a:ea typeface="Calibri"/>
               </a:rPr>
-              <a:t>Рост цены золота +45% за 2024 → рост COGS оправ. RAPI натуральных бриллиантов −10% за 2025 → рынок натуральных слабеет</a:t>
+              <a:t>[Экономический тренд: суть, цифра с источником, следствие для продукта]</a:t>
             </a:r>
             <a:endParaRPr b="0" lang="en-US" sz="950" spc="-1" strike="noStrike">
               <a:solidFill>
@@ -50306,7 +50306,7 @@
                 <a:latin typeface="Calibri"/>
                 <a:ea typeface="Calibri"/>
               </a:rPr>
-              <a:t>Источник: Сайты конкурентов, VC.ru, отзывы Ozon/Wildberries; PD WD 2026</a:t>
+              <a:t>Источник: [сайты конкурентов, отзывы, отраслевые публикации — задача 3]</a:t>
             </a:r>
             <a:endParaRPr b="0" lang="en-US" sz="800" spc="-1" strike="noStrike">
               <a:solidFill>
@@ -50527,7 +50527,7 @@
                 <a:latin typeface="Calibri"/>
                 <a:ea typeface="Calibri"/>
               </a:rPr>
-              <a:t>IQ Diamonds · Bright Spark · EcoDiam</a:t>
+              <a:t>[Прямой 1] · [Прямой 2] · [Прямой 3]</a:t>
             </a:r>
             <a:endParaRPr b="0" lang="en-US" sz="950" spc="-1" strike="noStrike">
               <a:solidFill>
@@ -50748,7 +50748,7 @@
                 <a:latin typeface="Calibri"/>
                 <a:ea typeface="Calibri"/>
               </a:rPr>
-              <a:t>Sunlight Cold Diamonds · Gems Hunter</a:t>
+              <a:t>[Косвенный 1] · [Косвенный 2]</a:t>
             </a:r>
             <a:endParaRPr b="0" lang="en-US" sz="950" spc="-1" strike="noStrike">
               <a:solidFill>
@@ -50969,7 +50969,7 @@
                 <a:latin typeface="Calibri"/>
                 <a:ea typeface="Calibri"/>
               </a:rPr>
-              <a:t>SOKOLOV (натуральные бриллианты) · Серебро и бижутерия</a:t>
+              <a:t>[Вытеснитель 1] · [Вытеснитель 2]</a:t>
             </a:r>
             <a:endParaRPr b="0" lang="en-US" sz="950" spc="-1" strike="noStrike">
               <a:solidFill>
@@ -51190,7 +51190,7 @@
                 <a:latin typeface="Calibri"/>
                 <a:ea typeface="Calibri"/>
               </a:rPr>
-              <a:t>Sunlight — 1 500+ магазинов РФ, все маркетплейсы, ~30% рынка</a:t>
+              <a:t>[Конкурент по каналам: охват, каналы дистрибуции, доля рынка]</a:t>
             </a:r>
             <a:endParaRPr b="0" lang="en-US" sz="950" spc="-1" strike="noStrike">
               <a:solidFill>
@@ -51787,7 +51787,7 @@
                           </a:solidFill>
                           <a:latin typeface="Arial"/>
                         </a:rPr>
-                        <a:t>IQ Diamonds</a:t>
+                        <a:t>[Конкурент 1]</a:t>
                       </a:r>
                       <a:endParaRPr b="0" lang="en-US" sz="900" spc="-1" strike="noStrike">
                         <a:solidFill>
@@ -51845,7 +51845,7 @@
                           </a:solidFill>
                           <a:latin typeface="Arial"/>
                         </a:rPr>
-                        <a:t>СПб, онлайн РФ</a:t>
+                        <a:t>[рынок / гео]</a:t>
                       </a:r>
                       <a:endParaRPr b="0" lang="en-US" sz="900" spc="-1" strike="noStrike">
                         <a:solidFill>
@@ -51903,7 +51903,7 @@
                           </a:solidFill>
                           <a:latin typeface="Arial"/>
                         </a:rPr>
-                        <a:t>20K–200K ₽</a:t>
+                        <a:t>[цена]</a:t>
                       </a:r>
                       <a:endParaRPr b="0" lang="en-US" sz="900" spc="-1" strike="noStrike">
                         <a:solidFill>
@@ -51961,7 +51961,7 @@
                           </a:solidFill>
                           <a:latin typeface="Arial"/>
                         </a:rPr>
-                        <a:t>~3 000</a:t>
+                        <a:t>[клиенты]</a:t>
                       </a:r>
                       <a:endParaRPr b="0" lang="en-US" sz="900" spc="-1" strike="noStrike">
                         <a:solidFill>
@@ -52019,7 +52019,7 @@
                           </a:solidFill>
                           <a:latin typeface="Arial"/>
                         </a:rPr>
-                        <a:t>~200M ₽</a:t>
+                        <a:t>[выручка]</a:t>
                       </a:r>
                       <a:endParaRPr b="0" lang="en-US" sz="900" spc="-1" strike="noStrike">
                         <a:solidFill>
@@ -52077,7 +52077,7 @@
                           </a:solidFill>
                           <a:latin typeface="Arial"/>
                         </a:rPr>
-                        <a:t>Полная коллекция CVD, шоурум</a:t>
+                        <a:t>[ключевые фичи]</a:t>
                       </a:r>
                       <a:endParaRPr b="0" lang="en-US" sz="900" spc="-1" strike="noStrike">
                         <a:solidFill>
@@ -52135,7 +52135,7 @@
                           </a:solidFill>
                           <a:latin typeface="Arial"/>
                         </a:rPr>
-                        <a:t>Нет камней &gt; 3ct</a:t>
+                        <a:t>[слабость]</a:t>
                       </a:r>
                       <a:endParaRPr b="0" lang="en-US" sz="900" spc="-1" strike="noStrike">
                         <a:solidFill>
@@ -52195,7 +52195,7 @@
                           </a:solidFill>
                           <a:latin typeface="Arial"/>
                         </a:rPr>
-                        <a:t>Bright Spark</a:t>
+                        <a:t>[Конкурент 2]</a:t>
                       </a:r>
                       <a:endParaRPr b="0" lang="en-US" sz="900" spc="-1" strike="noStrike">
                         <a:solidFill>
@@ -52253,7 +52253,7 @@
                           </a:solidFill>
                           <a:latin typeface="Arial"/>
                         </a:rPr>
-                        <a:t>МСК, СПб, онлайн</a:t>
+                        <a:t>[рынок / гео]</a:t>
                       </a:r>
                       <a:endParaRPr b="0" lang="en-US" sz="900" spc="-1" strike="noStrike">
                         <a:solidFill>
@@ -52311,7 +52311,7 @@
                           </a:solidFill>
                           <a:latin typeface="Arial"/>
                         </a:rPr>
-                        <a:t>50K–300K ₽</a:t>
+                        <a:t>[цена]</a:t>
                       </a:r>
                       <a:endParaRPr b="0" lang="en-US" sz="900" spc="-1" strike="noStrike">
                         <a:solidFill>
@@ -52369,7 +52369,7 @@
                           </a:solidFill>
                           <a:latin typeface="Arial"/>
                         </a:rPr>
-                        <a:t>~500</a:t>
+                        <a:t>[клиенты]</a:t>
                       </a:r>
                       <a:endParaRPr b="0" lang="en-US" sz="900" spc="-1" strike="noStrike">
                         <a:solidFill>
@@ -52427,7 +52427,7 @@
                           </a:solidFill>
                           <a:latin typeface="Arial"/>
                         </a:rPr>
-                        <a:t>~50M ₽</a:t>
+                        <a:t>[выручка]</a:t>
                       </a:r>
                       <a:endParaRPr b="0" lang="en-US" sz="900" spc="-1" strike="noStrike">
                         <a:solidFill>
@@ -52485,7 +52485,7 @@
                           </a:solidFill>
                           <a:latin typeface="Arial"/>
                         </a:rPr>
-                        <a:t>Авторский кастом, шоурумы</a:t>
+                        <a:t>[ключевые фичи]</a:t>
                       </a:r>
                       <a:endParaRPr b="0" lang="en-US" sz="900" spc="-1" strike="noStrike">
                         <a:solidFill>
@@ -52543,7 +52543,7 @@
                           </a:solidFill>
                           <a:latin typeface="Arial"/>
                         </a:rPr>
-                        <a:t>Кастом 2–4 нед.; нет готовых 6ct+</a:t>
+                        <a:t>[слабость]</a:t>
                       </a:r>
                       <a:endParaRPr b="0" lang="en-US" sz="900" spc="-1" strike="noStrike">
                         <a:solidFill>
@@ -52603,7 +52603,7 @@
                           </a:solidFill>
                           <a:latin typeface="Arial"/>
                         </a:rPr>
-                        <a:t>EcoDiam</a:t>
+                        <a:t>[Конкурент 3]</a:t>
                       </a:r>
                       <a:endParaRPr b="0" lang="en-US" sz="900" spc="-1" strike="noStrike">
                         <a:solidFill>
@@ -52661,7 +52661,7 @@
                           </a:solidFill>
                           <a:latin typeface="Arial"/>
                         </a:rPr>
-                        <a:t>Онлайн РФ</a:t>
+                        <a:t>[рынок / гео]</a:t>
                       </a:r>
                       <a:endParaRPr b="0" lang="en-US" sz="900" spc="-1" strike="noStrike">
                         <a:solidFill>
@@ -52719,7 +52719,7 @@
                           </a:solidFill>
                           <a:latin typeface="Arial"/>
                         </a:rPr>
-                        <a:t>10K–150K ₽</a:t>
+                        <a:t>[цена]</a:t>
                       </a:r>
                       <a:endParaRPr b="0" lang="en-US" sz="900" spc="-1" strike="noStrike">
                         <a:solidFill>
@@ -52777,7 +52777,7 @@
                           </a:solidFill>
                           <a:latin typeface="Arial"/>
                         </a:rPr>
-                        <a:t>~1 000</a:t>
+                        <a:t>[клиенты]</a:t>
                       </a:r>
                       <a:endParaRPr b="0" lang="en-US" sz="900" spc="-1" strike="noStrike">
                         <a:solidFill>
@@ -52835,7 +52835,7 @@
                           </a:solidFill>
                           <a:latin typeface="Arial"/>
                         </a:rPr>
-                        <a:t>~30M ₽</a:t>
+                        <a:t>[выручка]</a:t>
                       </a:r>
                       <a:endParaRPr b="0" lang="en-US" sz="900" spc="-1" strike="noStrike">
                         <a:solidFill>
@@ -52893,7 +52893,7 @@
                           </a:solidFill>
                           <a:latin typeface="Arial"/>
                         </a:rPr>
-                        <a:t>Широкий выбор камней</a:t>
+                        <a:t>[ключевые фичи]</a:t>
                       </a:r>
                       <a:endParaRPr b="0" lang="en-US" sz="900" spc="-1" strike="noStrike">
                         <a:solidFill>
@@ -52951,7 +52951,7 @@
                           </a:solidFill>
                           <a:latin typeface="Arial"/>
                         </a:rPr>
-                        <a:t>Фокус на камни, не ювелирка</a:t>
+                        <a:t>[слабость]</a:t>
                       </a:r>
                       <a:endParaRPr b="0" lang="en-US" sz="900" spc="-1" strike="noStrike">
                         <a:solidFill>
@@ -53011,7 +53011,7 @@
                           </a:solidFill>
                           <a:latin typeface="Arial"/>
                         </a:rPr>
-                        <a:t>Sunlight Cold Diamonds</a:t>
+                        <a:t>[Конкурент 4]</a:t>
                       </a:r>
                       <a:endParaRPr b="0" lang="en-US" sz="900" spc="-1" strike="noStrike">
                         <a:solidFill>
@@ -53069,7 +53069,7 @@
                           </a:solidFill>
                           <a:latin typeface="Arial"/>
                         </a:rPr>
-                        <a:t>Вся РФ</a:t>
+                        <a:t>[рынок / гео]</a:t>
                       </a:r>
                       <a:endParaRPr b="0" lang="en-US" sz="900" spc="-1" strike="noStrike">
                         <a:solidFill>
@@ -53127,7 +53127,7 @@
                           </a:solidFill>
                           <a:latin typeface="Arial"/>
                         </a:rPr>
-                        <a:t>15K–80K ₽</a:t>
+                        <a:t>[цена]</a:t>
                       </a:r>
                       <a:endParaRPr b="0" lang="en-US" sz="900" spc="-1" strike="noStrike">
                         <a:solidFill>
@@ -53185,7 +53185,7 @@
                           </a:solidFill>
                           <a:latin typeface="Arial"/>
                         </a:rPr>
-                        <a:t>~50 000+</a:t>
+                        <a:t>[клиенты]</a:t>
                       </a:r>
                       <a:endParaRPr b="0" lang="en-US" sz="900" spc="-1" strike="noStrike">
                         <a:solidFill>
@@ -53243,7 +53243,7 @@
                           </a:solidFill>
                           <a:latin typeface="Arial"/>
                         </a:rPr>
-                        <a:t>~5B ₽</a:t>
+                        <a:t>[выручка]</a:t>
                       </a:r>
                       <a:endParaRPr b="0" lang="en-US" sz="900" spc="-1" strike="noStrike">
                         <a:solidFill>
@@ -53301,7 +53301,7 @@
                           </a:solidFill>
                           <a:latin typeface="Arial"/>
                         </a:rPr>
-                        <a:t>Дистрибуция 1 500+ магазинов</a:t>
+                        <a:t>[ключевые фичи]</a:t>
                       </a:r>
                       <a:endParaRPr b="0" lang="en-US" sz="900" spc="-1" strike="noStrike">
                         <a:solidFill>
@@ -53359,7 +53359,7 @@
                           </a:solidFill>
                           <a:latin typeface="Arial"/>
                         </a:rPr>
-                        <a:t>Мелкие камни; масс-сегмент</a:t>
+                        <a:t>[слабость]</a:t>
                       </a:r>
                       <a:endParaRPr b="0" lang="en-US" sz="900" spc="-1" strike="noStrike">
                         <a:solidFill>
@@ -53419,7 +53419,7 @@
                           </a:solidFill>
                           <a:latin typeface="Arial"/>
                         </a:rPr>
-                        <a:t>Wonder Diamond</a:t>
+                        <a:t>[Наш продукт]</a:t>
                       </a:r>
                       <a:endParaRPr b="0" lang="en-US" sz="900" spc="-1" strike="noStrike">
                         <a:solidFill>
@@ -53477,7 +53477,7 @@
                           </a:solidFill>
                           <a:latin typeface="Arial"/>
                         </a:rPr>
-                        <a:t>Онлайн РФ</a:t>
+                        <a:t>[рынок / гео]</a:t>
                       </a:r>
                       <a:endParaRPr b="0" lang="en-US" sz="900" spc="-1" strike="noStrike">
                         <a:solidFill>
@@ -53535,7 +53535,7 @@
                           </a:solidFill>
                           <a:latin typeface="Arial"/>
                         </a:rPr>
-                        <a:t>150K–350K ₽</a:t>
+                        <a:t>[цена]</a:t>
                       </a:r>
                       <a:endParaRPr b="0" lang="en-US" sz="900" spc="-1" strike="noStrike">
                         <a:solidFill>
@@ -53593,7 +53593,7 @@
                           </a:solidFill>
                           <a:latin typeface="Arial"/>
                         </a:rPr>
-                        <a:t>0 (MVP)</a:t>
+                        <a:t>[клиенты]</a:t>
                       </a:r>
                       <a:endParaRPr b="0" lang="en-US" sz="900" spc="-1" strike="noStrike">
                         <a:solidFill>
@@ -53651,7 +53651,7 @@
                           </a:solidFill>
                           <a:latin typeface="Arial"/>
                         </a:rPr>
-                        <a:t>0 (старт)</a:t>
+                        <a:t>[выручка]</a:t>
                       </a:r>
                       <a:endParaRPr b="0" lang="en-US" sz="900" spc="-1" strike="noStrike">
                         <a:solidFill>
@@ -53709,7 +53709,7 @@
                           </a:solidFill>
                           <a:latin typeface="Arial"/>
                         </a:rPr>
-                        <a:t>CVD 6ct+ от производителя, IGI</a:t>
+                        <a:t>[ключевые фичи]</a:t>
                       </a:r>
                       <a:endParaRPr b="0" lang="en-US" sz="900" spc="-1" strike="noStrike">
                         <a:solidFill>
@@ -53767,7 +53767,7 @@
                           </a:solidFill>
                           <a:latin typeface="Arial"/>
                         </a:rPr>
-                        <a:t>Нет клиентов, нет шоурума</a:t>
+                        <a:t>[слабость]</a:t>
                       </a:r>
                       <a:endParaRPr b="0" lang="en-US" sz="900" spc="-1" strike="noStrike">
                         <a:solidFill>
@@ -53997,7 +53997,7 @@
                 <a:latin typeface="Calibri"/>
                 <a:ea typeface="Calibri"/>
               </a:rPr>
-              <a:t>Ключевой конкурент: IQ Diamonds</a:t>
+              <a:t>Ключевой конкурент: [название]</a:t>
             </a:r>
             <a:endParaRPr b="0" lang="en-US" sz="1700" spc="-1" strike="noStrike">
               <a:solidFill>
@@ -54160,7 +54160,7 @@
                 <a:latin typeface="Calibri"/>
                 <a:ea typeface="Calibri"/>
               </a:rPr>
-              <a:t>Источник: iqdiamonds.ru, отзывы ВК/Telegram; аналитика WD 2026</a:t>
+              <a:t>Источник: [сайт конкурента, отзывы, аналитика — задача 4]</a:t>
             </a:r>
             <a:endParaRPr b="0" lang="en-US" sz="800" spc="-1" strike="noStrike">
               <a:solidFill>
@@ -54429,7 +54429,7 @@
                 <a:latin typeface="Calibri"/>
                 <a:ea typeface="Calibri"/>
               </a:rPr>
-              <a:t>Acquisition: SEO «лабораторные бриллианты» (~40%), Instagram/ВК (~25%), прямой трафик (~20%), Telegram (~10%), сарафан (~5%). Оценочный CPC: 80–150 ₽</a:t>
+              <a:t>Acquisition: [каналы с долями трафика]. Оценочный CAC / CPC: [значение]</a:t>
             </a:r>
             <a:endParaRPr b="0" lang="en-US" sz="1000" spc="-1" strike="noStrike">
               <a:solidFill>
@@ -54641,7 +54641,7 @@
                 <a:latin typeface="Calibri"/>
                 <a:ea typeface="Calibri"/>
               </a:rPr>
-              <a:t>Activation: самостоятельный онлайн-каталог с фильтрами (4C, размер, цена). Aha-moment: момент сравнения CVD с натуральным аналогом. Время до first value: ~5 минут</a:t>
+              <a:t>Activation: [механика онбординга]. Aha-moment: [момент]. Время до first value: [значение]</a:t>
             </a:r>
             <a:endParaRPr b="0" lang="en-US" sz="1000" spc="-1" strike="noStrike">
               <a:solidFill>
@@ -54853,7 +54853,7 @@
                 <a:latin typeface="Calibri"/>
                 <a:ea typeface="Calibri"/>
               </a:rPr>
-              <a:t>Retention: нет публичной loyalty-программы. Повторная покупка через контент (посты, истории клиентов). Оценочный repeat rate: ~10% за 12 мес.</a:t>
+              <a:t>Retention: [механизмы удержания]. Оценочный retention / repeat rate: [значение]</a:t>
             </a:r>
             <a:endParaRPr b="0" lang="en-US" sz="1000" spc="-1" strike="noStrike">
               <a:solidFill>
@@ -55065,7 +55065,7 @@
                 <a:latin typeface="Calibri"/>
                 <a:ea typeface="Calibri"/>
               </a:rPr>
-              <a:t>Revenue: разовые продажи украшений 20K–200K ₽. Средний чек: ~60K ₽. Оценочная выручка: ~200 млн ₽/год</a:t>
+              <a:t>Revenue: [модель монетизации]. Средний чек: [значение]. Оценочная выручка: [значение]</a:t>
             </a:r>
             <a:endParaRPr b="0" lang="en-US" sz="1000" spc="-1" strike="noStrike">
               <a:solidFill>
@@ -55277,7 +55277,7 @@
                 <a:latin typeface="Calibri"/>
                 <a:ea typeface="Calibri"/>
               </a:rPr>
-              <a:t>Referral: отзывы на сайте/Wildberries. Нет публичной реферальной программы. NPS не раскрывается. Слабость: нет камней &gt;3ct</a:t>
+              <a:t>Referral: [программы и механики]. NPS: [значение или «не раскрывается»]. Слабость: [ключевая уязвимость]</a:t>
             </a:r>
             <a:endParaRPr b="0" lang="en-US" sz="1000" spc="-1" strike="noStrike">
               <a:solidFill>

--- a/assets/presentation-template.pptx
+++ b/assets/presentation-template.pptx
@@ -599,7 +599,7 @@
                 <a:latin typeface="Calibri"/>
                 <a:ea typeface="Calibri"/>
               </a:rPr>
-              <a:t>[НАЗВАНИЕ ПРОЕКТА]</a:t>
+              <a:t>[PROJECT NAME]</a:t>
             </a:r>
             <a:endParaRPr b="0" lang="en-US" sz="3800" spc="-1" strike="noStrike">
               <a:solidFill>
@@ -656,7 +656,7 @@
                 <a:latin typeface="Calibri"/>
                 <a:ea typeface="Calibri"/>
               </a:rPr>
-              <a:t>[Краткий слоган: суть продукта в одном предложении]</a:t>
+              <a:t>[Short tagline: the product in one sentence]</a:t>
             </a:r>
             <a:endParaRPr b="0" lang="en-US" sz="1500" spc="-1" strike="noStrike">
               <a:solidFill>
@@ -713,7 +713,7 @@
                 <a:latin typeface="Calibri"/>
                 <a:ea typeface="Calibri"/>
               </a:rPr>
-              <a:t>[Рынок], [B2B / B2C]  ·  [месяц год]  ·  Этап: Verification</a:t>
+              <a:t>[Market], [B2B / B2C]  ·  [month year]  ·  Stage: Verification</a:t>
             </a:r>
             <a:endParaRPr b="0" lang="en-US" sz="900" spc="-1" strike="noStrike">
               <a:solidFill>
@@ -856,7 +856,7 @@
                 <a:latin typeface="Calibri"/>
                 <a:ea typeface="Calibri"/>
               </a:rPr>
-              <a:t>PESTEL-анализ</a:t>
+              <a:t>PESTEL analysis</a:t>
             </a:r>
             <a:endParaRPr b="0" lang="en-US" sz="1700" spc="-1" strike="noStrike">
               <a:solidFill>
@@ -913,7 +913,7 @@
                 <a:latin typeface="Calibri"/>
                 <a:ea typeface="Calibri"/>
               </a:rPr>
-              <a:t>АНАЛИЗ РЫНКА</a:t>
+              <a:t>MARKET ANALYSIS</a:t>
             </a:r>
             <a:endParaRPr b="0" lang="en-US" sz="800" spc="-1" strike="noStrike">
               <a:solidFill>
@@ -1019,7 +1019,7 @@
                 <a:latin typeface="Calibri"/>
                 <a:ea typeface="Calibri"/>
               </a:rPr>
-              <a:t>Источник: [регуляторы, отраслевые ассоциации, статистика — задача 6]</a:t>
+              <a:t>Source: [regulators, industry associations, statistics — task 6]</a:t>
             </a:r>
             <a:endParaRPr b="0" lang="en-US" sz="800" spc="-1" strike="noStrike">
               <a:solidFill>
@@ -1125,7 +1125,7 @@
                 <a:latin typeface="Calibri"/>
                 <a:ea typeface="Calibri"/>
               </a:rPr>
-              <a:t>P — Political (политические)</a:t>
+              <a:t>P — Political</a:t>
             </a:r>
             <a:endParaRPr b="0" lang="en-US" sz="1000" spc="-1" strike="noStrike">
               <a:solidFill>
@@ -1182,7 +1182,7 @@
                 <a:latin typeface="Calibri"/>
                 <a:ea typeface="Calibri"/>
               </a:rPr>
-              <a:t>POLITICAL: [фактор]: [значимость]×[вероятность]=[оценка] [⚠️ / ✅] [следствие]</a:t>
+              <a:t>POLITICAL: [factor]: [significance]x[probability]=[score] [⚠️ / ✅] [consequence]</a:t>
             </a:r>
             <a:endParaRPr b="0" lang="en-US" sz="950" spc="-1" strike="noStrike">
               <a:solidFill>
@@ -1288,7 +1288,7 @@
                 <a:latin typeface="Calibri"/>
                 <a:ea typeface="Calibri"/>
               </a:rPr>
-              <a:t>E — Economic (экономические)</a:t>
+              <a:t>E — Economic</a:t>
             </a:r>
             <a:endParaRPr b="0" lang="en-US" sz="1000" spc="-1" strike="noStrike">
               <a:solidFill>
@@ -1345,7 +1345,7 @@
                 <a:latin typeface="Calibri"/>
                 <a:ea typeface="Calibri"/>
               </a:rPr>
-              <a:t>ECONOMIC: [фактор]: [значимость]×[вероятность]=[оценка] [⚠️ / ✅] [следствие]</a:t>
+              <a:t>ECONOMIC: [factor]: [significance]x[probability]=[score] [⚠️ / ✅] [consequence]</a:t>
             </a:r>
             <a:endParaRPr b="0" lang="en-US" sz="950" spc="-1" strike="noStrike">
               <a:solidFill>
@@ -1451,7 +1451,7 @@
                 <a:latin typeface="Calibri"/>
                 <a:ea typeface="Calibri"/>
               </a:rPr>
-              <a:t>S — Social (социальные)</a:t>
+              <a:t>S — Social</a:t>
             </a:r>
             <a:endParaRPr b="0" lang="en-US" sz="1000" spc="-1" strike="noStrike">
               <a:solidFill>
@@ -1508,7 +1508,7 @@
                 <a:latin typeface="Calibri"/>
                 <a:ea typeface="Calibri"/>
               </a:rPr>
-              <a:t>SOCIAL: [фактор]: [значимость]×[вероятность]=[оценка] [⚠️ / ✅] [следствие]</a:t>
+              <a:t>SOCIAL: [factor]: [significance]x[probability]=[score] [⚠️ / ✅] [consequence]</a:t>
             </a:r>
             <a:endParaRPr b="0" lang="en-US" sz="950" spc="-1" strike="noStrike">
               <a:solidFill>
@@ -1614,7 +1614,7 @@
                 <a:latin typeface="Calibri"/>
                 <a:ea typeface="Calibri"/>
               </a:rPr>
-              <a:t>T — Technological (технологические)</a:t>
+              <a:t>T — Technological</a:t>
             </a:r>
             <a:endParaRPr b="0" lang="en-US" sz="1000" spc="-1" strike="noStrike">
               <a:solidFill>
@@ -1671,7 +1671,7 @@
                 <a:latin typeface="Calibri"/>
                 <a:ea typeface="Calibri"/>
               </a:rPr>
-              <a:t>TECHNOLOGICAL: [фактор]: [значимость]×[вероятность]=[оценка] [⚠️ / ✅] [следствие]</a:t>
+              <a:t>TECHNOLOGICAL: [factor]: [significance]x[probability]=[score] [⚠️ / ✅] [consequence]</a:t>
             </a:r>
             <a:endParaRPr b="0" lang="en-US" sz="950" spc="-1" strike="noStrike">
               <a:solidFill>
@@ -1834,7 +1834,7 @@
                 <a:latin typeface="Calibri"/>
                 <a:ea typeface="Calibri"/>
               </a:rPr>
-              <a:t>ENVIRONMENTAL / LEGAL: [фактор]: [значимость]×[вероятность]=[оценка] [⚠️ / ✅] [следствие]</a:t>
+              <a:t>ENVIRONMENTAL / LEGAL: [factor]: [significance]x[probability]=[score] [⚠️ / ✅] [consequence]</a:t>
             </a:r>
             <a:endParaRPr b="0" lang="en-US" sz="950" spc="-1" strike="noStrike">
               <a:solidFill>
@@ -1977,7 +1977,7 @@
                 <a:latin typeface="Calibri"/>
                 <a:ea typeface="Calibri"/>
               </a:rPr>
-              <a:t>РАЗДЕЛ 02</a:t>
+              <a:t>SECTION 02</a:t>
             </a:r>
             <a:endParaRPr b="0" lang="en-US" sz="1100" spc="-1" strike="noStrike">
               <a:solidFill>
@@ -2034,7 +2034,7 @@
                 <a:latin typeface="Calibri"/>
                 <a:ea typeface="Calibri"/>
               </a:rPr>
-              <a:t>Исследование потребителей</a:t>
+              <a:t>Customer research</a:t>
             </a:r>
             <a:endParaRPr b="0" lang="en-US" sz="3400" spc="-1" strike="noStrike">
               <a:solidFill>
@@ -2177,7 +2177,7 @@
                 <a:latin typeface="Calibri"/>
                 <a:ea typeface="Calibri"/>
               </a:rPr>
-              <a:t>Jobs-to-be-Done: работы потребителей</a:t>
+              <a:t>Jobs-to-be-Done: the customer's jobs</a:t>
             </a:r>
             <a:endParaRPr b="0" lang="en-US" sz="1700" spc="-1" strike="noStrike">
               <a:solidFill>
@@ -2234,7 +2234,7 @@
                 <a:latin typeface="Calibri"/>
                 <a:ea typeface="Calibri"/>
               </a:rPr>
-              <a:t>ИССЛЕДОВАНИЕ</a:t>
+              <a:t>RESEARCH</a:t>
             </a:r>
             <a:endParaRPr b="0" lang="en-US" sz="800" spc="-1" strike="noStrike">
               <a:solidFill>
@@ -2340,7 +2340,7 @@
                 <a:latin typeface="Calibri"/>
                 <a:ea typeface="Calibri"/>
               </a:rPr>
-              <a:t>Источник: Jobs-to-be-Done (Ulwick/Christensen); задача 7</a:t>
+              <a:t>Source: Jobs-to-be-Done (Ulwick/Christensen); task 7</a:t>
             </a:r>
             <a:endParaRPr b="0" lang="en-US" sz="800" spc="-1" strike="noStrike">
               <a:solidFill>
@@ -2397,7 +2397,7 @@
                 <a:latin typeface="Calibri"/>
                 <a:ea typeface="Calibri"/>
               </a:rPr>
-              <a:t>КАКУЮ «РАБОТУ» НАНИМАЮТ ПОТРЕБИТЕЛИ НАШ ПРОДУКТ ВЫПОЛНЯТЬ?</a:t>
+              <a:t>WHAT "JOB" DO CUSTOMERS HIRE OUR PRODUCT TO DO?</a:t>
             </a:r>
             <a:endParaRPr b="0" lang="en-US" sz="1000" spc="-1" strike="noStrike">
               <a:solidFill>
@@ -2559,7 +2559,7 @@
                 <a:latin typeface="Calibri"/>
                 <a:ea typeface="Calibri"/>
               </a:rPr>
-              <a:t>Функциональные</a:t>
+              <a:t>Functional</a:t>
             </a:r>
             <a:endParaRPr b="0" lang="en-US" sz="1000" spc="-1" strike="noStrike">
               <a:solidFill>
@@ -2618,7 +2618,7 @@
                 <a:latin typeface="Calibri"/>
                 <a:ea typeface="Calibri"/>
               </a:rPr>
-              <a:t>[Функциональные работы: что клиент делает практически — 2–3 формулировки]</a:t>
+              <a:t>[Functional jobs: what the customer does in practice — 2-3 statements]</a:t>
             </a:r>
             <a:endParaRPr b="0" lang="en-US" sz="950" spc="-1" strike="noStrike">
               <a:solidFill>
@@ -2780,7 +2780,7 @@
                 <a:latin typeface="Calibri"/>
                 <a:ea typeface="Calibri"/>
               </a:rPr>
-              <a:t>Эмоциональные</a:t>
+              <a:t>Emotional</a:t>
             </a:r>
             <a:endParaRPr b="0" lang="en-US" sz="1000" spc="-1" strike="noStrike">
               <a:solidFill>
@@ -2839,7 +2839,7 @@
                 <a:latin typeface="Calibri"/>
                 <a:ea typeface="Calibri"/>
               </a:rPr>
-              <a:t>[Эмоциональные работы: что клиент хочет чувствовать]</a:t>
+              <a:t>[Emotional jobs: how the customer wants to feel]</a:t>
             </a:r>
             <a:endParaRPr b="0" lang="en-US" sz="950" spc="-1" strike="noStrike">
               <a:solidFill>
@@ -3001,7 +3001,7 @@
                 <a:latin typeface="Calibri"/>
                 <a:ea typeface="Calibri"/>
               </a:rPr>
-              <a:t>Социальные</a:t>
+              <a:t>Social</a:t>
             </a:r>
             <a:endParaRPr b="0" lang="en-US" sz="1000" spc="-1" strike="noStrike">
               <a:solidFill>
@@ -3060,7 +3060,7 @@
                 <a:latin typeface="Calibri"/>
                 <a:ea typeface="Calibri"/>
               </a:rPr>
-              <a:t>[Социальные работы: как клиент хочет выглядеть в глазах других]</a:t>
+              <a:t>[Social jobs: how the customer wants to be seen by others]</a:t>
             </a:r>
             <a:endParaRPr b="0" lang="en-US" sz="950" spc="-1" strike="noStrike">
               <a:solidFill>
@@ -3117,7 +3117,7 @@
                 <a:latin typeface="Calibri"/>
                 <a:ea typeface="Calibri"/>
               </a:rPr>
-              <a:t>ТОП JOB STORIES</a:t>
+              <a:t>TOP JOB STORIES</a:t>
             </a:r>
             <a:endParaRPr b="0" lang="en-US" sz="900" spc="-1" strike="noStrike">
               <a:solidFill>
@@ -3272,7 +3272,7 @@
                 <a:latin typeface="Calibri"/>
                 <a:ea typeface="Calibri"/>
               </a:rPr>
-              <a:t>Когда [ситуация], я хочу [работа], чтобы [результат].</a:t>
+              <a:t>When [situation], I want to [job], so that [outcome].</a:t>
             </a:r>
             <a:endParaRPr b="0" lang="en-US" sz="1000" spc="-1" strike="noStrike">
               <a:solidFill>
@@ -3427,7 +3427,7 @@
                 <a:latin typeface="Calibri"/>
                 <a:ea typeface="Calibri"/>
               </a:rPr>
-              <a:t>Когда [ситуация], я хочу [работа], чтобы [результат].</a:t>
+              <a:t>When [situation], I want to [job], so that [outcome].</a:t>
             </a:r>
             <a:endParaRPr b="0" lang="en-US" sz="1000" spc="-1" strike="noStrike">
               <a:solidFill>
@@ -3582,7 +3582,7 @@
                 <a:latin typeface="Calibri"/>
                 <a:ea typeface="Calibri"/>
               </a:rPr>
-              <a:t>Когда [ситуация], я хочу [работа], чтобы [результат].</a:t>
+              <a:t>When [situation], I want to [job], so that [outcome].</a:t>
             </a:r>
             <a:endParaRPr b="0" lang="en-US" sz="1000" spc="-1" strike="noStrike">
               <a:solidFill>
@@ -3782,7 +3782,7 @@
                 <a:latin typeface="Calibri"/>
                 <a:ea typeface="Calibri"/>
               </a:rPr>
-              <a:t>ИССЛЕДОВАНИЕ</a:t>
+              <a:t>RESEARCH</a:t>
             </a:r>
             <a:endParaRPr b="0" lang="en-US" sz="800" spc="-1" strike="noStrike">
               <a:solidFill>
@@ -3888,7 +3888,7 @@
                 <a:latin typeface="Calibri"/>
                 <a:ea typeface="Calibri"/>
               </a:rPr>
-              <a:t>Источник: [указать источник]</a:t>
+              <a:t>Source: [state the source]</a:t>
             </a:r>
             <a:endParaRPr b="0" lang="en-US" sz="800" spc="-1" strike="noStrike">
               <a:solidFill>
@@ -3945,7 +3945,7 @@
                 <a:latin typeface="Calibri"/>
                 <a:ea typeface="Calibri"/>
               </a:rPr>
-              <a:t>ПУТЬ ПОТРЕБИТЕЛЯ ОТ ОСОЗНАНИЯ ПРОБЛЕМЫ ДО ЛОЯЛЬНОСТИ</a:t>
+              <a:t>THE CUSTOMER JOURNEY FROM PROBLEM AWARENESS TO LOYALTY</a:t>
             </a:r>
             <a:endParaRPr b="0" lang="en-US" sz="1000" spc="-1" strike="noStrike">
               <a:solidFill>
@@ -4051,7 +4051,7 @@
                 <a:latin typeface="Calibri"/>
                 <a:ea typeface="Calibri"/>
               </a:rPr>
-              <a:t>Осознание</a:t>
+              <a:t>Awareness</a:t>
             </a:r>
             <a:endParaRPr b="0" lang="en-US" sz="800" spc="-1" strike="noStrike">
               <a:solidFill>
@@ -4157,7 +4157,7 @@
                 <a:latin typeface="Calibri"/>
                 <a:ea typeface="Calibri"/>
               </a:rPr>
-              <a:t>Поиск</a:t>
+              <a:t>Search</a:t>
             </a:r>
             <a:endParaRPr b="0" lang="en-US" sz="800" spc="-1" strike="noStrike">
               <a:solidFill>
@@ -4263,7 +4263,7 @@
                 <a:latin typeface="Calibri"/>
                 <a:ea typeface="Calibri"/>
               </a:rPr>
-              <a:t>Оценка</a:t>
+              <a:t>Score</a:t>
             </a:r>
             <a:endParaRPr b="0" lang="en-US" sz="800" spc="-1" strike="noStrike">
               <a:solidFill>
@@ -4369,7 +4369,7 @@
                 <a:latin typeface="Calibri"/>
                 <a:ea typeface="Calibri"/>
               </a:rPr>
-              <a:t>Покупка</a:t>
+              <a:t>Purchase</a:t>
             </a:r>
             <a:endParaRPr b="0" lang="en-US" sz="800" spc="-1" strike="noStrike">
               <a:solidFill>
@@ -4475,7 +4475,7 @@
                 <a:latin typeface="Calibri"/>
                 <a:ea typeface="Calibri"/>
               </a:rPr>
-              <a:t>Онбординг</a:t>
+              <a:t>Onboarding</a:t>
             </a:r>
             <a:endParaRPr b="0" lang="en-US" sz="800" spc="-1" strike="noStrike">
               <a:solidFill>
@@ -4581,7 +4581,7 @@
                 <a:latin typeface="Calibri"/>
                 <a:ea typeface="Calibri"/>
               </a:rPr>
-              <a:t>Использование</a:t>
+              <a:t>Usage</a:t>
             </a:r>
             <a:endParaRPr b="0" lang="en-US" sz="800" spc="-1" strike="noStrike">
               <a:solidFill>
@@ -4687,7 +4687,7 @@
                 <a:latin typeface="Calibri"/>
                 <a:ea typeface="Calibri"/>
               </a:rPr>
-              <a:t>Лояльность</a:t>
+              <a:t>Loyalty</a:t>
             </a:r>
             <a:endParaRPr b="0" lang="en-US" sz="800" spc="-1" strike="noStrike">
               <a:solidFill>
@@ -4793,7 +4793,7 @@
                 <a:latin typeface="Calibri"/>
                 <a:ea typeface="Calibri"/>
               </a:rPr>
-              <a:t>Действия</a:t>
+              <a:t>Actions</a:t>
             </a:r>
             <a:endParaRPr b="0" lang="en-US" sz="800" spc="-1" strike="noStrike">
               <a:solidFill>
@@ -5641,7 +5641,7 @@
                 <a:latin typeface="Calibri"/>
                 <a:ea typeface="Calibri"/>
               </a:rPr>
-              <a:t>Эмоции</a:t>
+              <a:t>Emotions</a:t>
             </a:r>
             <a:endParaRPr b="0" lang="en-US" sz="800" spc="-1" strike="noStrike">
               <a:solidFill>
@@ -6489,7 +6489,7 @@
                 <a:latin typeface="Calibri"/>
                 <a:ea typeface="Calibri"/>
               </a:rPr>
-              <a:t>Боли</a:t>
+              <a:t>Pains</a:t>
             </a:r>
             <a:endParaRPr b="0" lang="en-US" sz="800" spc="-1" strike="noStrike">
               <a:solidFill>
@@ -7337,7 +7337,7 @@
                 <a:latin typeface="Calibri"/>
                 <a:ea typeface="Calibri"/>
               </a:rPr>
-              <a:t>Возможн.</a:t>
+              <a:t>Opportun.</a:t>
             </a:r>
             <a:endParaRPr b="0" lang="en-US" sz="800" spc="-1" strike="noStrike">
               <a:solidFill>
@@ -8222,7 +8222,7 @@
                 <a:latin typeface="Calibri"/>
                 <a:ea typeface="Calibri"/>
               </a:rPr>
-              <a:t>Инсайты из интервью</a:t>
+              <a:t>Interview insights</a:t>
             </a:r>
             <a:endParaRPr b="0" lang="en-US" sz="1700" spc="-1" strike="noStrike">
               <a:solidFill>
@@ -8279,7 +8279,7 @@
                 <a:latin typeface="Calibri"/>
                 <a:ea typeface="Calibri"/>
               </a:rPr>
-              <a:t>ИССЛЕДОВАНИЕ</a:t>
+              <a:t>RESEARCH</a:t>
             </a:r>
             <a:endParaRPr b="0" lang="en-US" sz="800" spc="-1" strike="noStrike">
               <a:solidFill>
@@ -8385,7 +8385,7 @@
                 <a:latin typeface="Calibri"/>
                 <a:ea typeface="Calibri"/>
               </a:rPr>
-              <a:t>Источник: [интервью или суррогатные данные — отзывы, форумы; задача 9]</a:t>
+              <a:t>Source: [interviews or surrogate data — reviews, forums; task 9]</a:t>
             </a:r>
             <a:endParaRPr b="0" lang="en-US" sz="800" spc="-1" strike="noStrike">
               <a:solidFill>
@@ -8442,7 +8442,7 @@
                 <a:latin typeface="Calibri"/>
                 <a:ea typeface="Calibri"/>
               </a:rPr>
-              <a:t>ТОП-5 ПАТТЕРНОВ ИЗ STORY-BASED ИНТЕРВЬЮ (N РЕСПОНДЕНТОВ)</a:t>
+              <a:t>TOP 5 PATTERNS FROM THE STORY-BASED INTERVIEWS (N RESPONDENTS)</a:t>
             </a:r>
             <a:endParaRPr b="0" lang="en-US" sz="1000" spc="-1" strike="noStrike">
               <a:solidFill>
@@ -8654,7 +8654,7 @@
                 <a:latin typeface="Calibri"/>
                 <a:ea typeface="Calibri"/>
               </a:rPr>
-              <a:t>БОЛЬ</a:t>
+              <a:t>PAIN</a:t>
             </a:r>
             <a:endParaRPr b="0" lang="en-US" sz="700" spc="-1" strike="noStrike">
               <a:solidFill>
@@ -8711,7 +8711,7 @@
                 <a:latin typeface="Calibri"/>
                 <a:ea typeface="Calibri"/>
               </a:rPr>
-              <a:t>[Паттерн 1: что респонденты делают или чувствуют]</a:t>
+              <a:t>[Pattern 1: what respondents do or feel]</a:t>
             </a:r>
             <a:endParaRPr b="0" lang="en-US" sz="1000" spc="-1" strike="noStrike">
               <a:solidFill>
@@ -8980,7 +8980,7 @@
                 <a:latin typeface="Calibri"/>
                 <a:ea typeface="Calibri"/>
               </a:rPr>
-              <a:t>[Паттерн 2: что респонденты делают или чувствуют]</a:t>
+              <a:t>[Pattern 2: what respondents do or feel]</a:t>
             </a:r>
             <a:endParaRPr b="0" lang="en-US" sz="1000" spc="-1" strike="noStrike">
               <a:solidFill>
@@ -9192,7 +9192,7 @@
                 <a:latin typeface="Calibri"/>
                 <a:ea typeface="Calibri"/>
               </a:rPr>
-              <a:t>БОЛЬ</a:t>
+              <a:t>PAIN</a:t>
             </a:r>
             <a:endParaRPr b="0" lang="en-US" sz="700" spc="-1" strike="noStrike">
               <a:solidFill>
@@ -9249,7 +9249,7 @@
                 <a:latin typeface="Calibri"/>
                 <a:ea typeface="Calibri"/>
               </a:rPr>
-              <a:t>[Паттерн 3: что респонденты делают или чувствуют]</a:t>
+              <a:t>[Pattern 3: what respondents do or feel]</a:t>
             </a:r>
             <a:endParaRPr b="0" lang="en-US" sz="1000" spc="-1" strike="noStrike">
               <a:solidFill>
@@ -9518,7 +9518,7 @@
                 <a:latin typeface="Calibri"/>
                 <a:ea typeface="Calibri"/>
               </a:rPr>
-              <a:t>[Паттерн 4: что респонденты делают или чувствуют]</a:t>
+              <a:t>[Pattern 4: what respondents do or feel]</a:t>
             </a:r>
             <a:endParaRPr b="0" lang="en-US" sz="1000" spc="-1" strike="noStrike">
               <a:solidFill>
@@ -9730,7 +9730,7 @@
                 <a:latin typeface="Calibri"/>
                 <a:ea typeface="Calibri"/>
               </a:rPr>
-              <a:t>ИНСАЙТ</a:t>
+              <a:t>INSIGHT</a:t>
             </a:r>
             <a:endParaRPr b="0" lang="en-US" sz="700" spc="-1" strike="noStrike">
               <a:solidFill>
@@ -9787,7 +9787,7 @@
                 <a:latin typeface="Calibri"/>
                 <a:ea typeface="Calibri"/>
               </a:rPr>
-              <a:t>[Паттерн 5: что респонденты делают или чувствуют]</a:t>
+              <a:t>[Pattern 5: what respondents do or feel]</a:t>
             </a:r>
             <a:endParaRPr b="0" lang="en-US" sz="1000" spc="-1" strike="noStrike">
               <a:solidFill>
@@ -9930,7 +9930,7 @@
                 <a:latin typeface="Calibri"/>
                 <a:ea typeface="Calibri"/>
               </a:rPr>
-              <a:t>Opportunity Score — незакрытые потребности</a:t>
+              <a:t>Opportunity Score — underserved needs</a:t>
             </a:r>
             <a:endParaRPr b="0" lang="en-US" sz="1700" spc="-1" strike="noStrike">
               <a:solidFill>
@@ -9987,7 +9987,7 @@
                 <a:latin typeface="Calibri"/>
                 <a:ea typeface="Calibri"/>
               </a:rPr>
-              <a:t>ИССЛЕДОВАНИЕ</a:t>
+              <a:t>RESEARCH</a:t>
             </a:r>
             <a:endParaRPr b="0" lang="en-US" sz="800" spc="-1" strike="noStrike">
               <a:solidFill>
@@ -10093,7 +10093,7 @@
                 <a:latin typeface="Calibri"/>
                 <a:ea typeface="Calibri"/>
               </a:rPr>
-              <a:t>Источник: Opportunity Score (Ulwick); задачи 7, 17</a:t>
+              <a:t>Source: Opportunity Score (Ulwick); tasks 7, 17</a:t>
             </a:r>
             <a:endParaRPr b="0" lang="en-US" sz="800" spc="-1" strike="noStrike">
               <a:solidFill>
@@ -10150,7 +10150,7 @@
                 <a:latin typeface="Calibri"/>
                 <a:ea typeface="Calibri"/>
               </a:rPr>
-              <a:t>OPPORTUNITY SCORE = ВАЖНОСТЬ + max(ВАЖНОСТЬ − УДОВЛЕТВОРЁННОСТЬ, 0)  |  Приоритет: OS ≥ 15</a:t>
+              <a:t>OPPORTUNITY SCORE = IMPORTANCE + max(IMPORTANCE - SATISFACTION, 0)  |  Priority: OS &gt;= 15</a:t>
             </a:r>
             <a:endParaRPr b="0" lang="en-US" sz="1000" spc="-1" strike="noStrike">
               <a:solidFill>
@@ -10256,7 +10256,7 @@
                 <a:latin typeface="Calibri"/>
                 <a:ea typeface="Calibri"/>
               </a:rPr>
-              <a:t>Outcome (результат из Job Map)</a:t>
+              <a:t>Outcome (from the Job Map)</a:t>
             </a:r>
             <a:endParaRPr b="0" lang="en-US" sz="850" spc="-1" strike="noStrike">
               <a:solidFill>
@@ -10362,7 +10362,7 @@
                 <a:latin typeface="Calibri"/>
                 <a:ea typeface="Calibri"/>
               </a:rPr>
-              <a:t>Важность</a:t>
+              <a:t>Importance</a:t>
             </a:r>
             <a:endParaRPr b="0" lang="en-US" sz="850" spc="-1" strike="noStrike">
               <a:solidFill>
@@ -10468,7 +10468,7 @@
                 <a:latin typeface="Calibri"/>
                 <a:ea typeface="Calibri"/>
               </a:rPr>
-              <a:t>Удовл.</a:t>
+              <a:t>Satisf.</a:t>
             </a:r>
             <a:endParaRPr b="0" lang="en-US" sz="850" spc="-1" strike="noStrike">
               <a:solidFill>
@@ -10680,7 +10680,7 @@
                 <a:latin typeface="Calibri"/>
                 <a:ea typeface="Calibri"/>
               </a:rPr>
-              <a:t>Приоритет</a:t>
+              <a:t>Priority</a:t>
             </a:r>
             <a:endParaRPr b="0" lang="en-US" sz="850" spc="-1" strike="noStrike">
               <a:solidFill>
@@ -10786,7 +10786,7 @@
                 <a:latin typeface="Calibri"/>
                 <a:ea typeface="Calibri"/>
               </a:rPr>
-              <a:t>[Outcome 1 из Job Map]</a:t>
+              <a:t>[Outcome 1 from the Job Map]</a:t>
             </a:r>
             <a:endParaRPr b="0" lang="en-US" sz="950" spc="-1" strike="noStrike">
               <a:solidFill>
@@ -11220,7 +11220,7 @@
                 <a:latin typeface="Calibri"/>
                 <a:ea typeface="Calibri"/>
               </a:rPr>
-              <a:t>Критич.</a:t>
+              <a:t>Critical</a:t>
             </a:r>
             <a:endParaRPr b="0" lang="en-US" sz="950" spc="-1" strike="noStrike">
               <a:solidFill>
@@ -11326,7 +11326,7 @@
                 <a:latin typeface="Calibri"/>
                 <a:ea typeface="Calibri"/>
               </a:rPr>
-              <a:t>[Outcome 2 из Job Map]</a:t>
+              <a:t>[Outcome 2 from the Job Map]</a:t>
             </a:r>
             <a:endParaRPr b="0" lang="en-US" sz="950" spc="-1" strike="noStrike">
               <a:solidFill>
@@ -11760,7 +11760,7 @@
                 <a:latin typeface="Calibri"/>
                 <a:ea typeface="Calibri"/>
               </a:rPr>
-              <a:t>Высокий</a:t>
+              <a:t>High</a:t>
             </a:r>
             <a:endParaRPr b="0" lang="en-US" sz="950" spc="-1" strike="noStrike">
               <a:solidFill>
@@ -11866,7 +11866,7 @@
                 <a:latin typeface="Calibri"/>
                 <a:ea typeface="Calibri"/>
               </a:rPr>
-              <a:t>[Outcome 3 из Job Map]</a:t>
+              <a:t>[Outcome 3 from the Job Map]</a:t>
             </a:r>
             <a:endParaRPr b="0" lang="en-US" sz="950" spc="-1" strike="noStrike">
               <a:solidFill>
@@ -12300,7 +12300,7 @@
                 <a:latin typeface="Calibri"/>
                 <a:ea typeface="Calibri"/>
               </a:rPr>
-              <a:t>Средний</a:t>
+              <a:t>Medium</a:t>
             </a:r>
             <a:endParaRPr b="0" lang="en-US" sz="950" spc="-1" strike="noStrike">
               <a:solidFill>
@@ -12406,7 +12406,7 @@
                 <a:latin typeface="Calibri"/>
                 <a:ea typeface="Calibri"/>
               </a:rPr>
-              <a:t>[Outcome 4 из Job Map]</a:t>
+              <a:t>[Outcome 4 from the Job Map]</a:t>
             </a:r>
             <a:endParaRPr b="0" lang="en-US" sz="950" spc="-1" strike="noStrike">
               <a:solidFill>
@@ -12840,7 +12840,7 @@
                 <a:latin typeface="Calibri"/>
                 <a:ea typeface="Calibri"/>
               </a:rPr>
-              <a:t>Высокий</a:t>
+              <a:t>High</a:t>
             </a:r>
             <a:endParaRPr b="0" lang="en-US" sz="950" spc="-1" strike="noStrike">
               <a:solidFill>
@@ -12946,7 +12946,7 @@
                 <a:latin typeface="Calibri"/>
                 <a:ea typeface="Calibri"/>
               </a:rPr>
-              <a:t>[Outcome 5 из Job Map]</a:t>
+              <a:t>[Outcome 5 from the Job Map]</a:t>
             </a:r>
             <a:endParaRPr b="0" lang="en-US" sz="950" spc="-1" strike="noStrike">
               <a:solidFill>
@@ -13380,7 +13380,7 @@
                 <a:latin typeface="Calibri"/>
                 <a:ea typeface="Calibri"/>
               </a:rPr>
-              <a:t>Низкий</a:t>
+              <a:t>Low</a:t>
             </a:r>
             <a:endParaRPr b="0" lang="en-US" sz="950" spc="-1" strike="noStrike">
               <a:solidFill>
@@ -13496,7 +13496,7 @@
                 <a:latin typeface="Calibri"/>
                 <a:ea typeface="Calibri"/>
               </a:rPr>
-              <a:t>[Outcome с наивысшим OS] — критически незакрытая потребность → приоритетная возможность для OST</a:t>
+              <a:t>[The outcome with the highest OS] — a critically underserved need → the priority opportunity for the OST</a:t>
             </a:r>
             <a:endParaRPr b="0" lang="en-US" sz="900" spc="-1" strike="noStrike">
               <a:solidFill>
@@ -13639,7 +13639,7 @@
                 <a:latin typeface="Calibri"/>
                 <a:ea typeface="Calibri"/>
               </a:rPr>
-              <a:t>Сегменты / персоны потребителей</a:t>
+              <a:t>Customer segments / personas</a:t>
             </a:r>
             <a:endParaRPr b="0" lang="en-US" sz="1700" spc="-1" strike="noStrike">
               <a:solidFill>
@@ -13696,7 +13696,7 @@
                 <a:latin typeface="Calibri"/>
                 <a:ea typeface="Calibri"/>
               </a:rPr>
-              <a:t>ИССЛЕДОВАНИЕ</a:t>
+              <a:t>RESEARCH</a:t>
             </a:r>
             <a:endParaRPr b="0" lang="en-US" sz="800" spc="-1" strike="noStrike">
               <a:solidFill>
@@ -13751,7 +13751,7 @@
                 </a:solidFill>
                 <a:latin typeface="Arial"/>
               </a:rPr>
-              <a:t>Карточки персон из задачи 7 — главная ЦА и вторичные сегменты</a:t>
+              <a:t>Persona cards from task 7 — the primary audience and the secondary segments</a:t>
             </a:r>
             <a:endParaRPr b="0" lang="en-US" sz="1000" spc="-1" strike="noStrike">
               <a:solidFill>
@@ -13806,7 +13806,7 @@
                 </a:solidFill>
                 <a:latin typeface="Arial"/>
               </a:rPr>
-              <a:t>[ИМЯ ПЕРСОНЫ 1]</a:t>
+              <a:t>[PERSONA 1 NAME]</a:t>
             </a:r>
             <a:endParaRPr b="0" lang="en-US" sz="1200" spc="-1" strike="noStrike">
               <a:solidFill>
@@ -13828,7 +13828,7 @@
                 </a:solidFill>
                 <a:latin typeface="Arial"/>
               </a:rPr>
-              <a:t>[Возраст]</a:t>
+              <a:t>[Age]</a:t>
             </a:r>
             <a:endParaRPr b="0" lang="en-US" sz="900" spc="-1" strike="noStrike">
               <a:solidFill>
@@ -13883,7 +13883,7 @@
                 </a:solidFill>
                 <a:latin typeface="Arial"/>
               </a:rPr>
-              <a:t>КОНТЕКСТ</a:t>
+              <a:t>CONTEXT</a:t>
             </a:r>
             <a:endParaRPr b="0" lang="en-US" sz="800" spc="-1" strike="noStrike">
               <a:solidFill>
@@ -13905,7 +13905,7 @@
                 </a:solidFill>
                 <a:latin typeface="Arial"/>
               </a:rPr>
-              <a:t>Доход: </a:t>
+              <a:t>Income: </a:t>
             </a:r>
             <a:r>
               <a:rPr b="1" lang="ru-RU" sz="800" spc="-1" strike="noStrike">
@@ -13914,7 +13914,7 @@
                 </a:solidFill>
                 <a:latin typeface="Arial"/>
               </a:rPr>
-              <a:t>[X ₽/мес]</a:t>
+              <a:t>[X RUB/mo]</a:t>
             </a:r>
             <a:endParaRPr b="0" lang="en-US" sz="800" spc="-1" strike="noStrike">
               <a:solidFill>
@@ -13936,7 +13936,7 @@
                 </a:solidFill>
                 <a:latin typeface="Arial"/>
               </a:rPr>
-              <a:t>Город: </a:t>
+              <a:t>City: </a:t>
             </a:r>
             <a:r>
               <a:rPr b="1" lang="ru-RU" sz="800" spc="-1" strike="noStrike">
@@ -13945,7 +13945,7 @@
                 </a:solidFill>
                 <a:latin typeface="Arial"/>
               </a:rPr>
-              <a:t>[Город]</a:t>
+              <a:t>[City]</a:t>
             </a:r>
             <a:endParaRPr b="0" lang="en-US" sz="800" spc="-1" strike="noStrike">
               <a:solidFill>
@@ -13967,7 +13967,7 @@
                 </a:solidFill>
                 <a:latin typeface="Arial"/>
               </a:rPr>
-              <a:t>Роль: </a:t>
+              <a:t>Role: </a:t>
             </a:r>
             <a:r>
               <a:rPr b="1" lang="ru-RU" sz="800" spc="-1" strike="noStrike">
@@ -13976,7 +13976,7 @@
                 </a:solidFill>
                 <a:latin typeface="Arial"/>
               </a:rPr>
-              <a:t>[Должность, ситуация]</a:t>
+              <a:t>[Title, situation]</a:t>
             </a:r>
             <a:endParaRPr b="0" lang="en-US" sz="800" spc="-1" strike="noStrike">
               <a:solidFill>
@@ -14139,7 +14139,7 @@
                 </a:solidFill>
                 <a:latin typeface="Arial"/>
               </a:rPr>
-              <a:t>БОЛЬ</a:t>
+              <a:t>PAIN</a:t>
             </a:r>
             <a:endParaRPr b="0" lang="en-US" sz="800" spc="-1" strike="noStrike">
               <a:solidFill>
@@ -14161,7 +14161,7 @@
                 </a:solidFill>
                 <a:latin typeface="Arial"/>
               </a:rPr>
-              <a:t>[Топ-1 боль из Job Map]</a:t>
+              <a:t>[The top pain from the Job Map]</a:t>
             </a:r>
             <a:endParaRPr b="0" lang="en-US" sz="800" spc="-1" strike="noStrike">
               <a:solidFill>
@@ -14216,7 +14216,7 @@
                 </a:solidFill>
                 <a:latin typeface="Arial"/>
               </a:rPr>
-              <a:t>«[Ключевая цитата из интервью]»</a:t>
+              <a:t>"[Key quote from an interview]"</a:t>
             </a:r>
             <a:endParaRPr b="0" lang="en-US" sz="800" spc="-1" strike="noStrike">
               <a:solidFill>
@@ -14238,7 +14238,7 @@
                 </a:solidFill>
                 <a:latin typeface="Arial"/>
               </a:rPr>
-              <a:t>OS=[X]  |  [X руб.]</a:t>
+              <a:t>OS=[X]  |  [X RUB]</a:t>
             </a:r>
             <a:endParaRPr b="0" lang="en-US" sz="900" spc="-1" strike="noStrike">
               <a:solidFill>
@@ -14293,7 +14293,7 @@
                 </a:solidFill>
                 <a:latin typeface="Arial"/>
               </a:rPr>
-              <a:t>[ИМЯ ПЕРСОНЫ 2]</a:t>
+              <a:t>[PERSONA 2 NAME]</a:t>
             </a:r>
             <a:endParaRPr b="0" lang="en-US" sz="1200" spc="-1" strike="noStrike">
               <a:solidFill>
@@ -14315,7 +14315,7 @@
                 </a:solidFill>
                 <a:latin typeface="Arial"/>
               </a:rPr>
-              <a:t>[Возраст]</a:t>
+              <a:t>[Age]</a:t>
             </a:r>
             <a:endParaRPr b="0" lang="en-US" sz="900" spc="-1" strike="noStrike">
               <a:solidFill>
@@ -14370,7 +14370,7 @@
                 </a:solidFill>
                 <a:latin typeface="Arial"/>
               </a:rPr>
-              <a:t>КОНТЕКСТ</a:t>
+              <a:t>CONTEXT</a:t>
             </a:r>
             <a:endParaRPr b="0" lang="en-US" sz="800" spc="-1" strike="noStrike">
               <a:solidFill>
@@ -14392,7 +14392,7 @@
                 </a:solidFill>
                 <a:latin typeface="Arial"/>
               </a:rPr>
-              <a:t>Доход: </a:t>
+              <a:t>Income: </a:t>
             </a:r>
             <a:r>
               <a:rPr b="1" lang="ru-RU" sz="800" spc="-1" strike="noStrike">
@@ -14401,7 +14401,7 @@
                 </a:solidFill>
                 <a:latin typeface="Arial"/>
               </a:rPr>
-              <a:t>[X ₽/мес]</a:t>
+              <a:t>[X RUB/mo]</a:t>
             </a:r>
             <a:endParaRPr b="0" lang="en-US" sz="800" spc="-1" strike="noStrike">
               <a:solidFill>
@@ -14423,7 +14423,7 @@
                 </a:solidFill>
                 <a:latin typeface="Arial"/>
               </a:rPr>
-              <a:t>Город: </a:t>
+              <a:t>City: </a:t>
             </a:r>
             <a:r>
               <a:rPr b="1" lang="ru-RU" sz="800" spc="-1" strike="noStrike">
@@ -14432,7 +14432,7 @@
                 </a:solidFill>
                 <a:latin typeface="Arial"/>
               </a:rPr>
-              <a:t>[Город]</a:t>
+              <a:t>[City]</a:t>
             </a:r>
             <a:endParaRPr b="0" lang="en-US" sz="800" spc="-1" strike="noStrike">
               <a:solidFill>
@@ -14454,7 +14454,7 @@
                 </a:solidFill>
                 <a:latin typeface="Arial"/>
               </a:rPr>
-              <a:t>Роль: </a:t>
+              <a:t>Role: </a:t>
             </a:r>
             <a:r>
               <a:rPr b="1" lang="ru-RU" sz="800" spc="-1" strike="noStrike">
@@ -14463,7 +14463,7 @@
                 </a:solidFill>
                 <a:latin typeface="Arial"/>
               </a:rPr>
-              <a:t>[Должность, ситуация]</a:t>
+              <a:t>[Title, situation]</a:t>
             </a:r>
             <a:endParaRPr b="0" lang="en-US" sz="800" spc="-1" strike="noStrike">
               <a:solidFill>
@@ -14626,7 +14626,7 @@
                 </a:solidFill>
                 <a:latin typeface="Arial"/>
               </a:rPr>
-              <a:t>БОЛЬ</a:t>
+              <a:t>PAIN</a:t>
             </a:r>
             <a:endParaRPr b="0" lang="en-US" sz="800" spc="-1" strike="noStrike">
               <a:solidFill>
@@ -14648,7 +14648,7 @@
                 </a:solidFill>
                 <a:latin typeface="Arial"/>
               </a:rPr>
-              <a:t>[Топ-1 боль из Job Map]</a:t>
+              <a:t>[The top pain from the Job Map]</a:t>
             </a:r>
             <a:endParaRPr b="0" lang="en-US" sz="800" spc="-1" strike="noStrike">
               <a:solidFill>
@@ -14703,7 +14703,7 @@
                 </a:solidFill>
                 <a:latin typeface="Arial"/>
               </a:rPr>
-              <a:t>«[Ключевая цитата из интервью]»</a:t>
+              <a:t>"[Key quote from an interview]"</a:t>
             </a:r>
             <a:endParaRPr b="0" lang="en-US" sz="800" spc="-1" strike="noStrike">
               <a:solidFill>
@@ -14725,7 +14725,7 @@
                 </a:solidFill>
                 <a:latin typeface="Arial"/>
               </a:rPr>
-              <a:t>OS=[X]  |  [X руб.]</a:t>
+              <a:t>OS=[X]  |  [X RUB]</a:t>
             </a:r>
             <a:endParaRPr b="0" lang="en-US" sz="900" spc="-1" strike="noStrike">
               <a:solidFill>
@@ -14780,7 +14780,7 @@
                 </a:solidFill>
                 <a:latin typeface="Arial"/>
               </a:rPr>
-              <a:t>[ИМЯ ПЕРСОНЫ 3]</a:t>
+              <a:t>[PERSONA 3 NAME]</a:t>
             </a:r>
             <a:endParaRPr b="0" lang="en-US" sz="1200" spc="-1" strike="noStrike">
               <a:solidFill>
@@ -14802,7 +14802,7 @@
                 </a:solidFill>
                 <a:latin typeface="Arial"/>
               </a:rPr>
-              <a:t>[Возраст]</a:t>
+              <a:t>[Age]</a:t>
             </a:r>
             <a:endParaRPr b="0" lang="en-US" sz="900" spc="-1" strike="noStrike">
               <a:solidFill>
@@ -14857,7 +14857,7 @@
                 </a:solidFill>
                 <a:latin typeface="Arial"/>
               </a:rPr>
-              <a:t>КОНТЕКСТ</a:t>
+              <a:t>CONTEXT</a:t>
             </a:r>
             <a:endParaRPr b="0" lang="en-US" sz="800" spc="-1" strike="noStrike">
               <a:solidFill>
@@ -14879,7 +14879,7 @@
                 </a:solidFill>
                 <a:latin typeface="Arial"/>
               </a:rPr>
-              <a:t>Доход: </a:t>
+              <a:t>Income: </a:t>
             </a:r>
             <a:r>
               <a:rPr b="1" lang="ru-RU" sz="800" spc="-1" strike="noStrike">
@@ -14888,7 +14888,7 @@
                 </a:solidFill>
                 <a:latin typeface="Arial"/>
               </a:rPr>
-              <a:t>[X ₽/мес]</a:t>
+              <a:t>[X RUB/mo]</a:t>
             </a:r>
             <a:endParaRPr b="0" lang="en-US" sz="800" spc="-1" strike="noStrike">
               <a:solidFill>
@@ -14910,7 +14910,7 @@
                 </a:solidFill>
                 <a:latin typeface="Arial"/>
               </a:rPr>
-              <a:t>Город: </a:t>
+              <a:t>City: </a:t>
             </a:r>
             <a:r>
               <a:rPr b="1" lang="ru-RU" sz="800" spc="-1" strike="noStrike">
@@ -14919,7 +14919,7 @@
                 </a:solidFill>
                 <a:latin typeface="Arial"/>
               </a:rPr>
-              <a:t>[Город]</a:t>
+              <a:t>[City]</a:t>
             </a:r>
             <a:endParaRPr b="0" lang="en-US" sz="800" spc="-1" strike="noStrike">
               <a:solidFill>
@@ -14941,7 +14941,7 @@
                 </a:solidFill>
                 <a:latin typeface="Arial"/>
               </a:rPr>
-              <a:t>Роль: </a:t>
+              <a:t>Role: </a:t>
             </a:r>
             <a:r>
               <a:rPr b="1" lang="ru-RU" sz="800" spc="-1" strike="noStrike">
@@ -14950,7 +14950,7 @@
                 </a:solidFill>
                 <a:latin typeface="Arial"/>
               </a:rPr>
-              <a:t>[Должность, ситуация]</a:t>
+              <a:t>[Title, situation]</a:t>
             </a:r>
             <a:endParaRPr b="0" lang="en-US" sz="800" spc="-1" strike="noStrike">
               <a:solidFill>
@@ -15113,7 +15113,7 @@
                 </a:solidFill>
                 <a:latin typeface="Arial"/>
               </a:rPr>
-              <a:t>БОЛЬ</a:t>
+              <a:t>PAIN</a:t>
             </a:r>
             <a:endParaRPr b="0" lang="en-US" sz="800" spc="-1" strike="noStrike">
               <a:solidFill>
@@ -15135,7 +15135,7 @@
                 </a:solidFill>
                 <a:latin typeface="Arial"/>
               </a:rPr>
-              <a:t>[Топ-1 боль из Job Map]</a:t>
+              <a:t>[The top pain from the Job Map]</a:t>
             </a:r>
             <a:endParaRPr b="0" lang="en-US" sz="800" spc="-1" strike="noStrike">
               <a:solidFill>
@@ -15190,7 +15190,7 @@
                 </a:solidFill>
                 <a:latin typeface="Arial"/>
               </a:rPr>
-              <a:t>«[Ключевая цитата из интервью]»</a:t>
+              <a:t>"[Key quote from an interview]"</a:t>
             </a:r>
             <a:endParaRPr b="0" lang="en-US" sz="800" spc="-1" strike="noStrike">
               <a:solidFill>
@@ -15212,7 +15212,7 @@
                 </a:solidFill>
                 <a:latin typeface="Arial"/>
               </a:rPr>
-              <a:t>OS=[X]  |  [X руб.]</a:t>
+              <a:t>OS=[X]  |  [X RUB]</a:t>
             </a:r>
             <a:endParaRPr b="0" lang="en-US" sz="900" spc="-1" strike="noStrike">
               <a:solidFill>
@@ -15318,7 +15318,7 @@
                 <a:latin typeface="Calibri"/>
                 <a:ea typeface="Calibri"/>
               </a:rPr>
-              <a:t>Источник: [указать источник]</a:t>
+              <a:t>Source: [state the source]</a:t>
             </a:r>
             <a:endParaRPr b="0" lang="en-US" sz="800" spc="-1" strike="noStrike">
               <a:solidFill>
@@ -15461,7 +15461,7 @@
                 <a:latin typeface="Calibri"/>
                 <a:ea typeface="Calibri"/>
               </a:rPr>
-              <a:t>РАЗДЕЛ 03</a:t>
+              <a:t>SECTION 03</a:t>
             </a:r>
             <a:endParaRPr b="0" lang="en-US" sz="1100" spc="-1" strike="noStrike">
               <a:solidFill>
@@ -15518,7 +15518,7 @@
                 <a:latin typeface="Calibri"/>
                 <a:ea typeface="Calibri"/>
               </a:rPr>
-              <a:t>Текущий стратегический сценарий</a:t>
+              <a:t>Current strategic scenario</a:t>
             </a:r>
             <a:endParaRPr b="0" lang="en-US" sz="3400" spc="-1" strike="noStrike">
               <a:solidFill>
@@ -15661,7 +15661,7 @@
                 <a:latin typeface="Calibri"/>
                 <a:ea typeface="Calibri"/>
               </a:rPr>
-              <a:t>Цели компании</a:t>
+              <a:t>Company goals</a:t>
             </a:r>
             <a:endParaRPr b="0" lang="en-US" sz="1700" spc="-1" strike="noStrike">
               <a:solidFill>
@@ -15718,7 +15718,7 @@
                 <a:latin typeface="Calibri"/>
                 <a:ea typeface="Calibri"/>
               </a:rPr>
-              <a:t>СТРАТЕГИЧЕСКИЙ СЦЕНАРИЙ</a:t>
+              <a:t>STRATEGIC SCENARIO</a:t>
             </a:r>
             <a:endParaRPr b="0" lang="en-US" sz="800" spc="-1" strike="noStrike">
               <a:solidFill>
@@ -15824,7 +15824,7 @@
                 <a:latin typeface="Calibri"/>
                 <a:ea typeface="Calibri"/>
               </a:rPr>
-              <a:t>Источник: задача 12; финансовая модель (базовый сценарий)</a:t>
+              <a:t>Source: task 12; the financial model (base scenario)</a:t>
             </a:r>
             <a:endParaRPr b="0" lang="en-US" sz="800" spc="-1" strike="noStrike">
               <a:solidFill>
@@ -16043,7 +16043,7 @@
                 <a:latin typeface="Calibri"/>
                 <a:ea typeface="Calibri"/>
               </a:rPr>
-              <a:t>Лет до окупаемости</a:t>
+              <a:t>Years to payback</a:t>
             </a:r>
             <a:endParaRPr b="0" lang="en-US" sz="900" spc="-1" strike="noStrike">
               <a:solidFill>
@@ -16205,7 +16205,7 @@
                 <a:latin typeface="Calibri"/>
                 <a:ea typeface="Calibri"/>
               </a:rPr>
-              <a:t>[X млн ₽]</a:t>
+              <a:t>[X RUB m]</a:t>
             </a:r>
             <a:endParaRPr b="0" lang="en-US" sz="2800" spc="-1" strike="noStrike">
               <a:solidFill>
@@ -16262,7 +16262,7 @@
                 <a:latin typeface="Calibri"/>
                 <a:ea typeface="Calibri"/>
               </a:rPr>
-              <a:t>Цель выручки (Y1)</a:t>
+              <a:t>Revenue target (Y1)</a:t>
             </a:r>
             <a:endParaRPr b="0" lang="en-US" sz="900" spc="-1" strike="noStrike">
               <a:solidFill>
@@ -16481,7 +16481,7 @@
                 <a:latin typeface="Calibri"/>
                 <a:ea typeface="Calibri"/>
               </a:rPr>
-              <a:t>Целевая доля рынка</a:t>
+              <a:t>Target market share</a:t>
             </a:r>
             <a:endParaRPr b="0" lang="en-US" sz="900" spc="-1" strike="noStrike">
               <a:solidFill>
@@ -16643,7 +16643,7 @@
                 <a:latin typeface="Calibri"/>
                 <a:ea typeface="Calibri"/>
               </a:rPr>
-              <a:t>Стратегические цели</a:t>
+              <a:t>Strategic goals</a:t>
             </a:r>
             <a:endParaRPr b="0" lang="en-US" sz="1000" spc="-1" strike="noStrike">
               <a:solidFill>
@@ -16702,7 +16702,7 @@
                 <a:latin typeface="Calibri"/>
                 <a:ea typeface="Calibri"/>
               </a:rPr>
-              <a:t>Цель 1 (6–12 мес.): [измеримая цель с цифрой и сроком]</a:t>
+              <a:t>Goal 1 (6-12 months): [a measurable goal with a number and a deadline]</a:t>
             </a:r>
             <a:endParaRPr b="0" lang="en-US" sz="950" spc="-1" strike="noStrike">
               <a:solidFill>
@@ -16730,7 +16730,7 @@
                 <a:latin typeface="Calibri"/>
                 <a:ea typeface="Calibri"/>
               </a:rPr>
-              <a:t>Цель 2 (1–2 года): [измеримая цель с цифрой и сроком]</a:t>
+              <a:t>Goal 2 (1-2 years): [a measurable goal with a number and a deadline]</a:t>
             </a:r>
             <a:endParaRPr b="0" lang="en-US" sz="950" spc="-1" strike="noStrike">
               <a:solidFill>
@@ -16758,7 +16758,7 @@
                 <a:latin typeface="Calibri"/>
                 <a:ea typeface="Calibri"/>
               </a:rPr>
-              <a:t>Цель 3 (3–5 лет): [измеримая цель с цифрой и сроком]</a:t>
+              <a:t>Goal 3 (3-5 years): [a measurable goal with a number and a deadline]</a:t>
             </a:r>
             <a:endParaRPr b="0" lang="en-US" sz="950" spc="-1" strike="noStrike">
               <a:solidFill>
@@ -16786,7 +16786,7 @@
                 <a:latin typeface="Calibri"/>
                 <a:ea typeface="Calibri"/>
               </a:rPr>
-              <a:t>KPI: [ключевые метрики, по которым отслеживается прогресс]</a:t>
+              <a:t>KPI: [the key metrics progress is tracked by]</a:t>
             </a:r>
             <a:endParaRPr b="0" lang="en-US" sz="950" spc="-1" strike="noStrike">
               <a:solidFill>
@@ -16929,7 +16929,7 @@
                 <a:latin typeface="Calibri"/>
                 <a:ea typeface="Calibri"/>
               </a:rPr>
-              <a:t>Lean Canvas / BMC — бизнес-модель</a:t>
+              <a:t>Lean Canvas / BMC — the business model</a:t>
             </a:r>
             <a:endParaRPr b="0" lang="en-US" sz="1700" spc="-1" strike="noStrike">
               <a:solidFill>
@@ -16986,7 +16986,7 @@
                 <a:latin typeface="Calibri"/>
                 <a:ea typeface="Calibri"/>
               </a:rPr>
-              <a:t>СТРАТЕГИЧЕСКИЙ СЦЕНАРИЙ</a:t>
+              <a:t>STRATEGIC SCENARIO</a:t>
             </a:r>
             <a:endParaRPr b="0" lang="en-US" sz="800" spc="-1" strike="noStrike">
               <a:solidFill>
@@ -17092,7 +17092,7 @@
                 <a:latin typeface="Calibri"/>
                 <a:ea typeface="Calibri"/>
               </a:rPr>
-              <a:t>Источник: [указать источник]</a:t>
+              <a:t>Source: [state the source]</a:t>
             </a:r>
             <a:endParaRPr b="0" lang="en-US" sz="800" spc="-1" strike="noStrike">
               <a:solidFill>
@@ -17149,7 +17149,7 @@
                 <a:latin typeface="Calibri"/>
                 <a:ea typeface="Calibri"/>
               </a:rPr>
-              <a:t>LEAN CANVAS / BMC — 9 БЛОКОВ</a:t>
+              <a:t>LEAN CANVAS / BMC — 9 BLOCKS</a:t>
             </a:r>
             <a:endParaRPr b="0" lang="en-US" sz="1000" spc="-1" strike="noStrike">
               <a:solidFill>
@@ -17255,7 +17255,7 @@
                 <a:latin typeface="Calibri"/>
                 <a:ea typeface="Calibri"/>
               </a:rPr>
-              <a:t>1. Проблема</a:t>
+              <a:t>1. Problem</a:t>
             </a:r>
             <a:endParaRPr b="0" lang="en-US" sz="850" spc="-1" strike="noStrike">
               <a:solidFill>
@@ -17311,7 +17311,7 @@
                 <a:latin typeface="Calibri"/>
                 <a:ea typeface="Calibri"/>
               </a:rPr>
-              <a:t>[Топ-3 проблемы целевых клиентов]</a:t>
+              <a:t>[Top 3 problems of the target customers]</a:t>
             </a:r>
             <a:endParaRPr b="0" lang="en-US" sz="750" spc="-1" strike="noStrike">
               <a:solidFill>
@@ -17446,7 +17446,7 @@
                 <a:latin typeface="Calibri"/>
                 <a:ea typeface="Calibri"/>
               </a:rPr>
-              <a:t>2. Сегменты (ранние последователи)</a:t>
+              <a:t>2. Segments (early adopters)</a:t>
             </a:r>
             <a:endParaRPr b="0" lang="en-US" sz="850" spc="-1" strike="noStrike">
               <a:solidFill>
@@ -17505,7 +17505,7 @@
                 <a:latin typeface="Calibri"/>
                 <a:ea typeface="Calibri"/>
               </a:rPr>
-              <a:t>[Кто они? Демография, поведение, ситуация]</a:t>
+              <a:t>[Who are they? Demographics, behaviour, situation]</a:t>
             </a:r>
             <a:endParaRPr b="0" lang="en-US" sz="750" spc="-1" strike="noStrike">
               <a:solidFill>
@@ -17611,7 +17611,7 @@
                 <a:latin typeface="Calibri"/>
                 <a:ea typeface="Calibri"/>
               </a:rPr>
-              <a:t>3. Уникальное ЦП</a:t>
+              <a:t>3. Unique value proposition</a:t>
             </a:r>
             <a:endParaRPr b="0" lang="en-US" sz="850" spc="-1" strike="noStrike">
               <a:solidFill>
@@ -17670,7 +17670,7 @@
                 <a:latin typeface="Calibri"/>
                 <a:ea typeface="Calibri"/>
               </a:rPr>
-              <a:t>[Уникальное ценностное предложение]</a:t>
+              <a:t>[Unique value proposition]</a:t>
             </a:r>
             <a:endParaRPr b="0" lang="en-US" sz="750" spc="-1" strike="noStrike">
               <a:solidFill>
@@ -17776,7 +17776,7 @@
                 <a:latin typeface="Calibri"/>
                 <a:ea typeface="Calibri"/>
               </a:rPr>
-              <a:t>4. Решение</a:t>
+              <a:t>4. Solution</a:t>
             </a:r>
             <a:endParaRPr b="0" lang="en-US" sz="850" spc="-1" strike="noStrike">
               <a:solidFill>
@@ -17832,7 +17832,7 @@
                 <a:latin typeface="Calibri"/>
                 <a:ea typeface="Calibri"/>
               </a:rPr>
-              <a:t>[Как решаем: топ-3 фичи]</a:t>
+              <a:t>[How we solve it: the top 3 features]</a:t>
             </a:r>
             <a:endParaRPr b="0" lang="en-US" sz="750" spc="-1" strike="noStrike">
               <a:solidFill>
@@ -17967,7 +17967,7 @@
                 <a:latin typeface="Calibri"/>
                 <a:ea typeface="Calibri"/>
               </a:rPr>
-              <a:t>5. Каналы</a:t>
+              <a:t>5. Channels</a:t>
             </a:r>
             <a:endParaRPr b="0" lang="en-US" sz="850" spc="-1" strike="noStrike">
               <a:solidFill>
@@ -18026,7 +18026,7 @@
                 <a:latin typeface="Calibri"/>
                 <a:ea typeface="Calibri"/>
               </a:rPr>
-              <a:t>[Каналы привлечения и удержания]</a:t>
+              <a:t>[Acquisition and retention channels]</a:t>
             </a:r>
             <a:endParaRPr b="0" lang="en-US" sz="750" spc="-1" strike="noStrike">
               <a:solidFill>
@@ -18188,7 +18188,7 @@
                 <a:latin typeface="Calibri"/>
                 <a:ea typeface="Calibri"/>
               </a:rPr>
-              <a:t>6. Потоки дохода</a:t>
+              <a:t>6. Revenue streams</a:t>
             </a:r>
             <a:endParaRPr b="0" lang="en-US" sz="1000" spc="-1" strike="noStrike">
               <a:solidFill>
@@ -18247,7 +18247,7 @@
                 <a:latin typeface="Calibri"/>
                 <a:ea typeface="Calibri"/>
               </a:rPr>
-              <a:t>[Подписка / разовые / комиссия. Средний чек: X руб.]</a:t>
+              <a:t>[Subscription / one-off / commission. Average ticket: X RUB]</a:t>
             </a:r>
             <a:endParaRPr b="0" lang="en-US" sz="950" spc="-1" strike="noStrike">
               <a:solidFill>
@@ -18409,7 +18409,7 @@
                 <a:latin typeface="Calibri"/>
                 <a:ea typeface="Calibri"/>
               </a:rPr>
-              <a:t>7. Структура затрат</a:t>
+              <a:t>7. Cost structure</a:t>
             </a:r>
             <a:endParaRPr b="0" lang="en-US" sz="1000" spc="-1" strike="noStrike">
               <a:solidFill>
@@ -18468,7 +18468,7 @@
                 <a:latin typeface="Calibri"/>
                 <a:ea typeface="Calibri"/>
               </a:rPr>
-              <a:t>[Фиксированные: X руб. | Переменные: Y руб. | CAC: Z руб.]</a:t>
+              <a:t>[Fixed: X RUB | Variable: Y RUB | CAC: Z RUB]</a:t>
             </a:r>
             <a:endParaRPr b="0" lang="en-US" sz="950" spc="-1" strike="noStrike">
               <a:solidFill>
@@ -18630,7 +18630,7 @@
                 <a:latin typeface="Calibri"/>
                 <a:ea typeface="Calibri"/>
               </a:rPr>
-              <a:t>8. Ключевые метрики</a:t>
+              <a:t>8. Key metrics</a:t>
             </a:r>
             <a:endParaRPr b="0" lang="en-US" sz="1000" spc="-1" strike="noStrike">
               <a:solidFill>
@@ -18851,7 +18851,7 @@
                 <a:latin typeface="Calibri"/>
                 <a:ea typeface="Calibri"/>
               </a:rPr>
-              <a:t>9. Нечестное преимущество</a:t>
+              <a:t>9. Unfair advantage</a:t>
             </a:r>
             <a:endParaRPr b="0" lang="en-US" sz="1000" spc="-1" strike="noStrike">
               <a:solidFill>
@@ -18905,7 +18905,7 @@
                 <a:latin typeface="Calibri"/>
                 <a:ea typeface="Calibri"/>
               </a:rPr>
-              <a:t>[Что сложно скопировать: технология, данные, партнёрства, бренд]</a:t>
+              <a:t>[What is hard to copy: technology, data, partnerships, brand]</a:t>
             </a:r>
             <a:endParaRPr b="0" lang="en-US" sz="950" spc="-1" strike="noStrike">
               <a:solidFill>
@@ -19074,7 +19074,7 @@
                 <a:latin typeface="Calibri"/>
                 <a:ea typeface="Calibri"/>
               </a:rPr>
-              <a:t>Содержание</a:t>
+              <a:t>Contents</a:t>
             </a:r>
             <a:endParaRPr b="0" lang="en-US" sz="1700" spc="-1" strike="noStrike">
               <a:solidFill>
@@ -19180,7 +19180,7 @@
                 <a:latin typeface="Calibri"/>
                 <a:ea typeface="Calibri"/>
               </a:rPr>
-              <a:t>Источник: Product Discovery [название проекта], [месяц год]</a:t>
+              <a:t>Source: Product Discovery [project name], [month year]</a:t>
             </a:r>
             <a:endParaRPr b="0" lang="en-US" sz="800" spc="-1" strike="noStrike">
               <a:solidFill>
@@ -19343,7 +19343,7 @@
                 <a:latin typeface="Calibri"/>
                 <a:ea typeface="Calibri"/>
               </a:rPr>
-              <a:t>Анализ рынка</a:t>
+              <a:t>Market analysis</a:t>
             </a:r>
             <a:endParaRPr b="0" lang="en-US" sz="1300" spc="-1" strike="noStrike">
               <a:solidFill>
@@ -19400,7 +19400,7 @@
                 <a:latin typeface="Calibri"/>
                 <a:ea typeface="Calibri"/>
               </a:rPr>
-              <a:t>TAM/SAM/SOM · Динамика · Тренды · Value Chain · Конкуренты · PESTEL</a:t>
+              <a:t>TAM/SAM/SOM · Dynamics · Trends · Value chain · Competitors · PESTEL</a:t>
             </a:r>
             <a:endParaRPr b="0" lang="en-US" sz="900" spc="-1" strike="noStrike">
               <a:solidFill>
@@ -19563,7 +19563,7 @@
                 <a:latin typeface="Calibri"/>
                 <a:ea typeface="Calibri"/>
               </a:rPr>
-              <a:t>Исследование потребителей</a:t>
+              <a:t>Customer research</a:t>
             </a:r>
             <a:endParaRPr b="0" lang="en-US" sz="1300" spc="-1" strike="noStrike">
               <a:solidFill>
@@ -19620,7 +19620,7 @@
                 <a:latin typeface="Calibri"/>
                 <a:ea typeface="Calibri"/>
               </a:rPr>
-              <a:t>JTBD · CJM · Инсайты · Opportunity Score · Персоны</a:t>
+              <a:t>JTBD · CJM · Insights · Opportunity Score · Personas</a:t>
             </a:r>
             <a:endParaRPr b="0" lang="en-US" sz="900" spc="-1" strike="noStrike">
               <a:solidFill>
@@ -19783,7 +19783,7 @@
                 <a:latin typeface="Calibri"/>
                 <a:ea typeface="Calibri"/>
               </a:rPr>
-              <a:t>Текущий стратегический сценарий</a:t>
+              <a:t>Current strategic scenario</a:t>
             </a:r>
             <a:endParaRPr b="0" lang="en-US" sz="1300" spc="-1" strike="noStrike">
               <a:solidFill>
@@ -19840,7 +19840,7 @@
                 <a:latin typeface="Calibri"/>
                 <a:ea typeface="Calibri"/>
               </a:rPr>
-              <a:t>Цели · Lean Canvas/BMC · PAC · SWOT · Консистентность · Юнит-экономика</a:t>
+              <a:t>Goals · Lean Canvas/BMC · PAC · SWOT · Consistency · Unit economics</a:t>
             </a:r>
             <a:endParaRPr b="0" lang="en-US" sz="900" spc="-1" strike="noStrike">
               <a:solidFill>
@@ -20060,7 +20060,7 @@
                 <a:latin typeface="Calibri"/>
                 <a:ea typeface="Calibri"/>
               </a:rPr>
-              <a:t>Уровни 1–2: цель + возможности · Уровни 3–4: решения + эксперименты</a:t>
+              <a:t>Levels 1-2: outcome + opportunities · Levels 3-4: solutions + experiments</a:t>
             </a:r>
             <a:endParaRPr b="0" lang="en-US" sz="900" spc="-1" strike="noStrike">
               <a:solidFill>
@@ -20223,7 +20223,7 @@
                 <a:latin typeface="Calibri"/>
                 <a:ea typeface="Calibri"/>
               </a:rPr>
-              <a:t>Альтернативный сценарий</a:t>
+              <a:t>Alternative scenario</a:t>
             </a:r>
             <a:endParaRPr b="0" lang="en-US" sz="1300" spc="-1" strike="noStrike">
               <a:solidFill>
@@ -20280,7 +20280,7 @@
                 <a:latin typeface="Calibri"/>
                 <a:ea typeface="Calibri"/>
               </a:rPr>
-              <a:t>Ключевые изменения · RICE · Пул гипотез + план тестирования</a:t>
+              <a:t>Key changes · RICE · Hypothesis pool + testing plan</a:t>
             </a:r>
             <a:endParaRPr b="0" lang="en-US" sz="900" spc="-1" strike="noStrike">
               <a:solidFill>
@@ -20443,7 +20443,7 @@
                 <a:latin typeface="Calibri"/>
                 <a:ea typeface="Calibri"/>
               </a:rPr>
-              <a:t>PMF-метрики и следующие шаги</a:t>
+              <a:t>PMF metrics and next steps</a:t>
             </a:r>
             <a:endParaRPr b="0" lang="en-US" sz="1300" spc="-1" strike="noStrike">
               <a:solidFill>
@@ -20500,7 +20500,7 @@
                 <a:latin typeface="Calibri"/>
                 <a:ea typeface="Calibri"/>
               </a:rPr>
-              <a:t>PMF по фазам · OS финальный (топ-10) · Следующие шаги</a:t>
+              <a:t>PMF by phase · Final OS (top 10) · Next steps</a:t>
             </a:r>
             <a:endParaRPr b="0" lang="en-US" sz="900" spc="-1" strike="noStrike">
               <a:solidFill>
@@ -20643,7 +20643,7 @@
                 <a:latin typeface="Calibri"/>
                 <a:ea typeface="Calibri"/>
               </a:rPr>
-              <a:t>PAC — Product Attribute Canvas (4 мира)</a:t>
+              <a:t>PAC — Product Attribute Canvas (4 worlds)</a:t>
             </a:r>
             <a:endParaRPr b="0" lang="en-US" sz="1700" spc="-1" strike="noStrike">
               <a:solidFill>
@@ -20700,7 +20700,7 @@
                 <a:latin typeface="Calibri"/>
                 <a:ea typeface="Calibri"/>
               </a:rPr>
-              <a:t>СТРАТЕГИЧЕСКИЙ СЦЕНАРИЙ</a:t>
+              <a:t>STRATEGIC SCENARIO</a:t>
             </a:r>
             <a:endParaRPr b="0" lang="en-US" sz="800" spc="-1" strike="noStrike">
               <a:solidFill>
@@ -20806,7 +20806,7 @@
                 <a:latin typeface="Calibri"/>
                 <a:ea typeface="Calibri"/>
               </a:rPr>
-              <a:t>Источник: PAC (Product Attribute Canvas); задача 10</a:t>
+              <a:t>Source: PAC (Product Attribute Canvas); task 10</a:t>
             </a:r>
             <a:endParaRPr b="0" lang="en-US" sz="800" spc="-1" strike="noStrike">
               <a:solidFill>
@@ -20978,7 +20978,7 @@
                 <a:latin typeface="Calibri"/>
                 <a:ea typeface="Calibri"/>
               </a:rPr>
-              <a:t>Customer World — сегменты и Jobs</a:t>
+              <a:t>Customer World — segments and jobs</a:t>
             </a:r>
             <a:endParaRPr b="0" lang="en-US" sz="1000" spc="-1" strike="noStrike">
               <a:solidFill>
@@ -21037,7 +21037,7 @@
                 <a:latin typeface="Calibri"/>
                 <a:ea typeface="Calibri"/>
               </a:rPr>
-              <a:t>Сегмент: [персона, возраст, доход]. Ситуация: [что хочет и что мешает]</a:t>
+              <a:t>Segment: [persona, age, income]. Situation: [what they want and what blocks them]</a:t>
             </a:r>
             <a:endParaRPr b="0" lang="en-US" sz="950" spc="-1" strike="noStrike">
               <a:solidFill>
@@ -21065,7 +21065,7 @@
                 <a:latin typeface="Calibri"/>
                 <a:ea typeface="Calibri"/>
               </a:rPr>
-              <a:t>Jobs: 1) [работа 1] 2) [работа 2] 3) [работа 3]</a:t>
+              <a:t>Jobs: 1) [job 1] 2) [job 2] 3) [job 3]</a:t>
             </a:r>
             <a:endParaRPr b="0" lang="en-US" sz="950" spc="-1" strike="noStrike">
               <a:solidFill>
@@ -21093,7 +21093,7 @@
                 <a:latin typeface="Calibri"/>
                 <a:ea typeface="Calibri"/>
               </a:rPr>
-              <a:t>ЦП «[ценностное предложение]» закрывает Jobs: [чем именно]</a:t>
+              <a:t>The value proposition "[statement]" closes these jobs: [how exactly]</a:t>
             </a:r>
             <a:endParaRPr b="0" lang="en-US" sz="950" spc="-1" strike="noStrike">
               <a:solidFill>
@@ -21265,7 +21265,7 @@
                 <a:latin typeface="Calibri"/>
                 <a:ea typeface="Calibri"/>
               </a:rPr>
-              <a:t>Competitor World — дифференциация</a:t>
+              <a:t>Competitor World — differentiation</a:t>
             </a:r>
             <a:endParaRPr b="0" lang="en-US" sz="1000" spc="-1" strike="noStrike">
               <a:solidFill>
@@ -21324,7 +21324,7 @@
                 <a:latin typeface="Calibri"/>
                 <a:ea typeface="Calibri"/>
               </a:rPr>
-              <a:t>[Конкурент 1]: [слабость]. [Конкурент 2]: [слабость]. Мы: [чем отличаемся]</a:t>
+              <a:t>[Competitor 1]: [weakness]. [Competitor 2]: [weakness]. Us: [how we differ]</a:t>
             </a:r>
             <a:endParaRPr b="0" lang="en-US" sz="950" spc="-1" strike="noStrike">
               <a:solidFill>
@@ -21352,7 +21352,7 @@
                 <a:latin typeface="Calibri"/>
                 <a:ea typeface="Calibri"/>
               </a:rPr>
-              <a:t>[Конкурент 3]: [слабость]. [Конкурент 4]: [слабость]. Незанятая ниша: [описание]</a:t>
+              <a:t>[Competitor 3]: [weakness]. [Competitor 4]: [weakness]. Unoccupied niche: [description]</a:t>
             </a:r>
             <a:endParaRPr b="0" lang="en-US" sz="950" spc="-1" strike="noStrike">
               <a:solidFill>
@@ -21380,7 +21380,7 @@
                 <a:latin typeface="Calibri"/>
                 <a:ea typeface="Calibri"/>
               </a:rPr>
-              <a:t>Мы закрываем OS=[N] «[outcome]» — [почему конкуренты этого не делают]</a:t>
+              <a:t>We close OS=[N] "[outcome]" — [why competitors do not]</a:t>
             </a:r>
             <a:endParaRPr b="0" lang="en-US" sz="950" spc="-1" strike="noStrike">
               <a:solidFill>
@@ -21552,7 +21552,7 @@
                 <a:latin typeface="Calibri"/>
                 <a:ea typeface="Calibri"/>
               </a:rPr>
-              <a:t>Distribution World — активация и рост</a:t>
+              <a:t>Distribution World — activation and growth</a:t>
             </a:r>
             <a:endParaRPr b="0" lang="en-US" sz="1000" spc="-1" strike="noStrike">
               <a:solidFill>
@@ -21611,7 +21611,7 @@
                 <a:latin typeface="Calibri"/>
                 <a:ea typeface="Calibri"/>
               </a:rPr>
-              <a:t>Aha: «[что клиент осознаёт]» — [в какой момент это происходит]</a:t>
+              <a:t>Aha: "[what the customer realises]" — [the moment it happens]</a:t>
             </a:r>
             <a:endParaRPr b="0" lang="en-US" sz="950" spc="-1" strike="noStrike">
               <a:solidFill>
@@ -21639,7 +21639,7 @@
                 <a:latin typeface="Calibri"/>
                 <a:ea typeface="Calibri"/>
               </a:rPr>
-              <a:t>[Шаг 1] → [шаг 2] → [шаг 3] → [петля роста]</a:t>
+              <a:t>[Step 1] → [step 2] → [step 3] → [growth loop]</a:t>
             </a:r>
             <a:endParaRPr b="0" lang="en-US" sz="950" spc="-1" strike="noStrike">
               <a:solidFill>
@@ -21811,7 +21811,7 @@
                 <a:latin typeface="Calibri"/>
                 <a:ea typeface="Calibri"/>
               </a:rPr>
-              <a:t>Product World — фичи и уникальные свойства</a:t>
+              <a:t>Product World — features and unique properties</a:t>
             </a:r>
             <a:endParaRPr b="0" lang="en-US" sz="1000" spc="-1" strike="noStrike">
               <a:solidFill>
@@ -21870,7 +21870,7 @@
                 <a:latin typeface="Calibri"/>
                 <a:ea typeface="Calibri"/>
               </a:rPr>
-              <a:t>Фича 1: [название] → «Когда [ситуация], я [действие], чтобы [результат]»</a:t>
+              <a:t>Feature 1: [name] → "When [situation], I [action], so that [outcome]"</a:t>
             </a:r>
             <a:endParaRPr b="0" lang="en-US" sz="950" spc="-1" strike="noStrike">
               <a:solidFill>
@@ -21898,7 +21898,7 @@
                 <a:latin typeface="Calibri"/>
                 <a:ea typeface="Calibri"/>
               </a:rPr>
-              <a:t>Фича 2: [название] — [какую работу закрывает]</a:t>
+              <a:t>Feature 2: [name] — [which job it closes]</a:t>
             </a:r>
             <a:endParaRPr b="0" lang="en-US" sz="950" spc="-1" strike="noStrike">
               <a:solidFill>
@@ -21926,7 +21926,7 @@
                 <a:latin typeface="Calibri"/>
                 <a:ea typeface="Calibri"/>
               </a:rPr>
-              <a:t>Фича 3: [название] — [какую работу закрывает]</a:t>
+              <a:t>Feature 3: [name] — [which job it closes]</a:t>
             </a:r>
             <a:endParaRPr b="0" lang="en-US" sz="950" spc="-1" strike="noStrike">
               <a:solidFill>
@@ -22069,7 +22069,7 @@
                 <a:latin typeface="Calibri"/>
                 <a:ea typeface="Calibri"/>
               </a:rPr>
-              <a:t>SWOT-анализ</a:t>
+              <a:t>SWOT analysis</a:t>
             </a:r>
             <a:endParaRPr b="0" lang="en-US" sz="1700" spc="-1" strike="noStrike">
               <a:solidFill>
@@ -22126,7 +22126,7 @@
                 <a:latin typeface="Calibri"/>
                 <a:ea typeface="Calibri"/>
               </a:rPr>
-              <a:t>СТРАТЕГИЧЕСКИЙ СЦЕНАРИЙ</a:t>
+              <a:t>STRATEGIC SCENARIO</a:t>
             </a:r>
             <a:endParaRPr b="0" lang="en-US" sz="800" spc="-1" strike="noStrike">
               <a:solidFill>
@@ -22232,7 +22232,7 @@
                 <a:latin typeface="Calibri"/>
                 <a:ea typeface="Calibri"/>
               </a:rPr>
-              <a:t>Источник: задача 11 (SWOT), с опорой на задачи 2 и 3</a:t>
+              <a:t>Source: task 11 (SWOT), grounded in tasks 2 and 3</a:t>
             </a:r>
             <a:endParaRPr b="0" lang="en-US" sz="800" spc="-1" strike="noStrike">
               <a:solidFill>
@@ -22394,7 +22394,7 @@
                 <a:latin typeface="Calibri"/>
                 <a:ea typeface="Calibri"/>
               </a:rPr>
-              <a:t>Сильные стороны</a:t>
+              <a:t>Strengths</a:t>
             </a:r>
             <a:endParaRPr b="0" lang="en-US" sz="1000" spc="-1" strike="noStrike">
               <a:solidFill>
@@ -22453,7 +22453,7 @@
                 <a:latin typeface="Calibri"/>
                 <a:ea typeface="Calibri"/>
               </a:rPr>
-              <a:t>[Сильная сторона 1]</a:t>
+              <a:t>[Strength 1]</a:t>
             </a:r>
             <a:endParaRPr b="0" lang="en-US" sz="950" spc="-1" strike="noStrike">
               <a:solidFill>
@@ -22481,7 +22481,7 @@
                 <a:latin typeface="Calibri"/>
                 <a:ea typeface="Calibri"/>
               </a:rPr>
-              <a:t>[Сильная сторона 2]</a:t>
+              <a:t>[Strength 2]</a:t>
             </a:r>
             <a:endParaRPr b="0" lang="en-US" sz="950" spc="-1" strike="noStrike">
               <a:solidFill>
@@ -22509,7 +22509,7 @@
                 <a:latin typeface="Calibri"/>
                 <a:ea typeface="Calibri"/>
               </a:rPr>
-              <a:t>[Сильная сторона 3]</a:t>
+              <a:t>[Strength 3]</a:t>
             </a:r>
             <a:endParaRPr b="0" lang="en-US" sz="950" spc="-1" strike="noStrike">
               <a:solidFill>
@@ -22537,7 +22537,7 @@
                 <a:latin typeface="Calibri"/>
                 <a:ea typeface="Calibri"/>
               </a:rPr>
-              <a:t>[Сильная сторона 4]</a:t>
+              <a:t>[Strength 4]</a:t>
             </a:r>
             <a:endParaRPr b="0" lang="en-US" sz="950" spc="-1" strike="noStrike">
               <a:solidFill>
@@ -22699,7 +22699,7 @@
                 <a:latin typeface="Calibri"/>
                 <a:ea typeface="Calibri"/>
               </a:rPr>
-              <a:t>Слабые стороны</a:t>
+              <a:t>Weaknesses</a:t>
             </a:r>
             <a:endParaRPr b="0" lang="en-US" sz="1000" spc="-1" strike="noStrike">
               <a:solidFill>
@@ -22758,7 +22758,7 @@
                 <a:latin typeface="Calibri"/>
                 <a:ea typeface="Calibri"/>
               </a:rPr>
-              <a:t>[Слабая сторона 1]</a:t>
+              <a:t>[Weakness 1]</a:t>
             </a:r>
             <a:endParaRPr b="0" lang="en-US" sz="950" spc="-1" strike="noStrike">
               <a:solidFill>
@@ -22786,7 +22786,7 @@
                 <a:latin typeface="Calibri"/>
                 <a:ea typeface="Calibri"/>
               </a:rPr>
-              <a:t>[Слабая сторона 2]</a:t>
+              <a:t>[Weakness 2]</a:t>
             </a:r>
             <a:endParaRPr b="0" lang="en-US" sz="950" spc="-1" strike="noStrike">
               <a:solidFill>
@@ -22814,7 +22814,7 @@
                 <a:latin typeface="Calibri"/>
                 <a:ea typeface="Calibri"/>
               </a:rPr>
-              <a:t>[Слабая сторона 3]</a:t>
+              <a:t>[Weakness 3]</a:t>
             </a:r>
             <a:endParaRPr b="0" lang="en-US" sz="950" spc="-1" strike="noStrike">
               <a:solidFill>
@@ -22976,7 +22976,7 @@
                 <a:latin typeface="Calibri"/>
                 <a:ea typeface="Calibri"/>
               </a:rPr>
-              <a:t>Возможности</a:t>
+              <a:t>Opportunities</a:t>
             </a:r>
             <a:endParaRPr b="0" lang="en-US" sz="1000" spc="-1" strike="noStrike">
               <a:solidFill>
@@ -23035,7 +23035,7 @@
                 <a:latin typeface="Calibri"/>
                 <a:ea typeface="Calibri"/>
               </a:rPr>
-              <a:t>[Возможность 1 — из трендов, задача 2]</a:t>
+              <a:t>[Opportunity 1 — from the trends, task 2]</a:t>
             </a:r>
             <a:endParaRPr b="0" lang="en-US" sz="950" spc="-1" strike="noStrike">
               <a:solidFill>
@@ -23063,7 +23063,7 @@
                 <a:latin typeface="Calibri"/>
                 <a:ea typeface="Calibri"/>
               </a:rPr>
-              <a:t>[Возможность 2 — из трендов, задача 2]</a:t>
+              <a:t>[Opportunity 2 — from the trends, task 2]</a:t>
             </a:r>
             <a:endParaRPr b="0" lang="en-US" sz="950" spc="-1" strike="noStrike">
               <a:solidFill>
@@ -23091,7 +23091,7 @@
                 <a:latin typeface="Calibri"/>
                 <a:ea typeface="Calibri"/>
               </a:rPr>
-              <a:t>[Возможность 3 — из конкурентного ландшафта, задача 3]</a:t>
+              <a:t>[Opportunity 3 — from the competitive landscape, task 3]</a:t>
             </a:r>
             <a:endParaRPr b="0" lang="en-US" sz="950" spc="-1" strike="noStrike">
               <a:solidFill>
@@ -23253,7 +23253,7 @@
                 <a:latin typeface="Calibri"/>
                 <a:ea typeface="Calibri"/>
               </a:rPr>
-              <a:t>Угрозы</a:t>
+              <a:t>Threats</a:t>
             </a:r>
             <a:endParaRPr b="0" lang="en-US" sz="1000" spc="-1" strike="noStrike">
               <a:solidFill>
@@ -23312,7 +23312,7 @@
                 <a:latin typeface="Calibri"/>
                 <a:ea typeface="Calibri"/>
               </a:rPr>
-              <a:t>[Угроза 1 — от конкурентов]</a:t>
+              <a:t>[Threat 1 — from competitors]</a:t>
             </a:r>
             <a:endParaRPr b="0" lang="en-US" sz="950" spc="-1" strike="noStrike">
               <a:solidFill>
@@ -23340,7 +23340,7 @@
                 <a:latin typeface="Calibri"/>
                 <a:ea typeface="Calibri"/>
               </a:rPr>
-              <a:t>[Угроза 2 — регуляторная, из PESTEL]</a:t>
+              <a:t>[Threat 2 — regulatory, from PESTEL]</a:t>
             </a:r>
             <a:endParaRPr b="0" lang="en-US" sz="950" spc="-1" strike="noStrike">
               <a:solidFill>
@@ -23368,7 +23368,7 @@
                 <a:latin typeface="Calibri"/>
                 <a:ea typeface="Calibri"/>
               </a:rPr>
-              <a:t>[Угроза 3 — рыночная или поведенческая]</a:t>
+              <a:t>[Threat 3 — market or behavioural]</a:t>
             </a:r>
             <a:endParaRPr b="0" lang="en-US" sz="950" spc="-1" strike="noStrike">
               <a:solidFill>
@@ -23511,7 +23511,7 @@
                 <a:latin typeface="Calibri"/>
                 <a:ea typeface="Calibri"/>
               </a:rPr>
-              <a:t>Консистентность сценария</a:t>
+              <a:t>Scenario consistency</a:t>
             </a:r>
             <a:endParaRPr b="0" lang="en-US" sz="1700" spc="-1" strike="noStrike">
               <a:solidFill>
@@ -23568,7 +23568,7 @@
                 <a:latin typeface="Calibri"/>
                 <a:ea typeface="Calibri"/>
               </a:rPr>
-              <a:t>СТРАТЕГИЧЕСКИЙ СЦЕНАРИЙ</a:t>
+              <a:t>STRATEGIC SCENARIO</a:t>
             </a:r>
             <a:endParaRPr b="0" lang="en-US" sz="800" spc="-1" strike="noStrike">
               <a:solidFill>
@@ -23623,7 +23623,7 @@
                 </a:solidFill>
                 <a:latin typeface="Arial"/>
               </a:rPr>
-              <a:t>Проверка сценария по трём критериям (Желательность / Жизнеспособность / Реализуемость)</a:t>
+              <a:t>Checking the scenario against three criteria (desirability / viability / feasibility)</a:t>
             </a:r>
             <a:endParaRPr b="0" lang="en-US" sz="1000" spc="-1" strike="noStrike">
               <a:solidFill>
@@ -23687,7 +23687,7 @@
                 </a:solidFill>
                 <a:latin typeface="Arial"/>
               </a:rPr>
-              <a:t>ЖЕЛАТЕЛЬНОСТЬ</a:t>
+              <a:t>DESIRABILITY</a:t>
             </a:r>
             <a:endParaRPr b="0" lang="en-US" sz="1100" spc="-1" strike="noStrike">
               <a:solidFill>
@@ -23709,7 +23709,7 @@
                 </a:solidFill>
                 <a:latin typeface="Arial"/>
               </a:rPr>
-              <a:t>ЦП закрывает Jobs-to-be-Done?</a:t>
+              <a:t>Does the value proposition close the jobs?</a:t>
             </a:r>
             <a:endParaRPr b="0" lang="en-US" sz="800" spc="-1" strike="noStrike">
               <a:solidFill>
@@ -23764,7 +23764,7 @@
                 </a:solidFill>
                 <a:latin typeface="Arial"/>
               </a:rPr>
-              <a:t>ОБОСНОВАНИЕ</a:t>
+              <a:t>RATIONALE</a:t>
             </a:r>
             <a:endParaRPr b="0" lang="en-US" sz="800" spc="-1" strike="noStrike">
               <a:solidFill>
@@ -23786,7 +23786,7 @@
                 </a:solidFill>
                 <a:latin typeface="Arial"/>
               </a:rPr>
-              <a:t>[Как ЦП закрывает топ-Jobs из Job Map — кратко]</a:t>
+              <a:t>[How the value proposition closes the top jobs from the Job Map — briefly]</a:t>
             </a:r>
             <a:endParaRPr b="0" lang="en-US" sz="900" spc="-1" strike="noStrike">
               <a:solidFill>
@@ -23821,7 +23821,7 @@
                 </a:solidFill>
                 <a:latin typeface="Arial"/>
               </a:rPr>
-              <a:t>КЛЮЧЕВЫЕ МЕТРИКИ</a:t>
+              <a:t>KEY METRICS</a:t>
             </a:r>
             <a:endParaRPr b="0" lang="en-US" sz="800" spc="-1" strike="noStrike">
               <a:solidFill>
@@ -23843,7 +23843,7 @@
                 </a:solidFill>
                 <a:latin typeface="Arial"/>
               </a:rPr>
-              <a:t>[Топ-3 outcomes закрываемых ЦП]</a:t>
+              <a:t>[Top 3 outcomes the value proposition closes]</a:t>
             </a:r>
             <a:endParaRPr b="0" lang="en-US" sz="900" spc="-1" strike="noStrike">
               <a:solidFill>
@@ -23898,7 +23898,7 @@
                 </a:solidFill>
                 <a:latin typeface="Arial"/>
               </a:rPr>
-              <a:t>СТАТУС: </a:t>
+              <a:t>STATUS: </a:t>
             </a:r>
             <a:r>
               <a:rPr b="1" lang="ru-RU" sz="900" spc="-1" strike="noStrike">
@@ -23971,7 +23971,7 @@
                 </a:solidFill>
                 <a:latin typeface="Arial"/>
               </a:rPr>
-              <a:t>ЖИЗНЕСПОСОБНОСТЬ</a:t>
+              <a:t>VIABILITY</a:t>
             </a:r>
             <a:endParaRPr b="0" lang="en-US" sz="1100" spc="-1" strike="noStrike">
               <a:solidFill>
@@ -23993,7 +23993,7 @@
                 </a:solidFill>
                 <a:latin typeface="Arial"/>
               </a:rPr>
-              <a:t>Модель масштабируема?</a:t>
+              <a:t>Is the model scalable?</a:t>
             </a:r>
             <a:endParaRPr b="0" lang="en-US" sz="800" spc="-1" strike="noStrike">
               <a:solidFill>
@@ -24048,7 +24048,7 @@
                 </a:solidFill>
                 <a:latin typeface="Arial"/>
               </a:rPr>
-              <a:t>ОБОСНОВАНИЕ</a:t>
+              <a:t>RATIONALE</a:t>
             </a:r>
             <a:endParaRPr b="0" lang="en-US" sz="800" spc="-1" strike="noStrike">
               <a:solidFill>
@@ -24070,7 +24070,7 @@
                 </a:solidFill>
                 <a:latin typeface="Arial"/>
               </a:rPr>
-              <a:t>[Масштабируемость: LTV/CAC, Gross Margin, Break-even — и узкое место]</a:t>
+              <a:t>[Scalability: LTV/CAC, gross margin, break-even — and the bottleneck]</a:t>
             </a:r>
             <a:endParaRPr b="0" lang="en-US" sz="900" spc="-1" strike="noStrike">
               <a:solidFill>
@@ -24105,7 +24105,7 @@
                 </a:solidFill>
                 <a:latin typeface="Arial"/>
               </a:rPr>
-              <a:t>КЛЮЧЕВЫЕ МЕТРИКИ</a:t>
+              <a:t>KEY METRICS</a:t>
             </a:r>
             <a:endParaRPr b="0" lang="en-US" sz="800" spc="-1" strike="noStrike">
               <a:solidFill>
@@ -24127,7 +24127,7 @@
                 </a:solidFill>
                 <a:latin typeface="Arial"/>
               </a:rPr>
-              <a:t>[LTV = X ₽ | CAC = Y ₽ | GM = Z% | BE = мес. N]</a:t>
+              <a:t>[LTV = X RUB | CAC = Y RUB | GM = Z% | BE = month N]</a:t>
             </a:r>
             <a:endParaRPr b="0" lang="en-US" sz="900" spc="-1" strike="noStrike">
               <a:solidFill>
@@ -24182,7 +24182,7 @@
                 </a:solidFill>
                 <a:latin typeface="Arial"/>
               </a:rPr>
-              <a:t>СТАТУС: </a:t>
+              <a:t>STATUS: </a:t>
             </a:r>
             <a:r>
               <a:rPr b="1" lang="ru-RU" sz="900" spc="-1" strike="noStrike">
@@ -24255,7 +24255,7 @@
                 </a:solidFill>
                 <a:latin typeface="Arial"/>
               </a:rPr>
-              <a:t>РЕАЛИЗУЕМОСТЬ</a:t>
+              <a:t>FEASIBILITY</a:t>
             </a:r>
             <a:endParaRPr b="0" lang="en-US" sz="1100" spc="-1" strike="noStrike">
               <a:solidFill>
@@ -24277,7 +24277,7 @@
                 </a:solidFill>
                 <a:latin typeface="Arial"/>
               </a:rPr>
-              <a:t>Достаточно ресурсов?</a:t>
+              <a:t>Are the resources sufficient?</a:t>
             </a:r>
             <a:endParaRPr b="0" lang="en-US" sz="800" spc="-1" strike="noStrike">
               <a:solidFill>
@@ -24332,7 +24332,7 @@
                 </a:solidFill>
                 <a:latin typeface="Arial"/>
               </a:rPr>
-              <a:t>ОБОСНОВАНИЕ</a:t>
+              <a:t>RATIONALE</a:t>
             </a:r>
             <a:endParaRPr b="0" lang="en-US" sz="800" spc="-1" strike="noStrike">
               <a:solidFill>
@@ -24354,7 +24354,7 @@
                 </a:solidFill>
                 <a:latin typeface="Arial"/>
               </a:rPr>
-              <a:t>[Ресурсы: команда, бюджет, технологии — что есть и чего не хватает]</a:t>
+              <a:t>[Resources: team, budget, technology — what exists and what is missing]</a:t>
             </a:r>
             <a:endParaRPr b="0" lang="en-US" sz="900" spc="-1" strike="noStrike">
               <a:solidFill>
@@ -24389,7 +24389,7 @@
                 </a:solidFill>
                 <a:latin typeface="Arial"/>
               </a:rPr>
-              <a:t>КЛЮЧЕВЫЕ МЕТРИКИ</a:t>
+              <a:t>KEY METRICS</a:t>
             </a:r>
             <a:endParaRPr b="0" lang="en-US" sz="800" spc="-1" strike="noStrike">
               <a:solidFill>
@@ -24411,7 +24411,7 @@
                 </a:solidFill>
                 <a:latin typeface="Arial"/>
               </a:rPr>
-              <a:t>[Список ресурсов с отметками готовности]</a:t>
+              <a:t>[List of resources with readiness marks]</a:t>
             </a:r>
             <a:endParaRPr b="0" lang="en-US" sz="900" spc="-1" strike="noStrike">
               <a:solidFill>
@@ -24466,7 +24466,7 @@
                 </a:solidFill>
                 <a:latin typeface="Arial"/>
               </a:rPr>
-              <a:t>СТАТУС: </a:t>
+              <a:t>STATUS: </a:t>
             </a:r>
             <a:r>
               <a:rPr b="1" lang="ru-RU" sz="900" spc="-1" strike="noStrike">
@@ -24530,7 +24530,7 @@
                 </a:solidFill>
                 <a:latin typeface="Arial"/>
               </a:rPr>
-              <a:t>ИТОГ: </a:t>
+              <a:t>RESULT: </a:t>
             </a:r>
             <a:r>
               <a:rPr b="0" lang="ru-RU" sz="1100" spc="-1" strike="noStrike">
@@ -24539,7 +24539,7 @@
                 </a:solidFill>
                 <a:latin typeface="Arial"/>
               </a:rPr>
-              <a:t>[X/3 критериев ✅]. [Приоритет доработки — краткое утверждение]</a:t>
+              <a:t>[X of 3 criteria ✅]. [What to fix first — one short statement]</a:t>
             </a:r>
             <a:endParaRPr b="0" lang="en-US" sz="1100" spc="-1" strike="noStrike">
               <a:solidFill>
@@ -24645,7 +24645,7 @@
                 <a:latin typeface="Calibri"/>
                 <a:ea typeface="Calibri"/>
               </a:rPr>
-              <a:t>Источник: [указать источник]</a:t>
+              <a:t>Source: [state the source]</a:t>
             </a:r>
             <a:endParaRPr b="0" lang="en-US" sz="800" spc="-1" strike="noStrike">
               <a:solidFill>
@@ -24788,7 +24788,7 @@
                 <a:latin typeface="Calibri"/>
                 <a:ea typeface="Calibri"/>
               </a:rPr>
-              <a:t>Юнит-экономика</a:t>
+              <a:t>Unit economics</a:t>
             </a:r>
             <a:endParaRPr b="0" lang="en-US" sz="1700" spc="-1" strike="noStrike">
               <a:solidFill>
@@ -24845,7 +24845,7 @@
                 <a:latin typeface="Calibri"/>
                 <a:ea typeface="Calibri"/>
               </a:rPr>
-              <a:t>СТРАТЕГИЧЕСКИЙ СЦЕНАРИЙ</a:t>
+              <a:t>STRATEGIC SCENARIO</a:t>
             </a:r>
             <a:endParaRPr b="0" lang="en-US" sz="800" spc="-1" strike="noStrike">
               <a:solidFill>
@@ -24951,7 +24951,7 @@
                 <a:latin typeface="Calibri"/>
                 <a:ea typeface="Calibri"/>
               </a:rPr>
-              <a:t>Источник: финансовая модель (задача 18c), базовый сценарий</a:t>
+              <a:t>Source: the financial model (task 18c), base scenario</a:t>
             </a:r>
             <a:endParaRPr b="0" lang="en-US" sz="800" spc="-1" strike="noStrike">
               <a:solidFill>
@@ -25170,7 +25170,7 @@
                 <a:latin typeface="Calibri"/>
                 <a:ea typeface="Calibri"/>
               </a:rPr>
-              <a:t>LTV клиента</a:t>
+              <a:t>Customer LTV</a:t>
             </a:r>
             <a:endParaRPr b="0" lang="en-US" sz="900" spc="-1" strike="noStrike">
               <a:solidFill>
@@ -25389,7 +25389,7 @@
                 <a:latin typeface="Calibri"/>
                 <a:ea typeface="Calibri"/>
               </a:rPr>
-              <a:t>CAC (стоимость привлечения)</a:t>
+              <a:t>CAC (acquisition cost)</a:t>
             </a:r>
             <a:endParaRPr b="0" lang="en-US" sz="900" spc="-1" strike="noStrike">
               <a:solidFill>
@@ -25770,7 +25770,7 @@
                 <a:latin typeface="Calibri"/>
                 <a:ea typeface="Calibri"/>
               </a:rPr>
-              <a:t>Юнит-экономика — ключевые показатели</a:t>
+              <a:t>Unit economics — the key figures</a:t>
             </a:r>
             <a:endParaRPr b="0" lang="en-US" sz="1000" spc="-1" strike="noStrike">
               <a:solidFill>
@@ -25829,7 +25829,7 @@
                 <a:latin typeface="Calibri"/>
                 <a:ea typeface="Calibri"/>
               </a:rPr>
-              <a:t>Payback period: [N] мес. базовый | [N] мес. оптимист</a:t>
+              <a:t>Payback period: [N] months base | [N] months optimistic</a:t>
             </a:r>
             <a:endParaRPr b="0" lang="en-US" sz="950" spc="-1" strike="noStrike">
               <a:solidFill>
@@ -25857,7 +25857,7 @@
                 <a:latin typeface="Calibri"/>
                 <a:ea typeface="Calibri"/>
               </a:rPr>
-              <a:t>Runway: [N] мес. при burn rate [X ₽]/мес и капитале [Y ₽]</a:t>
+              <a:t>Runway: [N] months at a burn rate of [X RUB]/mo and capital of [Y RUB]</a:t>
             </a:r>
             <a:endParaRPr b="0" lang="en-US" sz="950" spc="-1" strike="noStrike">
               <a:solidFill>
@@ -25885,7 +25885,7 @@
                 <a:latin typeface="Calibri"/>
                 <a:ea typeface="Calibri"/>
               </a:rPr>
-              <a:t>Break-even: мес. [N] базовый | мес. [N] оптимист — накопленный P&amp;L ≥ 0</a:t>
+              <a:t>Break-even: month [N] base | month [N] optimistic — cumulative P&amp;L &gt;= 0</a:t>
             </a:r>
             <a:endParaRPr b="0" lang="en-US" sz="950" spc="-1" strike="noStrike">
               <a:solidFill>
@@ -25913,7 +25913,7 @@
                 <a:latin typeface="Calibri"/>
                 <a:ea typeface="Calibri"/>
               </a:rPr>
-              <a:t>Gross Margin: [X%] | COGS: [Y%] ([структура себестоимости])</a:t>
+              <a:t>Gross margin: [X%] | COGS: [Y%] ([cost structure])</a:t>
             </a:r>
             <a:endParaRPr b="0" lang="en-US" sz="950" spc="-1" strike="noStrike">
               <a:solidFill>
@@ -26056,7 +26056,7 @@
                 <a:latin typeface="Calibri"/>
                 <a:ea typeface="Calibri"/>
               </a:rPr>
-              <a:t>РАЗДЕЛ 04</a:t>
+              <a:t>SECTION 04</a:t>
             </a:r>
             <a:endParaRPr b="0" lang="en-US" sz="1100" spc="-1" strike="noStrike">
               <a:solidFill>
@@ -26256,7 +26256,7 @@
                 <a:latin typeface="Calibri"/>
                 <a:ea typeface="Calibri"/>
               </a:rPr>
-              <a:t>OST: уровни 1–2 — цель и возможности</a:t>
+              <a:t>OST: levels 1-2 — outcome and opportunities</a:t>
             </a:r>
             <a:endParaRPr b="0" lang="en-US" sz="1700" spc="-1" strike="noStrike">
               <a:solidFill>
@@ -26419,7 +26419,7 @@
                 <a:latin typeface="Calibri"/>
                 <a:ea typeface="Calibri"/>
               </a:rPr>
-              <a:t>Источник: OST (Teresa Torres); задача 12</a:t>
+              <a:t>Source: OST (Teresa Torres); task 12</a:t>
             </a:r>
             <a:endParaRPr b="0" lang="en-US" sz="800" spc="-1" strike="noStrike">
               <a:solidFill>
@@ -26476,7 +26476,7 @@
                 <a:latin typeface="Calibri"/>
                 <a:ea typeface="Calibri"/>
               </a:rPr>
-              <a:t>БИЗНЕС-ЦЕЛЬ → ВОЗМОЖНОСТИ → РЕШЕНИЯ → ЭКСПЕРИМЕНТЫ</a:t>
+              <a:t>BUSINESS OUTCOME → OPPORTUNITIES → SOLUTIONS → EXPERIMENTS</a:t>
             </a:r>
             <a:endParaRPr b="0" lang="en-US" sz="1000" spc="-1" strike="noStrike">
               <a:solidFill>
@@ -26589,7 +26589,7 @@
                 <a:latin typeface="Calibri"/>
                 <a:ea typeface="Calibri"/>
               </a:rPr>
-              <a:t>[Измеримая бизнес-цель: метрика, текущее → целевое значение, срок]</a:t>
+              <a:t>[Measurable business outcome: metric, current → target value, deadline]</a:t>
             </a:r>
             <a:endParaRPr b="0" lang="en-US" sz="900" spc="-1" strike="noStrike">
               <a:solidFill>
@@ -26818,7 +26818,7 @@
                 <a:latin typeface="Calibri"/>
                 <a:ea typeface="Calibri"/>
               </a:rPr>
-              <a:t>Возможность 1</a:t>
+              <a:t>Opportunity 1</a:t>
             </a:r>
             <a:endParaRPr b="0" lang="en-US" sz="800" spc="-1" strike="noStrike">
               <a:solidFill>
@@ -26844,7 +26844,7 @@
                 <a:latin typeface="Calibri"/>
                 <a:ea typeface="Calibri"/>
               </a:rPr>
-              <a:t>[Возможность 1 из задачи 7] | OS=[N] 🔴 Приоритет</a:t>
+              <a:t>[Opportunity 1 from task 7] | OS=[N] 🔴 Priority</a:t>
             </a:r>
             <a:endParaRPr b="0" lang="en-US" sz="800" spc="-1" strike="noStrike">
               <a:solidFill>
@@ -27032,7 +27032,7 @@
                 <a:latin typeface="Calibri"/>
                 <a:ea typeface="Calibri"/>
               </a:rPr>
-              <a:t>Возможность 2</a:t>
+              <a:t>Opportunity 2</a:t>
             </a:r>
             <a:endParaRPr b="0" lang="en-US" sz="800" spc="-1" strike="noStrike">
               <a:solidFill>
@@ -27058,7 +27058,7 @@
                 <a:latin typeface="Calibri"/>
                 <a:ea typeface="Calibri"/>
               </a:rPr>
-              <a:t>[Возможность 2 из задачи 7] | OS=[N]</a:t>
+              <a:t>[Opportunity 2 from task 7] | OS=[N]</a:t>
             </a:r>
             <a:endParaRPr b="0" lang="en-US" sz="800" spc="-1" strike="noStrike">
               <a:solidFill>
@@ -27246,7 +27246,7 @@
                 <a:latin typeface="Calibri"/>
                 <a:ea typeface="Calibri"/>
               </a:rPr>
-              <a:t>Возможность 3</a:t>
+              <a:t>Opportunity 3</a:t>
             </a:r>
             <a:endParaRPr b="0" lang="en-US" sz="800" spc="-1" strike="noStrike">
               <a:solidFill>
@@ -27272,7 +27272,7 @@
                 <a:latin typeface="Calibri"/>
                 <a:ea typeface="Calibri"/>
               </a:rPr>
-              <a:t>[Возможность 3 из задачи 7] | OS=[N]</a:t>
+              <a:t>[Opportunity 3 from task 7] | OS=[N]</a:t>
             </a:r>
             <a:endParaRPr b="0" lang="en-US" sz="800" spc="-1" strike="noStrike">
               <a:solidFill>
@@ -27378,7 +27378,7 @@
                 <a:latin typeface="Calibri"/>
                 <a:ea typeface="Calibri"/>
               </a:rPr>
-              <a:t>ЦЕЛЕВАЯ ВОЗМОЖНОСТЬ 1 — генерируем 3+ решения:</a:t>
+              <a:t>TARGET OPPORTUNITY 1 — generate 3+ solutions:</a:t>
             </a:r>
             <a:endParaRPr b="0" lang="en-US" sz="850" spc="-1" strike="noStrike">
               <a:solidFill>
@@ -27484,7 +27484,7 @@
                 <a:latin typeface="Calibri"/>
                 <a:ea typeface="Calibri"/>
               </a:rPr>
-              <a:t>Решение A</a:t>
+              <a:t>Solution A</a:t>
             </a:r>
             <a:endParaRPr b="0" lang="en-US" sz="850" spc="-1" strike="noStrike">
               <a:solidFill>
@@ -27510,7 +27510,7 @@
                 <a:latin typeface="Calibri"/>
                 <a:ea typeface="Calibri"/>
               </a:rPr>
-              <a:t>[Решение A: что именно строим и для кого]</a:t>
+              <a:t>[Solution A: what exactly we build and for whom]</a:t>
             </a:r>
             <a:endParaRPr b="0" lang="en-US" sz="850" spc="-1" strike="noStrike">
               <a:solidFill>
@@ -27683,7 +27683,7 @@
                 <a:latin typeface="Calibri"/>
                 <a:ea typeface="Calibri"/>
               </a:rPr>
-              <a:t>[Метод], [бюджет], [срок], критерий [метрика ≥ значение]</a:t>
+              <a:t>[Method], [budget], [timeframe], criterion [metric &gt;= value]</a:t>
             </a:r>
             <a:endParaRPr b="0" lang="en-US" sz="750" spc="-1" strike="noStrike">
               <a:solidFill>
@@ -27789,7 +27789,7 @@
                 <a:latin typeface="Calibri"/>
                 <a:ea typeface="Calibri"/>
               </a:rPr>
-              <a:t>Решение B</a:t>
+              <a:t>Solution B</a:t>
             </a:r>
             <a:endParaRPr b="0" lang="en-US" sz="850" spc="-1" strike="noStrike">
               <a:solidFill>
@@ -27815,7 +27815,7 @@
                 <a:latin typeface="Calibri"/>
                 <a:ea typeface="Calibri"/>
               </a:rPr>
-              <a:t>[Решение B: что именно строим и для кого]</a:t>
+              <a:t>[Solution B: what exactly we build and for whom]</a:t>
             </a:r>
             <a:endParaRPr b="0" lang="en-US" sz="850" spc="-1" strike="noStrike">
               <a:solidFill>
@@ -27988,7 +27988,7 @@
                 <a:latin typeface="Calibri"/>
                 <a:ea typeface="Calibri"/>
               </a:rPr>
-              <a:t>[Метод], [бюджет], [срок], критерий [метрика ≥ значение]</a:t>
+              <a:t>[Method], [budget], [timeframe], criterion [metric &gt;= value]</a:t>
             </a:r>
             <a:endParaRPr b="0" lang="en-US" sz="750" spc="-1" strike="noStrike">
               <a:solidFill>
@@ -28094,7 +28094,7 @@
                 <a:latin typeface="Calibri"/>
                 <a:ea typeface="Calibri"/>
               </a:rPr>
-              <a:t>Решение C</a:t>
+              <a:t>Solution C</a:t>
             </a:r>
             <a:endParaRPr b="0" lang="en-US" sz="850" spc="-1" strike="noStrike">
               <a:solidFill>
@@ -28120,7 +28120,7 @@
                 <a:latin typeface="Calibri"/>
                 <a:ea typeface="Calibri"/>
               </a:rPr>
-              <a:t>[Решение C: что именно строим и для кого]</a:t>
+              <a:t>[Solution C: what exactly we build and for whom]</a:t>
             </a:r>
             <a:endParaRPr b="0" lang="en-US" sz="850" spc="-1" strike="noStrike">
               <a:solidFill>
@@ -28293,7 +28293,7 @@
                 <a:latin typeface="Calibri"/>
                 <a:ea typeface="Calibri"/>
               </a:rPr>
-              <a:t>[Метод], [бюджет], [срок], критерий [метрика ≥ значение]</a:t>
+              <a:t>[Method], [budget], [timeframe], criterion [metric &gt;= value]</a:t>
             </a:r>
             <a:endParaRPr b="0" lang="en-US" sz="750" spc="-1" strike="noStrike">
               <a:solidFill>
@@ -28436,7 +28436,7 @@
                 <a:latin typeface="Calibri"/>
                 <a:ea typeface="Calibri"/>
               </a:rPr>
-              <a:t>OST: уровни 3–4 — решения и эксперименты</a:t>
+              <a:t>OST: levels 3-4 — solutions and experiments</a:t>
             </a:r>
             <a:endParaRPr b="0" lang="en-US" sz="1700" spc="-1" strike="noStrike">
               <a:solidFill>
@@ -28548,7 +28548,7 @@
                 </a:solidFill>
                 <a:latin typeface="Arial"/>
               </a:rPr>
-              <a:t>ЦЕЛЕВАЯ ВОЗМОЖНОСТЬ (RICE + OS=16): </a:t>
+              <a:t>TARGET OPPORTUNITY (RICE + OS): </a:t>
             </a:r>
             <a:r>
               <a:rPr b="1" lang="ru-RU" sz="1000" spc="-1" strike="noStrike">
@@ -28557,7 +28557,7 @@
                 </a:solidFill>
                 <a:latin typeface="Arial"/>
               </a:rPr>
-              <a:t>«[Возможность из уровня 2 OST]»</a:t>
+              <a:t>"[Opportunity from OST level 2]"</a:t>
             </a:r>
             <a:endParaRPr b="0" lang="en-US" sz="1000" spc="-1" strike="noStrike">
               <a:solidFill>
@@ -28612,7 +28612,7 @@
                 </a:solidFill>
                 <a:latin typeface="Arial"/>
               </a:rPr>
-              <a:t>РЕШЕНИЕ A</a:t>
+              <a:t>SOLUTION A</a:t>
             </a:r>
             <a:endParaRPr b="0" lang="en-US" sz="900" spc="-1" strike="noStrike">
               <a:solidFill>
@@ -28634,7 +28634,7 @@
                 </a:solidFill>
                 <a:latin typeface="Arial"/>
               </a:rPr>
-              <a:t>[Название решения A]</a:t>
+              <a:t>[Solution A name]</a:t>
             </a:r>
             <a:endParaRPr b="0" lang="en-US" sz="1200" spc="-1" strike="noStrike">
               <a:solidFill>
@@ -28689,7 +28689,7 @@
                 </a:solidFill>
                 <a:latin typeface="Arial"/>
               </a:rPr>
-              <a:t>[Описание решения A: что именно строим и для кого]</a:t>
+              <a:t>[Solution A description: what exactly we build and for whom]</a:t>
             </a:r>
             <a:endParaRPr b="0" lang="en-US" sz="900" spc="-1" strike="noStrike">
               <a:solidFill>
@@ -28744,7 +28744,7 @@
                 </a:solidFill>
                 <a:latin typeface="Arial"/>
               </a:rPr>
-              <a:t>ЭКСПЕРИМЕНТ:</a:t>
+              <a:t>EXPERIMENT:</a:t>
             </a:r>
             <a:r>
               <a:rPr b="0" lang="ru-RU" sz="800" spc="-1" strike="noStrike">
@@ -28788,7 +28788,7 @@
                 </a:solidFill>
                 <a:latin typeface="Arial"/>
               </a:rPr>
-              <a:t>[Метод: Smoke Test / Pre-sale / Wizard of Oz + краткое описание]</a:t>
+              <a:t>[Method: Smoke Test / pre-sale / Wizard of Oz + a short description]</a:t>
             </a:r>
             <a:endParaRPr b="0" lang="en-US" sz="800" spc="-1" strike="noStrike">
               <a:solidFill>
@@ -28843,7 +28843,7 @@
                 </a:solidFill>
                 <a:latin typeface="Arial"/>
               </a:rPr>
-              <a:t>КРИТЕРИЙ: </a:t>
+              <a:t>CRITERION: </a:t>
             </a:r>
             <a:r>
               <a:rPr b="1" lang="ru-RU" sz="800" spc="-1" strike="noStrike">
@@ -28852,7 +28852,7 @@
                 </a:solidFill>
                 <a:latin typeface="Arial"/>
               </a:rPr>
-              <a:t>[Критерий успеха]</a:t>
+              <a:t>[Success criterion]</a:t>
             </a:r>
             <a:endParaRPr b="0" lang="en-US" sz="800" spc="-1" strike="noStrike">
               <a:solidFill>
@@ -28874,7 +28874,7 @@
                 </a:solidFill>
                 <a:latin typeface="Arial"/>
               </a:rPr>
-              <a:t>СРОК: </a:t>
+              <a:t>TIMEFRAME: </a:t>
             </a:r>
             <a:r>
               <a:rPr b="0" lang="ru-RU" sz="800" spc="-1" strike="noStrike">
@@ -28883,7 +28883,7 @@
                 </a:solidFill>
                 <a:latin typeface="Arial"/>
               </a:rPr>
-              <a:t>[X дн.]</a:t>
+              <a:t>[X days]</a:t>
             </a:r>
             <a:endParaRPr b="0" lang="en-US" sz="800" spc="-1" strike="noStrike">
               <a:solidFill>
@@ -28905,7 +28905,7 @@
                 </a:solidFill>
                 <a:latin typeface="Arial"/>
               </a:rPr>
-              <a:t>БЮДЖЕТ: </a:t>
+              <a:t>BUDGET: </a:t>
             </a:r>
             <a:r>
               <a:rPr b="0" lang="ru-RU" sz="800" spc="-1" strike="noStrike">
@@ -28914,7 +28914,7 @@
                 </a:solidFill>
                 <a:latin typeface="Arial"/>
               </a:rPr>
-              <a:t>[X руб.]</a:t>
+              <a:t>[X RUB]</a:t>
             </a:r>
             <a:endParaRPr b="0" lang="en-US" sz="800" spc="-1" strike="noStrike">
               <a:solidFill>
@@ -28969,7 +28969,7 @@
                 </a:solidFill>
                 <a:latin typeface="Arial"/>
               </a:rPr>
-              <a:t>РЕШЕНИЕ B</a:t>
+              <a:t>SOLUTION B</a:t>
             </a:r>
             <a:endParaRPr b="0" lang="en-US" sz="900" spc="-1" strike="noStrike">
               <a:solidFill>
@@ -28991,7 +28991,7 @@
                 </a:solidFill>
                 <a:latin typeface="Arial"/>
               </a:rPr>
-              <a:t>[Название решения B]</a:t>
+              <a:t>[Solution B name]</a:t>
             </a:r>
             <a:endParaRPr b="0" lang="en-US" sz="1200" spc="-1" strike="noStrike">
               <a:solidFill>
@@ -29046,7 +29046,7 @@
                 </a:solidFill>
                 <a:latin typeface="Arial"/>
               </a:rPr>
-              <a:t>[Описание решения B]</a:t>
+              <a:t>[Solution B description]</a:t>
             </a:r>
             <a:endParaRPr b="0" lang="en-US" sz="900" spc="-1" strike="noStrike">
               <a:solidFill>
@@ -29101,7 +29101,7 @@
                 </a:solidFill>
                 <a:latin typeface="Arial"/>
               </a:rPr>
-              <a:t>ЭКСПЕРИМЕНТ:</a:t>
+              <a:t>EXPERIMENT:</a:t>
             </a:r>
             <a:r>
               <a:rPr b="0" lang="ru-RU" sz="800" spc="-1" strike="noStrike">
@@ -29145,7 +29145,7 @@
                 </a:solidFill>
                 <a:latin typeface="Arial"/>
               </a:rPr>
-              <a:t>[Метод + описание]</a:t>
+              <a:t>[Method + description]</a:t>
             </a:r>
             <a:endParaRPr b="0" lang="en-US" sz="800" spc="-1" strike="noStrike">
               <a:solidFill>
@@ -29200,7 +29200,7 @@
                 </a:solidFill>
                 <a:latin typeface="Arial"/>
               </a:rPr>
-              <a:t>КРИТЕРИЙ: </a:t>
+              <a:t>CRITERION: </a:t>
             </a:r>
             <a:r>
               <a:rPr b="1" lang="ru-RU" sz="800" spc="-1" strike="noStrike">
@@ -29209,7 +29209,7 @@
                 </a:solidFill>
                 <a:latin typeface="Arial"/>
               </a:rPr>
-              <a:t>[Критерий успеха]</a:t>
+              <a:t>[Success criterion]</a:t>
             </a:r>
             <a:endParaRPr b="0" lang="en-US" sz="800" spc="-1" strike="noStrike">
               <a:solidFill>
@@ -29231,7 +29231,7 @@
                 </a:solidFill>
                 <a:latin typeface="Arial"/>
               </a:rPr>
-              <a:t>СРОК: </a:t>
+              <a:t>TIMEFRAME: </a:t>
             </a:r>
             <a:r>
               <a:rPr b="0" lang="ru-RU" sz="800" spc="-1" strike="noStrike">
@@ -29240,7 +29240,7 @@
                 </a:solidFill>
                 <a:latin typeface="Arial"/>
               </a:rPr>
-              <a:t>[X дн.]</a:t>
+              <a:t>[X days]</a:t>
             </a:r>
             <a:endParaRPr b="0" lang="en-US" sz="800" spc="-1" strike="noStrike">
               <a:solidFill>
@@ -29262,7 +29262,7 @@
                 </a:solidFill>
                 <a:latin typeface="Arial"/>
               </a:rPr>
-              <a:t>БЮДЖЕТ: </a:t>
+              <a:t>BUDGET: </a:t>
             </a:r>
             <a:r>
               <a:rPr b="0" lang="ru-RU" sz="800" spc="-1" strike="noStrike">
@@ -29271,7 +29271,7 @@
                 </a:solidFill>
                 <a:latin typeface="Arial"/>
               </a:rPr>
-              <a:t>[X руб.]</a:t>
+              <a:t>[X RUB]</a:t>
             </a:r>
             <a:endParaRPr b="0" lang="en-US" sz="800" spc="-1" strike="noStrike">
               <a:solidFill>
@@ -29326,7 +29326,7 @@
                 </a:solidFill>
                 <a:latin typeface="Arial"/>
               </a:rPr>
-              <a:t>РЕШЕНИЕ C</a:t>
+              <a:t>SOLUTION C</a:t>
             </a:r>
             <a:endParaRPr b="0" lang="en-US" sz="900" spc="-1" strike="noStrike">
               <a:solidFill>
@@ -29348,7 +29348,7 @@
                 </a:solidFill>
                 <a:latin typeface="Arial"/>
               </a:rPr>
-              <a:t>[Название решения C]</a:t>
+              <a:t>[Solution C name]</a:t>
             </a:r>
             <a:endParaRPr b="0" lang="en-US" sz="1200" spc="-1" strike="noStrike">
               <a:solidFill>
@@ -29403,7 +29403,7 @@
                 </a:solidFill>
                 <a:latin typeface="Arial"/>
               </a:rPr>
-              <a:t>[Описание решения C]</a:t>
+              <a:t>[Solution C description]</a:t>
             </a:r>
             <a:endParaRPr b="0" lang="en-US" sz="900" spc="-1" strike="noStrike">
               <a:solidFill>
@@ -29458,7 +29458,7 @@
                 </a:solidFill>
                 <a:latin typeface="Arial"/>
               </a:rPr>
-              <a:t>ЭКСПЕРИМЕНТ:</a:t>
+              <a:t>EXPERIMENT:</a:t>
             </a:r>
             <a:r>
               <a:rPr b="0" lang="ru-RU" sz="800" spc="-1" strike="noStrike">
@@ -29502,7 +29502,7 @@
                 </a:solidFill>
                 <a:latin typeface="Arial"/>
               </a:rPr>
-              <a:t>[Метод + описание]</a:t>
+              <a:t>[Method + description]</a:t>
             </a:r>
             <a:endParaRPr b="0" lang="en-US" sz="800" spc="-1" strike="noStrike">
               <a:solidFill>
@@ -29557,7 +29557,7 @@
                 </a:solidFill>
                 <a:latin typeface="Arial"/>
               </a:rPr>
-              <a:t>КРИТЕРИЙ: </a:t>
+              <a:t>CRITERION: </a:t>
             </a:r>
             <a:r>
               <a:rPr b="1" lang="ru-RU" sz="800" spc="-1" strike="noStrike">
@@ -29566,7 +29566,7 @@
                 </a:solidFill>
                 <a:latin typeface="Arial"/>
               </a:rPr>
-              <a:t>[Критерий успеха]</a:t>
+              <a:t>[Success criterion]</a:t>
             </a:r>
             <a:endParaRPr b="0" lang="en-US" sz="800" spc="-1" strike="noStrike">
               <a:solidFill>
@@ -29588,7 +29588,7 @@
                 </a:solidFill>
                 <a:latin typeface="Arial"/>
               </a:rPr>
-              <a:t>СРОК: </a:t>
+              <a:t>TIMEFRAME: </a:t>
             </a:r>
             <a:r>
               <a:rPr b="0" lang="ru-RU" sz="800" spc="-1" strike="noStrike">
@@ -29597,7 +29597,7 @@
                 </a:solidFill>
                 <a:latin typeface="Arial"/>
               </a:rPr>
-              <a:t>[X дн.]</a:t>
+              <a:t>[X days]</a:t>
             </a:r>
             <a:endParaRPr b="0" lang="en-US" sz="800" spc="-1" strike="noStrike">
               <a:solidFill>
@@ -29619,7 +29619,7 @@
                 </a:solidFill>
                 <a:latin typeface="Arial"/>
               </a:rPr>
-              <a:t>БЮДЖЕТ: </a:t>
+              <a:t>BUDGET: </a:t>
             </a:r>
             <a:r>
               <a:rPr b="0" lang="ru-RU" sz="800" spc="-1" strike="noStrike">
@@ -29628,7 +29628,7 @@
                 </a:solidFill>
                 <a:latin typeface="Arial"/>
               </a:rPr>
-              <a:t>[X руб.]</a:t>
+              <a:t>[X RUB]</a:t>
             </a:r>
             <a:endParaRPr b="0" lang="en-US" sz="800" spc="-1" strike="noStrike">
               <a:solidFill>
@@ -29692,7 +29692,7 @@
                 </a:solidFill>
                 <a:latin typeface="Arial"/>
               </a:rPr>
-              <a:t>Правило OST: ≥ 3 решения для целевой возможности (против confirmation bias)</a:t>
+              <a:t>OST rule: &gt;= 3 solutions per target opportunity (against confirmation bias)</a:t>
             </a:r>
             <a:endParaRPr b="0" lang="en-US" sz="900" spc="-1" strike="noStrike">
               <a:solidFill>
@@ -29798,7 +29798,7 @@
                 <a:latin typeface="Calibri"/>
                 <a:ea typeface="Calibri"/>
               </a:rPr>
-              <a:t>Источник: [указать источник]</a:t>
+              <a:t>Source: [state the source]</a:t>
             </a:r>
             <a:endParaRPr b="0" lang="en-US" sz="800" spc="-1" strike="noStrike">
               <a:solidFill>
@@ -29941,7 +29941,7 @@
                 <a:latin typeface="Calibri"/>
                 <a:ea typeface="Calibri"/>
               </a:rPr>
-              <a:t>РАЗДЕЛ 05</a:t>
+              <a:t>SECTION 05</a:t>
             </a:r>
             <a:endParaRPr b="0" lang="en-US" sz="1100" spc="-1" strike="noStrike">
               <a:solidFill>
@@ -29998,7 +29998,7 @@
                 <a:latin typeface="Calibri"/>
                 <a:ea typeface="Calibri"/>
               </a:rPr>
-              <a:t>Альтернативный стратегический сценарий</a:t>
+              <a:t>Alternative strategic scenario</a:t>
             </a:r>
             <a:endParaRPr b="0" lang="en-US" sz="3400" spc="-1" strike="noStrike">
               <a:solidFill>
@@ -30141,7 +30141,7 @@
                 <a:latin typeface="Calibri"/>
                 <a:ea typeface="Calibri"/>
               </a:rPr>
-              <a:t>Ключевые изменения сценария</a:t>
+              <a:t>Key changes to the scenario</a:t>
             </a:r>
             <a:endParaRPr b="0" lang="en-US" sz="1700" spc="-1" strike="noStrike">
               <a:solidFill>
@@ -30198,7 +30198,7 @@
                 <a:latin typeface="Calibri"/>
                 <a:ea typeface="Calibri"/>
               </a:rPr>
-              <a:t>АЛЬТ. СЦЕНАРИЙ</a:t>
+              <a:t>ALT. SCENARIO</a:t>
             </a:r>
             <a:endParaRPr b="0" lang="en-US" sz="800" spc="-1" strike="noStrike">
               <a:solidFill>
@@ -30304,7 +30304,7 @@
                 <a:latin typeface="Calibri"/>
                 <a:ea typeface="Calibri"/>
               </a:rPr>
-              <a:t>Источник: альтернативный сценарий из задачи 13; скоринг из задачи 14</a:t>
+              <a:t>Source: the alternative scenario from task 13; scoring from task 14</a:t>
             </a:r>
             <a:endParaRPr b="0" lang="en-US" sz="800" spc="-1" strike="noStrike">
               <a:solidFill>
@@ -30410,7 +30410,7 @@
                 <a:latin typeface="Calibri"/>
                 <a:ea typeface="Calibri"/>
               </a:rPr>
-              <a:t>ТЕКУЩИЙ СЦЕНАРИЙ</a:t>
+              <a:t>CURRENT SCENARIO</a:t>
             </a:r>
             <a:endParaRPr b="0" lang="en-US" sz="900" spc="-1" strike="noStrike">
               <a:solidFill>
@@ -30516,7 +30516,7 @@
                 <a:latin typeface="Calibri"/>
                 <a:ea typeface="Calibri"/>
               </a:rPr>
-              <a:t>НОВЫЙ СЦЕНАРИЙ</a:t>
+              <a:t>NEW SCENARIO</a:t>
             </a:r>
             <a:endParaRPr b="0" lang="en-US" sz="900" spc="-1" strike="noStrike">
               <a:solidFill>
@@ -30622,7 +30622,7 @@
                 <a:latin typeface="Calibri"/>
                 <a:ea typeface="Calibri"/>
               </a:rPr>
-              <a:t>Сегмент потребителей</a:t>
+              <a:t>Customer segment</a:t>
             </a:r>
             <a:endParaRPr b="0" lang="en-US" sz="850" spc="-1" strike="noStrike">
               <a:solidFill>
@@ -30679,7 +30679,7 @@
                 <a:latin typeface="Calibri"/>
                 <a:ea typeface="Calibri"/>
               </a:rPr>
-              <a:t>[Сегмент в текущем сценарии]</a:t>
+              <a:t>[Segment in the current scenario]</a:t>
             </a:r>
             <a:endParaRPr b="0" lang="en-US" sz="950" spc="-1" strike="noStrike">
               <a:solidFill>
@@ -30785,7 +30785,7 @@
                 <a:latin typeface="Calibri"/>
                 <a:ea typeface="Calibri"/>
               </a:rPr>
-              <a:t>[Сегмент в альтернативном сценарии — что меняется]</a:t>
+              <a:t>[Segment in the alternative scenario — what changes]</a:t>
             </a:r>
             <a:endParaRPr b="0" lang="en-US" sz="950" spc="-1" strike="noStrike">
               <a:solidFill>
@@ -30948,7 +30948,7 @@
                 <a:latin typeface="Calibri"/>
                 <a:ea typeface="Calibri"/>
               </a:rPr>
-              <a:t>Ценностное предложение</a:t>
+              <a:t>Value proposition</a:t>
             </a:r>
             <a:endParaRPr b="0" lang="en-US" sz="850" spc="-1" strike="noStrike">
               <a:solidFill>
@@ -31005,7 +31005,7 @@
                 <a:latin typeface="Calibri"/>
                 <a:ea typeface="Calibri"/>
               </a:rPr>
-              <a:t>«[Ценностное предложение в текущем сценарии]»</a:t>
+              <a:t>"[Value proposition in the current scenario]"</a:t>
             </a:r>
             <a:endParaRPr b="0" lang="en-US" sz="950" spc="-1" strike="noStrike">
               <a:solidFill>
@@ -31111,7 +31111,7 @@
                 <a:latin typeface="Calibri"/>
                 <a:ea typeface="Calibri"/>
               </a:rPr>
-              <a:t>«[Ценностное предложение в альтернативном сценарии]»</a:t>
+              <a:t>"[Value proposition in the alternative scenario]"</a:t>
             </a:r>
             <a:endParaRPr b="0" lang="en-US" sz="950" spc="-1" strike="noStrike">
               <a:solidFill>
@@ -31331,7 +31331,7 @@
                 <a:latin typeface="Calibri"/>
                 <a:ea typeface="Calibri"/>
               </a:rPr>
-              <a:t>[Job-to-be-Done в текущем сценарии]</a:t>
+              <a:t>[Job-to-be-Done in the current scenario]</a:t>
             </a:r>
             <a:endParaRPr b="0" lang="en-US" sz="950" spc="-1" strike="noStrike">
               <a:solidFill>
@@ -31437,7 +31437,7 @@
                 <a:latin typeface="Calibri"/>
                 <a:ea typeface="Calibri"/>
               </a:rPr>
-              <a:t>[Job-to-be-Done в альтернативном сценарии]</a:t>
+              <a:t>[Job-to-be-Done in the alternative scenario]</a:t>
             </a:r>
             <a:endParaRPr b="0" lang="en-US" sz="950" spc="-1" strike="noStrike">
               <a:solidFill>
@@ -31600,7 +31600,7 @@
                 <a:latin typeface="Calibri"/>
                 <a:ea typeface="Calibri"/>
               </a:rPr>
-              <a:t>Бизнес-модель</a:t>
+              <a:t>Business model</a:t>
             </a:r>
             <a:endParaRPr b="0" lang="en-US" sz="850" spc="-1" strike="noStrike">
               <a:solidFill>
@@ -31657,7 +31657,7 @@
                 <a:latin typeface="Calibri"/>
                 <a:ea typeface="Calibri"/>
               </a:rPr>
-              <a:t>[Бизнес-модель в текущем сценарии: монетизация, чек]</a:t>
+              <a:t>[Business model in the current scenario: monetisation, ticket]</a:t>
             </a:r>
             <a:endParaRPr b="0" lang="en-US" sz="950" spc="-1" strike="noStrike">
               <a:solidFill>
@@ -31763,7 +31763,7 @@
                 <a:latin typeface="Calibri"/>
                 <a:ea typeface="Calibri"/>
               </a:rPr>
-              <a:t>[Бизнес-модель в альтернативном сценарии: что меняется в экономике]</a:t>
+              <a:t>[Business model in the alternative scenario: what changes in the economics]</a:t>
             </a:r>
             <a:endParaRPr b="0" lang="en-US" sz="950" spc="-1" strike="noStrike">
               <a:solidFill>
@@ -31963,7 +31963,7 @@
                 <a:latin typeface="Calibri"/>
                 <a:ea typeface="Calibri"/>
               </a:rPr>
-              <a:t>RICE-приоритизация возможностей</a:t>
+              <a:t>RICE prioritisation of opportunities</a:t>
             </a:r>
             <a:endParaRPr b="0" lang="en-US" sz="1700" spc="-1" strike="noStrike">
               <a:solidFill>
@@ -32020,7 +32020,7 @@
                 <a:latin typeface="Calibri"/>
                 <a:ea typeface="Calibri"/>
               </a:rPr>
-              <a:t>АЛЬТ. СЦЕНАРИЙ</a:t>
+              <a:t>ALT. SCENARIO</a:t>
             </a:r>
             <a:endParaRPr b="0" lang="en-US" sz="800" spc="-1" strike="noStrike">
               <a:solidFill>
@@ -32126,7 +32126,7 @@
                 <a:latin typeface="Calibri"/>
                 <a:ea typeface="Calibri"/>
               </a:rPr>
-              <a:t>Источник: RICE = (Reach × Impact × Confidence) / Effort; задача 14</a:t>
+              <a:t>Source: RICE = (Reach x Impact x Confidence) / Effort; task 14</a:t>
             </a:r>
             <a:endParaRPr b="0" lang="en-US" sz="800" spc="-1" strike="noStrike">
               <a:solidFill>
@@ -32183,7 +32183,7 @@
                 <a:latin typeface="Calibri"/>
                 <a:ea typeface="Calibri"/>
               </a:rPr>
-              <a:t>RICE-ПРИОРИТИЗАЦИЯ ВОЗМОЖНОСТЕЙ</a:t>
+              <a:t>RICE PRIORITISATION OF OPPORTUNITIES</a:t>
             </a:r>
             <a:endParaRPr b="0" lang="en-US" sz="850" spc="-1" strike="noStrike">
               <a:solidFill>
@@ -32289,7 +32289,7 @@
                 <a:latin typeface="Calibri"/>
                 <a:ea typeface="Calibri"/>
               </a:rPr>
-              <a:t>Возможность</a:t>
+              <a:t>Opportunity</a:t>
             </a:r>
             <a:endParaRPr b="0" lang="en-US" sz="800" spc="-1" strike="noStrike">
               <a:solidFill>
@@ -32925,7 +32925,7 @@
                 <a:latin typeface="Calibri"/>
                 <a:ea typeface="Calibri"/>
               </a:rPr>
-              <a:t>Возможность A: [название] (OS=[N]) | R=[охват] × I=[impact] × C=[conf] / E=[effort] = [score] | 🔴 ТОП</a:t>
+              <a:t>Opportunity A: [name] (OS=[N]) | R=[reach] x I=[impact] x C=[conf] / E=[effort] = [score] | 🔴 TOP</a:t>
             </a:r>
             <a:endParaRPr b="0" lang="en-US" sz="850" spc="-1" strike="noStrike">
               <a:solidFill>
@@ -33561,7 +33561,7 @@
                 <a:latin typeface="Calibri"/>
                 <a:ea typeface="Calibri"/>
               </a:rPr>
-              <a:t>Возможность B: [название] (OS=[N]) | R=[охват] × I=[impact] × C=[conf] / E=[effort] = [score] | 🟠 ВЫСОКИЙ</a:t>
+              <a:t>Opportunity B: [name] (OS=[N]) | R=[reach] x I=[impact] x C=[conf] / E=[effort] = [score] | 🟠 HIGH</a:t>
             </a:r>
             <a:endParaRPr b="0" lang="en-US" sz="850" spc="-1" strike="noStrike">
               <a:solidFill>
@@ -34197,7 +34197,7 @@
                 <a:latin typeface="Calibri"/>
                 <a:ea typeface="Calibri"/>
               </a:rPr>
-              <a:t>Возможность C: [название] (OS=[N]) | R=[охват] × I=[impact] × C=[conf] / E=[effort] = [score] | 🟡 СРЕДНИЙ</a:t>
+              <a:t>Opportunity C: [name] (OS=[N]) | R=[reach] x I=[impact] x C=[conf] / E=[effort] = [score] | 🟡 MEDIUM</a:t>
             </a:r>
             <a:endParaRPr b="0" lang="en-US" sz="850" spc="-1" strike="noStrike">
               <a:solidFill>
@@ -34826,7 +34826,7 @@
                 </a:solidFill>
                 <a:latin typeface="Calibri"/>
               </a:rPr>
-              <a:t>Reach — охват (чел./мес.) из целевого сегмента</a:t>
+              <a:t>Reach — people per month from the target segment</a:t>
             </a:r>
             <a:endParaRPr b="0" lang="en-US" sz="1000" spc="-1" strike="noStrike">
               <a:solidFill>
@@ -34857,7 +34857,7 @@
                 </a:solidFill>
                 <a:latin typeface="Calibri"/>
               </a:rPr>
-              <a:t>Impact — используй OS из задачи 7: OS ≥ 15 → 3 | OS 10–14 → 2 | OS 6–9 → 1 | OS &lt; 6 → 0.5</a:t>
+              <a:t>Impact — derive it from the task 7 OS: OS &gt;= 15 → 3 | OS 10-14 → 2 | OS 6-9 → 1 | OS &lt; 6 → 0.5</a:t>
             </a:r>
             <a:endParaRPr b="0" lang="en-US" sz="1000" spc="-1" strike="noStrike">
               <a:solidFill>
@@ -34888,7 +34888,7 @@
                 </a:solidFill>
                 <a:latin typeface="Calibri"/>
               </a:rPr>
-              <a:t>Confidence — 100% (есть данные) / 80% (интервью) / 50% (гипотеза)</a:t>
+              <a:t>Confidence — 100% (data exists) / 80% (interviews) / 50% (hypothesis)</a:t>
             </a:r>
             <a:endParaRPr b="0" lang="en-US" sz="1000" spc="-1" strike="noStrike">
               <a:solidFill>
@@ -34919,7 +34919,7 @@
                 </a:solidFill>
                 <a:latin typeface="Calibri"/>
               </a:rPr>
-              <a:t>Effort — человеко-месяцы на реализацию решения</a:t>
+              <a:t>Effort — person-months to build the solution</a:t>
             </a:r>
             <a:endParaRPr b="0" lang="en-US" sz="1000" spc="-1" strike="noStrike">
               <a:solidFill>
@@ -34954,7 +34954,7 @@
                 </a:solidFill>
                 <a:latin typeface="Calibri"/>
               </a:rPr>
-              <a:t>Возможность с наивысшим RICE Score — целевая для OST уровней 3–4</a:t>
+              <a:t>The opportunity with the highest RICE score is the target for OST levels 3-4</a:t>
             </a:r>
             <a:endParaRPr b="0" lang="en-US" sz="1000" spc="-1" strike="noStrike">
               <a:solidFill>
@@ -35097,7 +35097,7 @@
                 <a:latin typeface="Calibri"/>
                 <a:ea typeface="Calibri"/>
               </a:rPr>
-              <a:t>Оценка объёма рынка (TAM / SAM / SOM)</a:t>
+              <a:t>Market sizing (TAM / SAM / SOM)</a:t>
             </a:r>
             <a:endParaRPr b="0" lang="en-US" sz="1700" spc="-1" strike="noStrike">
               <a:solidFill>
@@ -35154,7 +35154,7 @@
                 <a:latin typeface="Calibri"/>
                 <a:ea typeface="Calibri"/>
               </a:rPr>
-              <a:t>АНАЛИЗ РЫНКА</a:t>
+              <a:t>MARKET ANALYSIS</a:t>
             </a:r>
             <a:endParaRPr b="0" lang="en-US" sz="800" spc="-1" strike="noStrike">
               <a:solidFill>
@@ -35260,7 +35260,7 @@
                 <a:latin typeface="Calibri"/>
                 <a:ea typeface="Calibri"/>
               </a:rPr>
-              <a:t>Источник: [отраслевые отчёты и статистика по рынку — задачи 1, 5]</a:t>
+              <a:t>Source: [industry reports and market statistics — tasks 1, 5]</a:t>
             </a:r>
             <a:endParaRPr b="0" lang="en-US" sz="800" spc="-1" strike="noStrike">
               <a:solidFill>
@@ -35480,7 +35480,7 @@
                 <a:latin typeface="Calibri"/>
                 <a:ea typeface="Calibri"/>
               </a:rPr>
-              <a:t>[X млрд ₽]</a:t>
+              <a:t>[X RUB bn]</a:t>
             </a:r>
             <a:endParaRPr b="0" lang="en-US" sz="1900" spc="-1" strike="noStrike">
               <a:solidFill>
@@ -35700,7 +35700,7 @@
                 <a:latin typeface="Calibri"/>
                 <a:ea typeface="Calibri"/>
               </a:rPr>
-              <a:t>[Y млрд ₽]</a:t>
+              <a:t>[Y RUB bn]</a:t>
             </a:r>
             <a:endParaRPr b="0" lang="en-US" sz="1900" spc="-1" strike="noStrike">
               <a:solidFill>
@@ -35920,7 +35920,7 @@
                 <a:latin typeface="Calibri"/>
                 <a:ea typeface="Calibri"/>
               </a:rPr>
-              <a:t>[Z млн ₽]</a:t>
+              <a:t>[Z RUB m]</a:t>
             </a:r>
             <a:endParaRPr b="0" lang="en-US" sz="1900" spc="-1" strike="noStrike">
               <a:solidFill>
@@ -35977,7 +35977,7 @@
                 <a:latin typeface="Calibri"/>
                 <a:ea typeface="Calibri"/>
               </a:rPr>
-              <a:t>Top-down: [расчёт по доле сегмента] = [Y]. Bottom-up: [клиенты × чек × частота] = [Y]. Расхождение [N]× [✅ / ⚠️ пересмотреть допущения]</a:t>
+              <a:t>Top-down: [share-of-segment calculation] = [Y]. Bottom-up: [customers x ticket x frequency] = [Y]. Divergence [N]x [✅ / ⚠️ revisit the assumptions]</a:t>
             </a:r>
             <a:endParaRPr b="0" lang="en-US" sz="850" spc="-1" strike="noStrike">
               <a:solidFill>
@@ -36120,7 +36120,7 @@
                 <a:latin typeface="Calibri"/>
                 <a:ea typeface="Calibri"/>
               </a:rPr>
-              <a:t>Пул гипотез + план тестирования</a:t>
+              <a:t>Hypothesis pool + testing plan</a:t>
             </a:r>
             <a:endParaRPr b="0" lang="en-US" sz="1700" spc="-1" strike="noStrike">
               <a:solidFill>
@@ -36177,7 +36177,7 @@
                 <a:latin typeface="Calibri"/>
                 <a:ea typeface="Calibri"/>
               </a:rPr>
-              <a:t>АЛЬТ. СЦЕНАРИЙ</a:t>
+              <a:t>ALT. SCENARIO</a:t>
             </a:r>
             <a:endParaRPr b="0" lang="en-US" sz="800" spc="-1" strike="noStrike">
               <a:solidFill>
@@ -36232,7 +36232,7 @@
                 </a:solidFill>
                 <a:latin typeface="Arial"/>
               </a:rPr>
-              <a:t>ТОП-3 РИСКОВЫЕ ГИПОТЕЗЫ — порядок проверки перед запуском первых продаж</a:t>
+              <a:t>TOP 3 RISKY HYPOTHESES — the order to test them in before the first sales</a:t>
             </a:r>
             <a:endParaRPr b="0" lang="en-US" sz="1000" spc="-1" strike="noStrike">
               <a:solidFill>
@@ -36287,7 +36287,7 @@
                 </a:solidFill>
                 <a:latin typeface="Arial"/>
               </a:rPr>
-              <a:t>ГИПОТЕЗА 1</a:t>
+              <a:t>HYPOTHESIS 1</a:t>
             </a:r>
             <a:r>
               <a:rPr b="1" lang="ru-RU" sz="900" spc="-1" strike="noStrike">
@@ -36296,7 +36296,7 @@
                 </a:solidFill>
                 <a:latin typeface="Arial"/>
               </a:rPr>
-              <a:t>  ·  Потребности</a:t>
+              <a:t>  ·  Need</a:t>
             </a:r>
             <a:endParaRPr b="0" lang="en-US" sz="900" spc="-1" strike="noStrike">
               <a:solidFill>
@@ -36318,7 +36318,7 @@
                 </a:solidFill>
                 <a:latin typeface="Arial"/>
               </a:rPr>
-              <a:t>[РИСК]</a:t>
+              <a:t>[RISK]</a:t>
             </a:r>
             <a:endParaRPr b="0" lang="en-US" sz="800" spc="-1" strike="noStrike">
               <a:solidFill>
@@ -36373,7 +36373,7 @@
                 </a:solidFill>
                 <a:latin typeface="Arial"/>
               </a:rPr>
-              <a:t>ФОРМУЛИРОВКА</a:t>
+              <a:t>STATEMENT</a:t>
             </a:r>
             <a:endParaRPr b="0" lang="en-US" sz="800" spc="-1" strike="noStrike">
               <a:solidFill>
@@ -36395,7 +36395,7 @@
                 </a:solidFill>
                 <a:latin typeface="Arial"/>
               </a:rPr>
-              <a:t>[Гипотеза 1 — формулировка в формате «Сегмент готов делать X за Y»]</a:t>
+              <a:t>[Hypothesis 1 — stated as "segment is willing to do X for Y"]</a:t>
             </a:r>
             <a:endParaRPr b="0" lang="en-US" sz="900" spc="-1" strike="noStrike">
               <a:solidFill>
@@ -36430,7 +36430,7 @@
                 </a:solidFill>
                 <a:latin typeface="Arial"/>
               </a:rPr>
-              <a:t>МЕТОД</a:t>
+              <a:t>METHOD</a:t>
             </a:r>
             <a:endParaRPr b="0" lang="en-US" sz="800" spc="-1" strike="noStrike">
               <a:solidFill>
@@ -36452,7 +36452,7 @@
                 </a:solidFill>
                 <a:latin typeface="Arial"/>
               </a:rPr>
-              <a:t>[Метод проверки: интервью / Smoke Test / Wizard of Oz / и т.д.]</a:t>
+              <a:t>[Test method: interviews / Smoke Test / Wizard of Oz / and so on]</a:t>
             </a:r>
             <a:endParaRPr b="0" lang="en-US" sz="900" spc="-1" strike="noStrike">
               <a:solidFill>
@@ -36487,7 +36487,7 @@
                 </a:solidFill>
                 <a:latin typeface="Arial"/>
               </a:rPr>
-              <a:t>КРИТЕРИЙ ✅</a:t>
+              <a:t>CRITERION ✅</a:t>
             </a:r>
             <a:endParaRPr b="0" lang="en-US" sz="800" spc="-1" strike="noStrike">
               <a:solidFill>
@@ -36509,7 +36509,7 @@
                 </a:solidFill>
                 <a:latin typeface="Arial"/>
               </a:rPr>
-              <a:t>[Критерий успеха: количественный порог]</a:t>
+              <a:t>[Success criterion: a quantitative threshold]</a:t>
             </a:r>
             <a:endParaRPr b="0" lang="en-US" sz="900" spc="-1" strike="noStrike">
               <a:solidFill>
@@ -36564,7 +36564,7 @@
                 </a:solidFill>
                 <a:latin typeface="Arial"/>
               </a:rPr>
-              <a:t>СРОК: </a:t>
+              <a:t>TIMEFRAME: </a:t>
             </a:r>
             <a:r>
               <a:rPr b="1" lang="ru-RU" sz="900" spc="-1" strike="noStrike">
@@ -36573,7 +36573,7 @@
                 </a:solidFill>
                 <a:latin typeface="Arial"/>
               </a:rPr>
-              <a:t>[X дн.]</a:t>
+              <a:t>[X days]</a:t>
             </a:r>
             <a:r>
               <a:rPr b="0" lang="ru-RU" sz="900" spc="-1" strike="noStrike">
@@ -36591,7 +36591,7 @@
                 </a:solidFill>
                 <a:latin typeface="Arial"/>
               </a:rPr>
-              <a:t>БЮДЖЕТ: </a:t>
+              <a:t>BUDGET: </a:t>
             </a:r>
             <a:r>
               <a:rPr b="1" lang="ru-RU" sz="900" spc="-1" strike="noStrike">
@@ -36600,7 +36600,7 @@
                 </a:solidFill>
                 <a:latin typeface="Arial"/>
               </a:rPr>
-              <a:t>[X руб.]</a:t>
+              <a:t>[X RUB]</a:t>
             </a:r>
             <a:endParaRPr b="0" lang="en-US" sz="900" spc="-1" strike="noStrike">
               <a:solidFill>
@@ -36655,7 +36655,7 @@
                 </a:solidFill>
                 <a:latin typeface="Arial"/>
               </a:rPr>
-              <a:t>ГИПОТЕЗА 2</a:t>
+              <a:t>HYPOTHESIS 2</a:t>
             </a:r>
             <a:r>
               <a:rPr b="1" lang="ru-RU" sz="900" spc="-1" strike="noStrike">
@@ -36664,7 +36664,7 @@
                 </a:solidFill>
                 <a:latin typeface="Arial"/>
               </a:rPr>
-              <a:t>  ·  Спроса</a:t>
+              <a:t>  ·  Demand</a:t>
             </a:r>
             <a:endParaRPr b="0" lang="en-US" sz="900" spc="-1" strike="noStrike">
               <a:solidFill>
@@ -36686,7 +36686,7 @@
                 </a:solidFill>
                 <a:latin typeface="Arial"/>
               </a:rPr>
-              <a:t>[РИСК]</a:t>
+              <a:t>[RISK]</a:t>
             </a:r>
             <a:endParaRPr b="0" lang="en-US" sz="800" spc="-1" strike="noStrike">
               <a:solidFill>
@@ -36741,7 +36741,7 @@
                 </a:solidFill>
                 <a:latin typeface="Arial"/>
               </a:rPr>
-              <a:t>ФОРМУЛИРОВКА</a:t>
+              <a:t>STATEMENT</a:t>
             </a:r>
             <a:endParaRPr b="0" lang="en-US" sz="800" spc="-1" strike="noStrike">
               <a:solidFill>
@@ -36763,7 +36763,7 @@
                 </a:solidFill>
                 <a:latin typeface="Arial"/>
               </a:rPr>
-              <a:t>[Гипотеза 2 — формулировка]</a:t>
+              <a:t>[Hypothesis 2 — statement]</a:t>
             </a:r>
             <a:endParaRPr b="0" lang="en-US" sz="900" spc="-1" strike="noStrike">
               <a:solidFill>
@@ -36798,7 +36798,7 @@
                 </a:solidFill>
                 <a:latin typeface="Arial"/>
               </a:rPr>
-              <a:t>МЕТОД</a:t>
+              <a:t>METHOD</a:t>
             </a:r>
             <a:endParaRPr b="0" lang="en-US" sz="800" spc="-1" strike="noStrike">
               <a:solidFill>
@@ -36820,7 +36820,7 @@
                 </a:solidFill>
                 <a:latin typeface="Arial"/>
               </a:rPr>
-              <a:t>[Метод проверки]</a:t>
+              <a:t>[Test method]</a:t>
             </a:r>
             <a:endParaRPr b="0" lang="en-US" sz="900" spc="-1" strike="noStrike">
               <a:solidFill>
@@ -36855,7 +36855,7 @@
                 </a:solidFill>
                 <a:latin typeface="Arial"/>
               </a:rPr>
-              <a:t>КРИТЕРИЙ ✅</a:t>
+              <a:t>CRITERION ✅</a:t>
             </a:r>
             <a:endParaRPr b="0" lang="en-US" sz="800" spc="-1" strike="noStrike">
               <a:solidFill>
@@ -36877,7 +36877,7 @@
                 </a:solidFill>
                 <a:latin typeface="Arial"/>
               </a:rPr>
-              <a:t>[Критерий успеха]</a:t>
+              <a:t>[Success criterion]</a:t>
             </a:r>
             <a:endParaRPr b="0" lang="en-US" sz="900" spc="-1" strike="noStrike">
               <a:solidFill>
@@ -36932,7 +36932,7 @@
                 </a:solidFill>
                 <a:latin typeface="Arial"/>
               </a:rPr>
-              <a:t>СРОК: </a:t>
+              <a:t>TIMEFRAME: </a:t>
             </a:r>
             <a:r>
               <a:rPr b="1" lang="ru-RU" sz="900" spc="-1" strike="noStrike">
@@ -36941,7 +36941,7 @@
                 </a:solidFill>
                 <a:latin typeface="Arial"/>
               </a:rPr>
-              <a:t>[X дн.]</a:t>
+              <a:t>[X days]</a:t>
             </a:r>
             <a:r>
               <a:rPr b="0" lang="ru-RU" sz="900" spc="-1" strike="noStrike">
@@ -36959,7 +36959,7 @@
                 </a:solidFill>
                 <a:latin typeface="Arial"/>
               </a:rPr>
-              <a:t>БЮДЖЕТ: </a:t>
+              <a:t>BUDGET: </a:t>
             </a:r>
             <a:r>
               <a:rPr b="1" lang="ru-RU" sz="900" spc="-1" strike="noStrike">
@@ -36968,7 +36968,7 @@
                 </a:solidFill>
                 <a:latin typeface="Arial"/>
               </a:rPr>
-              <a:t>[X руб.]</a:t>
+              <a:t>[X RUB]</a:t>
             </a:r>
             <a:endParaRPr b="0" lang="en-US" sz="900" spc="-1" strike="noStrike">
               <a:solidFill>
@@ -37023,7 +37023,7 @@
                 </a:solidFill>
                 <a:latin typeface="Arial"/>
               </a:rPr>
-              <a:t>ГИПОТЕЗА 3</a:t>
+              <a:t>HYPOTHESIS 3</a:t>
             </a:r>
             <a:r>
               <a:rPr b="1" lang="ru-RU" sz="900" spc="-1" strike="noStrike">
@@ -37032,7 +37032,7 @@
                 </a:solidFill>
                 <a:latin typeface="Arial"/>
               </a:rPr>
-              <a:t>  ·  Ценности / Канала</a:t>
+              <a:t>  ·  Value / Channel</a:t>
             </a:r>
             <a:endParaRPr b="0" lang="en-US" sz="900" spc="-1" strike="noStrike">
               <a:solidFill>
@@ -37054,7 +37054,7 @@
                 </a:solidFill>
                 <a:latin typeface="Arial"/>
               </a:rPr>
-              <a:t>[РИСК]</a:t>
+              <a:t>[RISK]</a:t>
             </a:r>
             <a:endParaRPr b="0" lang="en-US" sz="800" spc="-1" strike="noStrike">
               <a:solidFill>
@@ -37109,7 +37109,7 @@
                 </a:solidFill>
                 <a:latin typeface="Arial"/>
               </a:rPr>
-              <a:t>ФОРМУЛИРОВКА</a:t>
+              <a:t>STATEMENT</a:t>
             </a:r>
             <a:endParaRPr b="0" lang="en-US" sz="800" spc="-1" strike="noStrike">
               <a:solidFill>
@@ -37131,7 +37131,7 @@
                 </a:solidFill>
                 <a:latin typeface="Arial"/>
               </a:rPr>
-              <a:t>[Гипотеза 3 — формулировка]</a:t>
+              <a:t>[Hypothesis 3 — statement]</a:t>
             </a:r>
             <a:endParaRPr b="0" lang="en-US" sz="900" spc="-1" strike="noStrike">
               <a:solidFill>
@@ -37166,7 +37166,7 @@
                 </a:solidFill>
                 <a:latin typeface="Arial"/>
               </a:rPr>
-              <a:t>МЕТОД</a:t>
+              <a:t>METHOD</a:t>
             </a:r>
             <a:endParaRPr b="0" lang="en-US" sz="800" spc="-1" strike="noStrike">
               <a:solidFill>
@@ -37188,7 +37188,7 @@
                 </a:solidFill>
                 <a:latin typeface="Arial"/>
               </a:rPr>
-              <a:t>[Метод проверки]</a:t>
+              <a:t>[Test method]</a:t>
             </a:r>
             <a:endParaRPr b="0" lang="en-US" sz="900" spc="-1" strike="noStrike">
               <a:solidFill>
@@ -37223,7 +37223,7 @@
                 </a:solidFill>
                 <a:latin typeface="Arial"/>
               </a:rPr>
-              <a:t>КРИТЕРИЙ ✅</a:t>
+              <a:t>CRITERION ✅</a:t>
             </a:r>
             <a:endParaRPr b="0" lang="en-US" sz="800" spc="-1" strike="noStrike">
               <a:solidFill>
@@ -37245,7 +37245,7 @@
                 </a:solidFill>
                 <a:latin typeface="Arial"/>
               </a:rPr>
-              <a:t>[Критерий успеха]</a:t>
+              <a:t>[Success criterion]</a:t>
             </a:r>
             <a:endParaRPr b="0" lang="en-US" sz="900" spc="-1" strike="noStrike">
               <a:solidFill>
@@ -37300,7 +37300,7 @@
                 </a:solidFill>
                 <a:latin typeface="Arial"/>
               </a:rPr>
-              <a:t>СРОК: </a:t>
+              <a:t>TIMEFRAME: </a:t>
             </a:r>
             <a:r>
               <a:rPr b="1" lang="ru-RU" sz="900" spc="-1" strike="noStrike">
@@ -37309,7 +37309,7 @@
                 </a:solidFill>
                 <a:latin typeface="Arial"/>
               </a:rPr>
-              <a:t>[X дн.]</a:t>
+              <a:t>[X days]</a:t>
             </a:r>
             <a:r>
               <a:rPr b="0" lang="ru-RU" sz="900" spc="-1" strike="noStrike">
@@ -37327,7 +37327,7 @@
                 </a:solidFill>
                 <a:latin typeface="Arial"/>
               </a:rPr>
-              <a:t>БЮДЖЕТ: </a:t>
+              <a:t>BUDGET: </a:t>
             </a:r>
             <a:r>
               <a:rPr b="1" lang="ru-RU" sz="900" spc="-1" strike="noStrike">
@@ -37336,7 +37336,7 @@
                 </a:solidFill>
                 <a:latin typeface="Arial"/>
               </a:rPr>
-              <a:t>[X руб.]</a:t>
+              <a:t>[X RUB]</a:t>
             </a:r>
             <a:endParaRPr b="0" lang="en-US" sz="900" spc="-1" strike="noStrike">
               <a:solidFill>
@@ -37400,7 +37400,7 @@
                 </a:solidFill>
                 <a:latin typeface="Arial"/>
               </a:rPr>
-              <a:t>ПОРЯДОК ПРОВЕРКИ: </a:t>
+              <a:t>TEST ORDER: </a:t>
             </a:r>
             <a:r>
               <a:rPr b="0" lang="ru-RU" sz="900" spc="-1" strike="noStrike">
@@ -37409,7 +37409,7 @@
                 </a:solidFill>
                 <a:latin typeface="Arial"/>
               </a:rPr>
-              <a:t>[Порядок проверки: H1 → H2 → H3 с указанием зависимостей]</a:t>
+              <a:t>[Test order: H1 → H2 → H3, with the dependencies stated]</a:t>
             </a:r>
             <a:endParaRPr b="0" lang="en-US" sz="900" spc="-1" strike="noStrike">
               <a:solidFill>
@@ -37515,7 +37515,7 @@
                 <a:latin typeface="Calibri"/>
                 <a:ea typeface="Calibri"/>
               </a:rPr>
-              <a:t>Источник: [указать источник]</a:t>
+              <a:t>Source: [state the source]</a:t>
             </a:r>
             <a:endParaRPr b="0" lang="en-US" sz="800" spc="-1" strike="noStrike">
               <a:solidFill>
@@ -37658,7 +37658,7 @@
                 <a:latin typeface="Calibri"/>
                 <a:ea typeface="Calibri"/>
               </a:rPr>
-              <a:t>РАЗДЕЛ 06</a:t>
+              <a:t>SECTION 06</a:t>
             </a:r>
             <a:endParaRPr b="0" lang="en-US" sz="1100" spc="-1" strike="noStrike">
               <a:solidFill>
@@ -37715,7 +37715,7 @@
                 <a:latin typeface="Calibri"/>
                 <a:ea typeface="Calibri"/>
               </a:rPr>
-              <a:t>PMF-метрики и следующие шаги</a:t>
+              <a:t>PMF metrics and next steps</a:t>
             </a:r>
             <a:endParaRPr b="0" lang="en-US" sz="3400" spc="-1" strike="noStrike">
               <a:solidFill>
@@ -37858,7 +37858,7 @@
                 <a:latin typeface="Calibri"/>
                 <a:ea typeface="Calibri"/>
               </a:rPr>
-              <a:t>PMF-индикаторы по фазам</a:t>
+              <a:t>PMF indicators by phase</a:t>
             </a:r>
             <a:endParaRPr b="0" lang="en-US" sz="1700" spc="-1" strike="noStrike">
               <a:solidFill>
@@ -37915,7 +37915,7 @@
                 <a:latin typeface="Calibri"/>
                 <a:ea typeface="Calibri"/>
               </a:rPr>
-              <a:t>PMF-МЕТРИКИ</a:t>
+              <a:t>PMF METRICS</a:t>
             </a:r>
             <a:endParaRPr b="0" lang="en-US" sz="800" spc="-1" strike="noStrike">
               <a:solidFill>
@@ -38021,7 +38021,7 @@
                 <a:latin typeface="Calibri"/>
                 <a:ea typeface="Calibri"/>
               </a:rPr>
-              <a:t>Источник: Sean Ellis Test; отраслевые бенчмарки (a16z, B2B SaaS); задача 17</a:t>
+              <a:t>Source: Sean Ellis Test; industry benchmarks (a16z, B2B SaaS); task 17</a:t>
             </a:r>
             <a:endParaRPr b="0" lang="en-US" sz="800" spc="-1" strike="noStrike">
               <a:solidFill>
@@ -38078,7 +38078,7 @@
                 <a:latin typeface="Calibri"/>
                 <a:ea typeface="Calibri"/>
               </a:rPr>
-              <a:t>КРИТЕРИИ ПЕРЕХОДА МЕЖДУ ФАЗАМИ VERIFICATION → VALUE VALIDATION → SCALING VALIDATION</a:t>
+              <a:t>CRITERIA FOR MOVING BETWEEN PHASES: VERIFICATION → VALUE VALIDATION → SCALING VALIDATION</a:t>
             </a:r>
             <a:endParaRPr b="0" lang="en-US" sz="1000" spc="-1" strike="noStrike">
               <a:solidFill>
@@ -38339,7 +38339,7 @@
                 <a:latin typeface="Calibri"/>
                 <a:ea typeface="Calibri"/>
               </a:rPr>
-              <a:t>Подтверждение боли (интервью)</a:t>
+              <a:t>Pain confirmed (interviews)</a:t>
             </a:r>
             <a:endParaRPr b="0" lang="en-US" sz="850" spc="-1" strike="noStrike">
               <a:solidFill>
@@ -38396,7 +38396,7 @@
                 <a:latin typeface="Calibri"/>
                 <a:ea typeface="Calibri"/>
               </a:rPr>
-              <a:t>7 из 10 описывают одну боль</a:t>
+              <a:t>7 of 10 describe the same pain</a:t>
             </a:r>
             <a:endParaRPr b="0" lang="en-US" sz="1000" spc="-1" strike="noStrike">
               <a:solidFill>
@@ -38551,7 +38551,7 @@
                 <a:latin typeface="Calibri"/>
                 <a:ea typeface="Calibri"/>
               </a:rPr>
-              <a:t>Конверсия smoke test</a:t>
+              <a:t>Smoke test conversion</a:t>
             </a:r>
             <a:endParaRPr b="0" lang="en-US" sz="850" spc="-1" strike="noStrike">
               <a:solidFill>
@@ -38618,7 +38618,7 @@
                 <a:latin typeface="Calibri"/>
                 <a:ea typeface="Calibri"/>
               </a:rPr>
-              <a:t>1–5% B2B / ≥ 3–8% B2C — см. задача 16</a:t>
+              <a:t>1-5% B2B / &gt;= 3-8% B2C — see task 16</a:t>
             </a:r>
             <a:endParaRPr b="0" lang="en-US" sz="1000" spc="-1" strike="noStrike">
               <a:solidFill>
@@ -38773,7 +38773,7 @@
                 <a:latin typeface="Calibri"/>
                 <a:ea typeface="Calibri"/>
               </a:rPr>
-              <a:t>Opportunity Score топ-1</a:t>
+              <a:t>Top Opportunity Score</a:t>
             </a:r>
             <a:endParaRPr b="0" lang="en-US" sz="850" spc="-1" strike="noStrike">
               <a:solidFill>
@@ -39215,7 +39215,7 @@
                 <a:latin typeface="Calibri"/>
                 <a:ea typeface="Calibri"/>
               </a:rPr>
-              <a:t>40% «очень разочарованы» без продукта</a:t>
+              <a:t>40% "very disappointed" without the product</a:t>
             </a:r>
             <a:endParaRPr b="0" lang="en-US" sz="1000" spc="-1" strike="noStrike">
               <a:solidFill>
@@ -39370,7 +39370,7 @@
                 <a:latin typeface="Calibri"/>
                 <a:ea typeface="Calibri"/>
               </a:rPr>
-              <a:t>NPS первых пользователей</a:t>
+              <a:t>NPS of the first users</a:t>
             </a:r>
             <a:endParaRPr b="0" lang="en-US" sz="850" spc="-1" strike="noStrike">
               <a:solidFill>
@@ -39592,7 +39592,7 @@
                 <a:latin typeface="Calibri"/>
                 <a:ea typeface="Calibri"/>
               </a:rPr>
-              <a:t>Retention (мес. 1)</a:t>
+              <a:t>Retention (month 1)</a:t>
             </a:r>
             <a:endParaRPr b="0" lang="en-US" sz="850" spc="-1" strike="noStrike">
               <a:solidFill>
@@ -39977,7 +39977,7 @@
                 <a:latin typeface="Calibri"/>
                 <a:ea typeface="Calibri"/>
               </a:rPr>
-              <a:t>Retention (мес. 3)</a:t>
+              <a:t>Retention (month 3)</a:t>
             </a:r>
             <a:endParaRPr b="0" lang="en-US" sz="850" spc="-1" strike="noStrike">
               <a:solidFill>
@@ -40421,7 +40421,7 @@
                 <a:latin typeface="Calibri"/>
                 <a:ea typeface="Calibri"/>
               </a:rPr>
-              <a:t>Органический рост</a:t>
+              <a:t>Organic growth</a:t>
             </a:r>
             <a:endParaRPr b="0" lang="en-US" sz="850" spc="-1" strike="noStrike">
               <a:solidFill>
@@ -40488,7 +40488,7 @@
                 <a:latin typeface="Calibri"/>
                 <a:ea typeface="Calibri"/>
               </a:rPr>
-              <a:t>20% новых по рекомендации</a:t>
+              <a:t>20% of new users from referrals</a:t>
             </a:r>
             <a:endParaRPr b="0" lang="en-US" sz="1000" spc="-1" strike="noStrike">
               <a:solidFill>
@@ -40594,7 +40594,7 @@
                 <a:latin typeface="Calibri"/>
                 <a:ea typeface="Calibri"/>
               </a:rPr>
-              <a:t>Sean Ellis Test: «Как вы себя почувствуете, если [продукт] станет недоступен?» → цель ≥ 40% «очень разочарован(а)» после 10–20 первых продаж</a:t>
+              <a:t>Sean Ellis Test: "How would you feel if [product] were no longer available?" → target &gt;= 40% "very disappointed" after the first 10-20 sales</a:t>
             </a:r>
             <a:endParaRPr b="0" lang="en-US" sz="850" spc="-1" strike="noStrike">
               <a:solidFill>
@@ -40737,7 +40737,7 @@
                 <a:latin typeface="Calibri"/>
                 <a:ea typeface="Calibri"/>
               </a:rPr>
-              <a:t>OS финальный — топ-10 outcomes</a:t>
+              <a:t>Final OS — top 10 outcomes</a:t>
             </a:r>
             <a:endParaRPr b="0" lang="en-US" sz="1700" spc="-1" strike="noStrike">
               <a:solidFill>
@@ -40794,7 +40794,7 @@
                 <a:latin typeface="Calibri"/>
                 <a:ea typeface="Calibri"/>
               </a:rPr>
-              <a:t>PMF-МЕТРИКИ</a:t>
+              <a:t>PMF METRICS</a:t>
             </a:r>
             <a:endParaRPr b="0" lang="en-US" sz="800" spc="-1" strike="noStrike">
               <a:solidFill>
@@ -40858,7 +40858,7 @@
                 </a:solidFill>
                 <a:latin typeface="Arial"/>
               </a:rPr>
-              <a:t>Важность + max(Важность − Удовлетворённость, 0)</a:t>
+              <a:t>Importance + max(Importance - Satisfaction, 0)</a:t>
             </a:r>
             <a:endParaRPr b="0" lang="en-US" sz="900" spc="-1" strike="noStrike">
               <a:solidFill>
@@ -40880,7 +40880,7 @@
                 </a:solidFill>
                 <a:latin typeface="Arial"/>
               </a:rPr>
-              <a:t>Приоритет: OS ≥ 15 — 🔴 критический | 12–14 — 🟠 высокий | 9–11 — 🟡 средний | &lt; 9 — 🟢 низкий</a:t>
+              <a:t>Priority: OS &gt;= 15 — 🔴 critical | 12-14 — 🟠 high | 9-11 — 🟡 medium | &lt; 9 — 🟢 low</a:t>
             </a:r>
             <a:endParaRPr b="0" lang="en-US" sz="800" spc="-1" strike="noStrike">
               <a:solidFill>
@@ -40990,7 +40990,7 @@
                 </a:solidFill>
                 <a:latin typeface="Arial"/>
               </a:rPr>
-              <a:t>Outcome (результат из Job Map)</a:t>
+              <a:t>Outcome (from the Job Map)</a:t>
             </a:r>
             <a:endParaRPr b="0" lang="en-US" sz="900" spc="-1" strike="noStrike">
               <a:solidFill>
@@ -41045,7 +41045,7 @@
                 </a:solidFill>
                 <a:latin typeface="Arial"/>
               </a:rPr>
-              <a:t>Важн.</a:t>
+              <a:t>Import.</a:t>
             </a:r>
             <a:endParaRPr b="0" lang="en-US" sz="900" spc="-1" strike="noStrike">
               <a:solidFill>
@@ -41100,7 +41100,7 @@
                 </a:solidFill>
                 <a:latin typeface="Arial"/>
               </a:rPr>
-              <a:t>Удовл.</a:t>
+              <a:t>Satisf.</a:t>
             </a:r>
             <a:endParaRPr b="0" lang="en-US" sz="900" spc="-1" strike="noStrike">
               <a:solidFill>
@@ -41210,7 +41210,7 @@
                 </a:solidFill>
                 <a:latin typeface="Arial"/>
               </a:rPr>
-              <a:t>Приоритет</a:t>
+              <a:t>Priority</a:t>
             </a:r>
             <a:endParaRPr b="0" lang="en-US" sz="900" spc="-1" strike="noStrike">
               <a:solidFill>
@@ -41320,7 +41320,7 @@
                 </a:solidFill>
                 <a:latin typeface="Arial"/>
               </a:rPr>
-              <a:t>[Outcome 1 — описание]</a:t>
+              <a:t>[Outcome 1 — description]</a:t>
             </a:r>
             <a:endParaRPr b="0" lang="en-US" sz="900" spc="-1" strike="noStrike">
               <a:solidFill>
@@ -41549,7 +41549,7 @@
                 </a:solidFill>
                 <a:latin typeface="Arial"/>
               </a:rPr>
-              <a:t>Критический</a:t>
+              <a:t>Critical</a:t>
             </a:r>
             <a:endParaRPr b="0" lang="en-US" sz="900" spc="-1" strike="noStrike">
               <a:solidFill>
@@ -41888,7 +41888,7 @@
                 </a:solidFill>
                 <a:latin typeface="Arial"/>
               </a:rPr>
-              <a:t>Критический</a:t>
+              <a:t>Critical</a:t>
             </a:r>
             <a:endParaRPr b="0" lang="en-US" sz="900" spc="-1" strike="noStrike">
               <a:solidFill>
@@ -42227,7 +42227,7 @@
                 </a:solidFill>
                 <a:latin typeface="Arial"/>
               </a:rPr>
-              <a:t>Высокий</a:t>
+              <a:t>High</a:t>
             </a:r>
             <a:endParaRPr b="0" lang="en-US" sz="900" spc="-1" strike="noStrike">
               <a:solidFill>
@@ -42566,7 +42566,7 @@
                 </a:solidFill>
                 <a:latin typeface="Arial"/>
               </a:rPr>
-              <a:t>Высокий</a:t>
+              <a:t>High</a:t>
             </a:r>
             <a:endParaRPr b="0" lang="en-US" sz="900" spc="-1" strike="noStrike">
               <a:solidFill>
@@ -42905,7 +42905,7 @@
                 </a:solidFill>
                 <a:latin typeface="Arial"/>
               </a:rPr>
-              <a:t>Высокий</a:t>
+              <a:t>High</a:t>
             </a:r>
             <a:endParaRPr b="0" lang="en-US" sz="900" spc="-1" strike="noStrike">
               <a:solidFill>
@@ -43244,7 +43244,7 @@
                 </a:solidFill>
                 <a:latin typeface="Arial"/>
               </a:rPr>
-              <a:t>Средний</a:t>
+              <a:t>Medium</a:t>
             </a:r>
             <a:endParaRPr b="0" lang="en-US" sz="900" spc="-1" strike="noStrike">
               <a:solidFill>
@@ -43583,7 +43583,7 @@
                 </a:solidFill>
                 <a:latin typeface="Arial"/>
               </a:rPr>
-              <a:t>Средний</a:t>
+              <a:t>Medium</a:t>
             </a:r>
             <a:endParaRPr b="0" lang="en-US" sz="900" spc="-1" strike="noStrike">
               <a:solidFill>
@@ -43922,7 +43922,7 @@
                 </a:solidFill>
                 <a:latin typeface="Arial"/>
               </a:rPr>
-              <a:t>Средний</a:t>
+              <a:t>Medium</a:t>
             </a:r>
             <a:endParaRPr b="0" lang="en-US" sz="900" spc="-1" strike="noStrike">
               <a:solidFill>
@@ -44261,7 +44261,7 @@
                 </a:solidFill>
                 <a:latin typeface="Arial"/>
               </a:rPr>
-              <a:t>Низкий</a:t>
+              <a:t>Low</a:t>
             </a:r>
             <a:endParaRPr b="0" lang="en-US" sz="900" spc="-1" strike="noStrike">
               <a:solidFill>
@@ -44600,7 +44600,7 @@
                 </a:solidFill>
                 <a:latin typeface="Arial"/>
               </a:rPr>
-              <a:t>Низкий</a:t>
+              <a:t>Low</a:t>
             </a:r>
             <a:endParaRPr b="0" lang="en-US" sz="900" spc="-1" strike="noStrike">
               <a:solidFill>
@@ -44664,7 +44664,7 @@
                 </a:solidFill>
                 <a:latin typeface="Arial"/>
               </a:rPr>
-              <a:t>[Сколько outcomes с OS ≥ 15] — критически незакрытые потребности, </a:t>
+              <a:t>[How many outcomes score OS &gt;= 15] — critically underserved needs, </a:t>
             </a:r>
             <a:r>
               <a:rPr b="0" lang="ru-RU" sz="900" spc="-1" strike="noStrike">
@@ -44673,7 +44673,7 @@
                 </a:solidFill>
                 <a:latin typeface="Arial"/>
               </a:rPr>
-              <a:t>[Вывод: что двигается в приоритет OST; остальные — в roadmap]</a:t>
+              <a:t>[Conclusion: what moves to the top of the OST; the rest go to the roadmap]</a:t>
             </a:r>
             <a:endParaRPr b="0" lang="en-US" sz="900" spc="-1" strike="noStrike">
               <a:solidFill>
@@ -44779,7 +44779,7 @@
                 <a:latin typeface="Calibri"/>
                 <a:ea typeface="Calibri"/>
               </a:rPr>
-              <a:t>Источник: [указать источник]</a:t>
+              <a:t>Source: [state the source]</a:t>
             </a:r>
             <a:endParaRPr b="0" lang="en-US" sz="800" spc="-1" strike="noStrike">
               <a:solidFill>
@@ -44922,7 +44922,7 @@
                 <a:latin typeface="Calibri"/>
                 <a:ea typeface="Calibri"/>
               </a:rPr>
-              <a:t>СЛЕДУЮЩИЕ ШАГИ</a:t>
+              <a:t>NEXT STEPS</a:t>
             </a:r>
             <a:endParaRPr b="0" lang="en-US" sz="1000" spc="-1" strike="noStrike">
               <a:solidFill>
@@ -45085,7 +45085,7 @@
                 <a:latin typeface="Calibri"/>
                 <a:ea typeface="Calibri"/>
               </a:rPr>
-              <a:t>Провести интервью с потребителями</a:t>
+              <a:t>Run customer interviews</a:t>
             </a:r>
             <a:endParaRPr b="0" lang="en-US" sz="1300" spc="-1" strike="noStrike">
               <a:solidFill>
@@ -45142,7 +45142,7 @@
                 <a:latin typeface="Calibri"/>
                 <a:ea typeface="Calibri"/>
               </a:rPr>
-              <a:t>5–7 глубинных интервью (The Mom Test) с [сегмент] за [срок]. Цель: [N/M] подтверждают боль. [бюджет]</a:t>
+              <a:t>5-7 in-depth interviews (The Mom Test) with [segment] over [timeframe]. Target: [N/M] confirm the pain. [budget]</a:t>
             </a:r>
             <a:endParaRPr b="0" lang="en-US" sz="900" spc="-1" strike="noStrike">
               <a:solidFill>
@@ -45305,7 +45305,7 @@
                 <a:latin typeface="Calibri"/>
                 <a:ea typeface="Calibri"/>
               </a:rPr>
-              <a:t>Запустить Rapid Assumption Tests</a:t>
+              <a:t>Launch the Rapid Assumption Tests</a:t>
             </a:r>
             <a:endParaRPr b="0" lang="en-US" sz="1300" spc="-1" strike="noStrike">
               <a:solidFill>
@@ -45362,7 +45362,7 @@
                 <a:latin typeface="Calibri"/>
                 <a:ea typeface="Calibri"/>
               </a:rPr>
-              <a:t>Smoke Test [канал]: «[оффер]». [бюджет], [срок]. Критерий: [метрика ≥ значение]</a:t>
+              <a:t>Smoke Test [channel]: "[offer]". [budget], [timeframe]. Criterion: [metric &gt;= value]</a:t>
             </a:r>
             <a:endParaRPr b="0" lang="en-US" sz="900" spc="-1" strike="noStrike">
               <a:solidFill>
@@ -45525,7 +45525,7 @@
                 <a:latin typeface="Calibri"/>
                 <a:ea typeface="Calibri"/>
               </a:rPr>
-              <a:t>Верифицировать Opportunity Score</a:t>
+              <a:t>Verify the Opportunity Score</a:t>
             </a:r>
             <a:endParaRPr b="0" lang="en-US" sz="1300" spc="-1" strike="noStrike">
               <a:solidFill>
@@ -45582,7 +45582,7 @@
                 <a:latin typeface="Calibri"/>
                 <a:ea typeface="Calibri"/>
               </a:rPr>
-              <a:t>Опрос 30–50 респондентов [канал сбора] — верификация OS из задачи 7</a:t>
+              <a:t>Survey 30-50 respondents [collection channel] — verifying the OS from task 7</a:t>
             </a:r>
             <a:endParaRPr b="0" lang="en-US" sz="900" spc="-1" strike="noStrike">
               <a:solidFill>
@@ -45745,7 +45745,7 @@
                 <a:latin typeface="Calibri"/>
                 <a:ea typeface="Calibri"/>
               </a:rPr>
-              <a:t>Выбрать целевую возможность в OST</a:t>
+              <a:t>Pick the target opportunity in the OST</a:t>
             </a:r>
             <a:endParaRPr b="0" lang="en-US" sz="1300" spc="-1" strike="noStrike">
               <a:solidFill>
@@ -45802,7 +45802,7 @@
                 <a:latin typeface="Calibri"/>
                 <a:ea typeface="Calibri"/>
               </a:rPr>
-              <a:t>Приоритет: «[возможность]» (OS=[N]). Решения: [решение 1] + [решение 2]</a:t>
+              <a:t>Priority: "[opportunity]" (OS=[N]). Solutions: [solution 1] + [solution 2]</a:t>
             </a:r>
             <a:endParaRPr b="0" lang="en-US" sz="900" spc="-1" strike="noStrike">
               <a:solidFill>
@@ -45965,7 +45965,7 @@
                 <a:latin typeface="Calibri"/>
                 <a:ea typeface="Calibri"/>
               </a:rPr>
-              <a:t>Перейти к фазе Value Validation</a:t>
+              <a:t>Move to the Value Validation phase</a:t>
             </a:r>
             <a:endParaRPr b="0" lang="en-US" sz="1300" spc="-1" strike="noStrike">
               <a:solidFill>
@@ -46022,7 +46022,7 @@
                 <a:latin typeface="Calibri"/>
                 <a:ea typeface="Calibri"/>
               </a:rPr>
-              <a:t>Value Validation после [N] продаж: Sean Ellis Test (цель ≥ 40% «очень разочарованы»)</a:t>
+              <a:t>Value Validation after [N] sales: Sean Ellis Test (target &gt;= 40% "very disappointed")</a:t>
             </a:r>
             <a:endParaRPr b="0" lang="en-US" sz="900" spc="-1" strike="noStrike">
               <a:solidFill>
@@ -46079,7 +46079,7 @@
                 <a:latin typeface="Calibri"/>
                 <a:ea typeface="Calibri"/>
               </a:rPr>
-              <a:t>[Название проекта]  ·  [сайт]  ·  [месяц год]</a:t>
+              <a:t>[Project name]  ·  [website]  ·  [month year]</a:t>
             </a:r>
             <a:endParaRPr b="0" lang="en-US" sz="800" spc="-1" strike="noStrike">
               <a:solidFill>
@@ -46222,7 +46222,7 @@
                 <a:latin typeface="Calibri"/>
                 <a:ea typeface="Calibri"/>
               </a:rPr>
-              <a:t>Динамика рынка (CAGR)</a:t>
+              <a:t>Market dynamics (CAGR)</a:t>
             </a:r>
             <a:endParaRPr b="0" lang="en-US" sz="1700" spc="-1" strike="noStrike">
               <a:solidFill>
@@ -46279,7 +46279,7 @@
                 <a:latin typeface="Calibri"/>
                 <a:ea typeface="Calibri"/>
               </a:rPr>
-              <a:t>АНАЛИЗ РЫНКА</a:t>
+              <a:t>MARKET ANALYSIS</a:t>
             </a:r>
             <a:endParaRPr b="0" lang="en-US" sz="800" spc="-1" strike="noStrike">
               <a:solidFill>
@@ -46385,7 +46385,7 @@
                 <a:latin typeface="Calibri"/>
                 <a:ea typeface="Calibri"/>
               </a:rPr>
-              <a:t>Источник: [источники по динамике и прогнозу рынка — задача 1]</a:t>
+              <a:t>Source: [sources on market dynamics and forecast — task 1]</a:t>
             </a:r>
             <a:endParaRPr b="0" lang="en-US" sz="800" spc="-1" strike="noStrike">
               <a:solidFill>
@@ -46547,7 +46547,7 @@
                 <a:latin typeface="Calibri"/>
                 <a:ea typeface="Calibri"/>
               </a:rPr>
-              <a:t>Динамика рынка (CAGR)</a:t>
+              <a:t>Market dynamics (CAGR)</a:t>
             </a:r>
             <a:endParaRPr b="0" lang="en-US" sz="2800" spc="-1" strike="noStrike">
               <a:solidFill>
@@ -46604,7 +46604,7 @@
                 <a:latin typeface="Calibri"/>
                 <a:ea typeface="Calibri"/>
               </a:rPr>
-              <a:t>Объём рынка (TAM)</a:t>
+              <a:t>Market size (TAM)</a:t>
             </a:r>
             <a:endParaRPr b="0" lang="en-US" sz="900" spc="-1" strike="noStrike">
               <a:solidFill>
@@ -46823,7 +46823,7 @@
                 <a:latin typeface="Calibri"/>
                 <a:ea typeface="Calibri"/>
               </a:rPr>
-              <a:t>CAGR (рост рынка)</a:t>
+              <a:t>CAGR (market growth)</a:t>
             </a:r>
             <a:endParaRPr b="0" lang="en-US" sz="900" spc="-1" strike="noStrike">
               <a:solidFill>
@@ -46985,7 +46985,7 @@
                 <a:latin typeface="Calibri"/>
                 <a:ea typeface="Calibri"/>
               </a:rPr>
-              <a:t>[N] ключевых</a:t>
+              <a:t>[N] key</a:t>
             </a:r>
             <a:endParaRPr b="0" lang="en-US" sz="2800" spc="-1" strike="noStrike">
               <a:solidFill>
@@ -47042,7 +47042,7 @@
                 <a:latin typeface="Calibri"/>
                 <a:ea typeface="Calibri"/>
               </a:rPr>
-              <a:t>Ключевых участников</a:t>
+              <a:t>Key players</a:t>
             </a:r>
             <a:endParaRPr b="0" lang="en-US" sz="900" spc="-1" strike="noStrike">
               <a:solidFill>
@@ -47204,7 +47204,7 @@
                 <a:latin typeface="Calibri"/>
                 <a:ea typeface="Calibri"/>
               </a:rPr>
-              <a:t>Динамика рынка и прогноз</a:t>
+              <a:t>Market dynamics and forecast</a:t>
             </a:r>
             <a:endParaRPr b="0" lang="en-US" sz="1000" spc="-1" strike="noStrike">
               <a:solidFill>
@@ -47263,7 +47263,7 @@
                 <a:latin typeface="Calibri"/>
                 <a:ea typeface="Calibri"/>
               </a:rPr>
-              <a:t>CAGR [X–Y%]/год за [период]. Источник: [источник]</a:t>
+              <a:t>CAGR [X-Y%]/year over [period]. Source: [source]</a:t>
             </a:r>
             <a:endParaRPr b="0" lang="en-US" sz="950" spc="-1" strike="noStrike">
               <a:solidFill>
@@ -47291,7 +47291,7 @@
                 <a:latin typeface="Calibri"/>
                 <a:ea typeface="Calibri"/>
               </a:rPr>
-              <a:t>Прогноз: [год]: [объём] → [год]: [объём] (при сохранении [Z%] CAGR)</a:t>
+              <a:t>Forecast: [year]: [size] → [year]: [size] (if [Z%] CAGR holds)</a:t>
             </a:r>
             <a:endParaRPr b="0" lang="en-US" sz="950" spc="-1" strike="noStrike">
               <a:solidFill>
@@ -47319,7 +47319,7 @@
                 <a:latin typeface="Calibri"/>
                 <a:ea typeface="Calibri"/>
               </a:rPr>
-              <a:t>Драйверы: [драйвер 1], [драйвер 2], [драйвер 3]</a:t>
+              <a:t>Drivers: [driver 1], [driver 2], [driver 3]</a:t>
             </a:r>
             <a:endParaRPr b="0" lang="en-US" sz="950" spc="-1" strike="noStrike">
               <a:solidFill>
@@ -47347,7 +47347,7 @@
                 <a:latin typeface="Calibri"/>
                 <a:ea typeface="Calibri"/>
               </a:rPr>
-              <a:t>Риски: [риск 1], [риск 2], [риск 3]</a:t>
+              <a:t>Risks: [risk 1], [risk 2], [risk 3]</a:t>
             </a:r>
             <a:endParaRPr b="0" lang="en-US" sz="950" spc="-1" strike="noStrike">
               <a:solidFill>
@@ -47490,7 +47490,7 @@
                 <a:latin typeface="Calibri"/>
                 <a:ea typeface="Calibri"/>
               </a:rPr>
-              <a:t>Тренды рынка</a:t>
+              <a:t>Market trends</a:t>
             </a:r>
             <a:endParaRPr b="0" lang="en-US" sz="1700" spc="-1" strike="noStrike">
               <a:solidFill>
@@ -47547,7 +47547,7 @@
                 <a:latin typeface="Calibri"/>
                 <a:ea typeface="Calibri"/>
               </a:rPr>
-              <a:t>АНАЛИЗ РЫНКА</a:t>
+              <a:t>MARKET ANALYSIS</a:t>
             </a:r>
             <a:endParaRPr b="0" lang="en-US" sz="800" spc="-1" strike="noStrike">
               <a:solidFill>
@@ -47653,7 +47653,7 @@
                 <a:latin typeface="Calibri"/>
                 <a:ea typeface="Calibri"/>
               </a:rPr>
-              <a:t>Источник: [источники по трендам — задача 2]</a:t>
+              <a:t>Source: [sources on trends — task 2]</a:t>
             </a:r>
             <a:endParaRPr b="0" lang="en-US" sz="800" spc="-1" strike="noStrike">
               <a:solidFill>
@@ -47815,7 +47815,7 @@
                 <a:latin typeface="Calibri"/>
                 <a:ea typeface="Calibri"/>
               </a:rPr>
-              <a:t>Технологический тренд</a:t>
+              <a:t>Technological trend</a:t>
             </a:r>
             <a:endParaRPr b="0" lang="en-US" sz="1000" spc="-1" strike="noStrike">
               <a:solidFill>
@@ -47874,7 +47874,7 @@
                 <a:latin typeface="Calibri"/>
                 <a:ea typeface="Calibri"/>
               </a:rPr>
-              <a:t>[Технологический тренд: суть, цифра с источником, следствие для продукта]</a:t>
+              <a:t>[Technological trend: the substance, a sourced number, the consequence for the product]</a:t>
             </a:r>
             <a:endParaRPr b="0" lang="en-US" sz="950" spc="-1" strike="noStrike">
               <a:solidFill>
@@ -48036,7 +48036,7 @@
                 <a:latin typeface="Calibri"/>
                 <a:ea typeface="Calibri"/>
               </a:rPr>
-              <a:t>Поведенческий тренд</a:t>
+              <a:t>Behavioural trend</a:t>
             </a:r>
             <a:endParaRPr b="0" lang="en-US" sz="1000" spc="-1" strike="noStrike">
               <a:solidFill>
@@ -48095,7 +48095,7 @@
                 <a:latin typeface="Calibri"/>
                 <a:ea typeface="Calibri"/>
               </a:rPr>
-              <a:t>[Поведенческий тренд: суть, цифра с источником, следствие для продукта]</a:t>
+              <a:t>[Behavioural trend: the substance, a sourced number, the consequence for the product]</a:t>
             </a:r>
             <a:endParaRPr b="0" lang="en-US" sz="950" spc="-1" strike="noStrike">
               <a:solidFill>
@@ -48257,7 +48257,7 @@
                 <a:latin typeface="Calibri"/>
                 <a:ea typeface="Calibri"/>
               </a:rPr>
-              <a:t>Регуляторный тренд</a:t>
+              <a:t>Regulatory trend</a:t>
             </a:r>
             <a:endParaRPr b="0" lang="en-US" sz="1000" spc="-1" strike="noStrike">
               <a:solidFill>
@@ -48316,7 +48316,7 @@
                 <a:latin typeface="Calibri"/>
                 <a:ea typeface="Calibri"/>
               </a:rPr>
-              <a:t>[Регуляторный тренд: норма, дата вступления, следствие для продукта]</a:t>
+              <a:t>[Regulatory trend: the rule, when it takes effect, the consequence for the product]</a:t>
             </a:r>
             <a:endParaRPr b="0" lang="en-US" sz="950" spc="-1" strike="noStrike">
               <a:solidFill>
@@ -48478,7 +48478,7 @@
                 <a:latin typeface="Calibri"/>
                 <a:ea typeface="Calibri"/>
               </a:rPr>
-              <a:t>Экономический тренд</a:t>
+              <a:t>Economic trend</a:t>
             </a:r>
             <a:endParaRPr b="0" lang="en-US" sz="1000" spc="-1" strike="noStrike">
               <a:solidFill>
@@ -48537,7 +48537,7 @@
                 <a:latin typeface="Calibri"/>
                 <a:ea typeface="Calibri"/>
               </a:rPr>
-              <a:t>[Экономический тренд: суть, цифра с источником, следствие для продукта]</a:t>
+              <a:t>[Economic trend: the substance, a sourced number, the consequence for the product]</a:t>
             </a:r>
             <a:endParaRPr b="0" lang="en-US" sz="950" spc="-1" strike="noStrike">
               <a:solidFill>
@@ -48680,7 +48680,7 @@
                 <a:latin typeface="Calibri"/>
                 <a:ea typeface="Calibri"/>
               </a:rPr>
-              <a:t>Value Chain — цепочка создания стоимости</a:t>
+              <a:t>Value chain</a:t>
             </a:r>
             <a:endParaRPr b="0" lang="en-US" sz="1700" spc="-1" strike="noStrike">
               <a:solidFill>
@@ -48737,7 +48737,7 @@
                 <a:latin typeface="Calibri"/>
                 <a:ea typeface="Calibri"/>
               </a:rPr>
-              <a:t>АНАЛИЗ РЫНКА</a:t>
+              <a:t>MARKET ANALYSIS</a:t>
             </a:r>
             <a:endParaRPr b="0" lang="en-US" sz="800" spc="-1" strike="noStrike">
               <a:solidFill>
@@ -48801,7 +48801,7 @@
                 </a:solidFill>
                 <a:latin typeface="Arial"/>
               </a:rPr>
-              <a:t>Участники: от поставщиков сырья до конечного потребителя</a:t>
+              <a:t>Participants: from raw material suppliers to the end customer</a:t>
             </a:r>
             <a:endParaRPr b="0" lang="en-US" sz="1000" spc="-1" strike="noStrike">
               <a:solidFill>
@@ -48832,7 +48832,7 @@
                 </a:solidFill>
                 <a:latin typeface="Arial"/>
               </a:rPr>
-              <a:t>На каком звене создаётся наибольшая ценность и маржинальность?</a:t>
+              <a:t>Which link in the chain creates the most value and margin?</a:t>
             </a:r>
             <a:endParaRPr b="0" lang="en-US" sz="1000" spc="-1" strike="noStrike">
               <a:solidFill>
@@ -48863,7 +48863,7 @@
                 </a:solidFill>
                 <a:latin typeface="Arial"/>
               </a:rPr>
-              <a:t>Где в цепочке находится продукт? Где возможности для дифференциации?</a:t>
+              <a:t>Where does the product sit in the chain? Where are the openings for differentiation?</a:t>
             </a:r>
             <a:endParaRPr b="0" lang="en-US" sz="1000" spc="-1" strike="noStrike">
               <a:solidFill>
@@ -48918,7 +48918,7 @@
                 </a:solidFill>
                 <a:latin typeface="Arial"/>
               </a:rPr>
-              <a:t>[Звено 1]</a:t>
+              <a:t>[Link 1]</a:t>
             </a:r>
             <a:endParaRPr b="0" lang="en-US" sz="1100" spc="-1" strike="noStrike">
               <a:solidFill>
@@ -48953,7 +48953,7 @@
                 </a:solidFill>
                 <a:latin typeface="Arial"/>
               </a:rPr>
-              <a:t>[Игроки / кто]</a:t>
+              <a:t>[Players / who]</a:t>
             </a:r>
             <a:endParaRPr b="0" lang="en-US" sz="800" spc="-1" strike="noStrike">
               <a:solidFill>
@@ -49008,7 +49008,7 @@
                 </a:solidFill>
                 <a:latin typeface="Arial"/>
               </a:rPr>
-              <a:t>Маржа: [X%]</a:t>
+              <a:t>Margin: [X%]</a:t>
             </a:r>
             <a:endParaRPr b="0" lang="en-US" sz="900" spc="-1" strike="noStrike">
               <a:solidFill>
@@ -49118,7 +49118,7 @@
                 </a:solidFill>
                 <a:latin typeface="Arial"/>
               </a:rPr>
-              <a:t>[Звено 2]</a:t>
+              <a:t>[Link 2]</a:t>
             </a:r>
             <a:endParaRPr b="0" lang="en-US" sz="1100" spc="-1" strike="noStrike">
               <a:solidFill>
@@ -49153,7 +49153,7 @@
                 </a:solidFill>
                 <a:latin typeface="Arial"/>
               </a:rPr>
-              <a:t>[Игроки / кто]</a:t>
+              <a:t>[Players / who]</a:t>
             </a:r>
             <a:endParaRPr b="0" lang="en-US" sz="800" spc="-1" strike="noStrike">
               <a:solidFill>
@@ -49208,7 +49208,7 @@
                 </a:solidFill>
                 <a:latin typeface="Arial"/>
               </a:rPr>
-              <a:t>Маржа: [X%]</a:t>
+              <a:t>Margin: [X%]</a:t>
             </a:r>
             <a:endParaRPr b="0" lang="en-US" sz="900" spc="-1" strike="noStrike">
               <a:solidFill>
@@ -49318,7 +49318,7 @@
                 </a:solidFill>
                 <a:latin typeface="Arial"/>
               </a:rPr>
-              <a:t>[Звено 3]</a:t>
+              <a:t>[Link 3]</a:t>
             </a:r>
             <a:endParaRPr b="0" lang="en-US" sz="1100" spc="-1" strike="noStrike">
               <a:solidFill>
@@ -49353,7 +49353,7 @@
                 </a:solidFill>
                 <a:latin typeface="Arial"/>
               </a:rPr>
-              <a:t>[Игроки / кто]</a:t>
+              <a:t>[Players / who]</a:t>
             </a:r>
             <a:endParaRPr b="0" lang="en-US" sz="800" spc="-1" strike="noStrike">
               <a:solidFill>
@@ -49408,7 +49408,7 @@
                 </a:solidFill>
                 <a:latin typeface="Arial"/>
               </a:rPr>
-              <a:t>Маржа: [X%]</a:t>
+              <a:t>Margin: [X%]</a:t>
             </a:r>
             <a:endParaRPr b="0" lang="en-US" sz="900" spc="-1" strike="noStrike">
               <a:solidFill>
@@ -49518,7 +49518,7 @@
                 </a:solidFill>
                 <a:latin typeface="Arial"/>
               </a:rPr>
-              <a:t>[Звено 4]</a:t>
+              <a:t>[Link 4]</a:t>
             </a:r>
             <a:endParaRPr b="0" lang="en-US" sz="1100" spc="-1" strike="noStrike">
               <a:solidFill>
@@ -49553,7 +49553,7 @@
                 </a:solidFill>
                 <a:latin typeface="Arial"/>
               </a:rPr>
-              <a:t>[Игроки / кто]</a:t>
+              <a:t>[Players / who]</a:t>
             </a:r>
             <a:endParaRPr b="0" lang="en-US" sz="800" spc="-1" strike="noStrike">
               <a:solidFill>
@@ -49608,7 +49608,7 @@
                 </a:solidFill>
                 <a:latin typeface="Arial"/>
               </a:rPr>
-              <a:t>Маржа: [X%]</a:t>
+              <a:t>Margin: [X%]</a:t>
             </a:r>
             <a:endParaRPr b="0" lang="en-US" sz="900" spc="-1" strike="noStrike">
               <a:solidFill>
@@ -49718,7 +49718,7 @@
                 </a:solidFill>
                 <a:latin typeface="Arial"/>
               </a:rPr>
-              <a:t>[Звено 5]</a:t>
+              <a:t>[Link 5]</a:t>
             </a:r>
             <a:endParaRPr b="0" lang="en-US" sz="1100" spc="-1" strike="noStrike">
               <a:solidFill>
@@ -49753,7 +49753,7 @@
                 </a:solidFill>
                 <a:latin typeface="Arial"/>
               </a:rPr>
-              <a:t>[ЦП / контекст]</a:t>
+              <a:t>[Value proposition / context]</a:t>
             </a:r>
             <a:endParaRPr b="0" lang="en-US" sz="800" spc="-1" strike="noStrike">
               <a:solidFill>
@@ -49808,7 +49808,7 @@
                 </a:solidFill>
                 <a:latin typeface="Arial"/>
               </a:rPr>
-              <a:t>Маржа: —</a:t>
+              <a:t>Margin: —</a:t>
             </a:r>
             <a:endParaRPr b="0" lang="en-US" sz="900" spc="-1" strike="noStrike">
               <a:solidFill>
@@ -49863,7 +49863,7 @@
                 </a:solidFill>
                 <a:latin typeface="Arial"/>
               </a:rPr>
-              <a:t>Вывод: </a:t>
+              <a:t>Conclusion: </a:t>
             </a:r>
             <a:r>
               <a:rPr b="0" lang="ru-RU" sz="1000" spc="-1" strike="noStrike">
@@ -49872,7 +49872,7 @@
                 </a:solidFill>
                 <a:latin typeface="Arial"/>
               </a:rPr>
-              <a:t>[На каком звене создаётся наибольшая ценность? Где возможности для дифференциации?]</a:t>
+              <a:t>[Which link creates the most value? Where are the openings for differentiation?]</a:t>
             </a:r>
             <a:endParaRPr b="0" lang="en-US" sz="1000" spc="-1" strike="noStrike">
               <a:solidFill>
@@ -49894,7 +49894,7 @@
                 </a:solidFill>
                 <a:latin typeface="Arial"/>
               </a:rPr>
-              <a:t>[Вывод: незакрытое звено / белое пятно для продукта]</a:t>
+              <a:t>[Conclusion: the unclosed link / the white space for the product]</a:t>
             </a:r>
             <a:endParaRPr b="0" lang="en-US" sz="1000" spc="-1" strike="noStrike">
               <a:solidFill>
@@ -50000,7 +50000,7 @@
                 <a:latin typeface="Calibri"/>
                 <a:ea typeface="Calibri"/>
               </a:rPr>
-              <a:t>Источник: [указать источник]</a:t>
+              <a:t>Source: [state the source]</a:t>
             </a:r>
             <a:endParaRPr b="0" lang="en-US" sz="800" spc="-1" strike="noStrike">
               <a:solidFill>
@@ -50143,7 +50143,7 @@
                 <a:latin typeface="Calibri"/>
                 <a:ea typeface="Calibri"/>
               </a:rPr>
-              <a:t>Конкурентный ландшафт</a:t>
+              <a:t>Competitive landscape</a:t>
             </a:r>
             <a:endParaRPr b="0" lang="en-US" sz="1700" spc="-1" strike="noStrike">
               <a:solidFill>
@@ -50200,7 +50200,7 @@
                 <a:latin typeface="Calibri"/>
                 <a:ea typeface="Calibri"/>
               </a:rPr>
-              <a:t>АНАЛИЗ РЫНКА</a:t>
+              <a:t>MARKET ANALYSIS</a:t>
             </a:r>
             <a:endParaRPr b="0" lang="en-US" sz="800" spc="-1" strike="noStrike">
               <a:solidFill>
@@ -50306,7 +50306,7 @@
                 <a:latin typeface="Calibri"/>
                 <a:ea typeface="Calibri"/>
               </a:rPr>
-              <a:t>Источник: [сайты конкурентов, отзывы, отраслевые публикации — задача 3]</a:t>
+              <a:t>Source: [competitor sites, reviews, industry publications — task 3]</a:t>
             </a:r>
             <a:endParaRPr b="0" lang="en-US" sz="800" spc="-1" strike="noStrike">
               <a:solidFill>
@@ -50468,7 +50468,7 @@
                 <a:latin typeface="Calibri"/>
                 <a:ea typeface="Calibri"/>
               </a:rPr>
-              <a:t>Прямые конкуренты</a:t>
+              <a:t>Direct competitors</a:t>
             </a:r>
             <a:endParaRPr b="0" lang="en-US" sz="1000" spc="-1" strike="noStrike">
               <a:solidFill>
@@ -50527,7 +50527,7 @@
                 <a:latin typeface="Calibri"/>
                 <a:ea typeface="Calibri"/>
               </a:rPr>
-              <a:t>[Прямой 1] · [Прямой 2] · [Прямой 3]</a:t>
+              <a:t>[Direct 1] · [Direct 2] · [Direct 3]</a:t>
             </a:r>
             <a:endParaRPr b="0" lang="en-US" sz="950" spc="-1" strike="noStrike">
               <a:solidFill>
@@ -50689,7 +50689,7 @@
                 <a:latin typeface="Calibri"/>
                 <a:ea typeface="Calibri"/>
               </a:rPr>
-              <a:t>Косвенные конкуренты</a:t>
+              <a:t>Indirect competitors</a:t>
             </a:r>
             <a:endParaRPr b="0" lang="en-US" sz="1000" spc="-1" strike="noStrike">
               <a:solidFill>
@@ -50748,7 +50748,7 @@
                 <a:latin typeface="Calibri"/>
                 <a:ea typeface="Calibri"/>
               </a:rPr>
-              <a:t>[Косвенный 1] · [Косвенный 2]</a:t>
+              <a:t>[Indirect 1] · [Indirect 2]</a:t>
             </a:r>
             <a:endParaRPr b="0" lang="en-US" sz="950" spc="-1" strike="noStrike">
               <a:solidFill>
@@ -50910,7 +50910,7 @@
                 <a:latin typeface="Calibri"/>
                 <a:ea typeface="Calibri"/>
               </a:rPr>
-              <a:t>Вытеснители</a:t>
+              <a:t>Displacers</a:t>
             </a:r>
             <a:endParaRPr b="0" lang="en-US" sz="1000" spc="-1" strike="noStrike">
               <a:solidFill>
@@ -50969,7 +50969,7 @@
                 <a:latin typeface="Calibri"/>
                 <a:ea typeface="Calibri"/>
               </a:rPr>
-              <a:t>[Вытеснитель 1] · [Вытеснитель 2]</a:t>
+              <a:t>[Displacer 1] · [Displacer 2]</a:t>
             </a:r>
             <a:endParaRPr b="0" lang="en-US" sz="950" spc="-1" strike="noStrike">
               <a:solidFill>
@@ -51131,7 +51131,7 @@
                 <a:latin typeface="Calibri"/>
                 <a:ea typeface="Calibri"/>
               </a:rPr>
-              <a:t>Конкуренты по каналам</a:t>
+              <a:t>Channel-based competitors</a:t>
             </a:r>
             <a:endParaRPr b="0" lang="en-US" sz="1000" spc="-1" strike="noStrike">
               <a:solidFill>
@@ -51190,7 +51190,7 @@
                 <a:latin typeface="Calibri"/>
                 <a:ea typeface="Calibri"/>
               </a:rPr>
-              <a:t>[Конкурент по каналам: охват, каналы дистрибуции, доля рынка]</a:t>
+              <a:t>[Channel-based competitor: reach, distribution channels, market share]</a:t>
             </a:r>
             <a:endParaRPr b="0" lang="en-US" sz="950" spc="-1" strike="noStrike">
               <a:solidFill>
@@ -51273,7 +51273,7 @@
                 </a:solidFill>
                 <a:latin typeface="Arial"/>
               </a:rPr>
-              <a:t>Сравнение конкурентов: финансы и продукт</a:t>
+              <a:t>Competitor comparison: financials and product</a:t>
             </a:r>
             <a:endParaRPr b="0" lang="en-US" sz="2400" spc="-1" strike="noStrike">
               <a:solidFill>
@@ -51326,7 +51326,7 @@
                 </a:solidFill>
                 <a:latin typeface="Arial"/>
               </a:rPr>
-              <a:t>Финансовые и продуктовые параметры основных игроков. Цифры — оценка по открытым источникам, указывай уровень достоверности.</a:t>
+              <a:t>Financial and product parameters of the main players. The numbers are estimates from public sources — state the confidence level.</a:t>
             </a:r>
             <a:endParaRPr b="0" lang="en-US" sz="1100" spc="-1" strike="noStrike">
               <a:solidFill>
@@ -51379,7 +51379,7 @@
                           </a:solidFill>
                           <a:latin typeface="Arial"/>
                         </a:rPr>
-                        <a:t>Конкурент</a:t>
+                        <a:t>Competitor</a:t>
                       </a:r>
                       <a:endParaRPr b="0" lang="en-US" sz="1000" spc="-1" strike="noStrike">
                         <a:solidFill>
@@ -51437,7 +51437,7 @@
                           </a:solidFill>
                           <a:latin typeface="Arial"/>
                         </a:rPr>
-                        <a:t>Рынок / гео</a:t>
+                        <a:t>Market / geo</a:t>
                       </a:r>
                       <a:endParaRPr b="0" lang="en-US" sz="1000" spc="-1" strike="noStrike">
                         <a:solidFill>
@@ -51495,7 +51495,7 @@
                           </a:solidFill>
                           <a:latin typeface="Arial"/>
                         </a:rPr>
-                        <a:t>Цена / подписка</a:t>
+                        <a:t>Price / subscription</a:t>
                       </a:r>
                       <a:endParaRPr b="0" lang="en-US" sz="1000" spc="-1" strike="noStrike">
                         <a:solidFill>
@@ -51553,7 +51553,7 @@
                           </a:solidFill>
                           <a:latin typeface="Arial"/>
                         </a:rPr>
-                        <a:t>Клиенты (оценка)</a:t>
+                        <a:t>Customers (est.)</a:t>
                       </a:r>
                       <a:endParaRPr b="0" lang="en-US" sz="1000" spc="-1" strike="noStrike">
                         <a:solidFill>
@@ -51611,7 +51611,7 @@
                           </a:solidFill>
                           <a:latin typeface="Arial"/>
                         </a:rPr>
-                        <a:t>Выручка (оценка)</a:t>
+                        <a:t>Revenue (est.)</a:t>
                       </a:r>
                       <a:endParaRPr b="0" lang="en-US" sz="1000" spc="-1" strike="noStrike">
                         <a:solidFill>
@@ -51669,7 +51669,7 @@
                           </a:solidFill>
                           <a:latin typeface="Arial"/>
                         </a:rPr>
-                        <a:t>Ключевые фичи</a:t>
+                        <a:t>Key features</a:t>
                       </a:r>
                       <a:endParaRPr b="0" lang="en-US" sz="1000" spc="-1" strike="noStrike">
                         <a:solidFill>
@@ -51727,7 +51727,7 @@
                           </a:solidFill>
                           <a:latin typeface="Arial"/>
                         </a:rPr>
-                        <a:t>Слабость</a:t>
+                        <a:t>Weakness</a:t>
                       </a:r>
                       <a:endParaRPr b="0" lang="en-US" sz="1000" spc="-1" strike="noStrike">
                         <a:solidFill>
@@ -51787,7 +51787,7 @@
                           </a:solidFill>
                           <a:latin typeface="Arial"/>
                         </a:rPr>
-                        <a:t>[Конкурент 1]</a:t>
+                        <a:t>[Competitor 1]</a:t>
                       </a:r>
                       <a:endParaRPr b="0" lang="en-US" sz="900" spc="-1" strike="noStrike">
                         <a:solidFill>
@@ -51845,7 +51845,7 @@
                           </a:solidFill>
                           <a:latin typeface="Arial"/>
                         </a:rPr>
-                        <a:t>[рынок / гео]</a:t>
+                        <a:t>[market / geo]</a:t>
                       </a:r>
                       <a:endParaRPr b="0" lang="en-US" sz="900" spc="-1" strike="noStrike">
                         <a:solidFill>
@@ -51903,7 +51903,7 @@
                           </a:solidFill>
                           <a:latin typeface="Arial"/>
                         </a:rPr>
-                        <a:t>[цена]</a:t>
+                        <a:t>[price]</a:t>
                       </a:r>
                       <a:endParaRPr b="0" lang="en-US" sz="900" spc="-1" strike="noStrike">
                         <a:solidFill>
@@ -51961,7 +51961,7 @@
                           </a:solidFill>
                           <a:latin typeface="Arial"/>
                         </a:rPr>
-                        <a:t>[клиенты]</a:t>
+                        <a:t>[customers]</a:t>
                       </a:r>
                       <a:endParaRPr b="0" lang="en-US" sz="900" spc="-1" strike="noStrike">
                         <a:solidFill>
@@ -52019,7 +52019,7 @@
                           </a:solidFill>
                           <a:latin typeface="Arial"/>
                         </a:rPr>
-                        <a:t>[выручка]</a:t>
+                        <a:t>[revenue]</a:t>
                       </a:r>
                       <a:endParaRPr b="0" lang="en-US" sz="900" spc="-1" strike="noStrike">
                         <a:solidFill>
@@ -52077,7 +52077,7 @@
                           </a:solidFill>
                           <a:latin typeface="Arial"/>
                         </a:rPr>
-                        <a:t>[ключевые фичи]</a:t>
+                        <a:t>[key features]</a:t>
                       </a:r>
                       <a:endParaRPr b="0" lang="en-US" sz="900" spc="-1" strike="noStrike">
                         <a:solidFill>
@@ -52135,7 +52135,7 @@
                           </a:solidFill>
                           <a:latin typeface="Arial"/>
                         </a:rPr>
-                        <a:t>[слабость]</a:t>
+                        <a:t>[weakness]</a:t>
                       </a:r>
                       <a:endParaRPr b="0" lang="en-US" sz="900" spc="-1" strike="noStrike">
                         <a:solidFill>
@@ -52195,7 +52195,7 @@
                           </a:solidFill>
                           <a:latin typeface="Arial"/>
                         </a:rPr>
-                        <a:t>[Конкурент 2]</a:t>
+                        <a:t>[Competitor 2]</a:t>
                       </a:r>
                       <a:endParaRPr b="0" lang="en-US" sz="900" spc="-1" strike="noStrike">
                         <a:solidFill>
@@ -52253,7 +52253,7 @@
                           </a:solidFill>
                           <a:latin typeface="Arial"/>
                         </a:rPr>
-                        <a:t>[рынок / гео]</a:t>
+                        <a:t>[market / geo]</a:t>
                       </a:r>
                       <a:endParaRPr b="0" lang="en-US" sz="900" spc="-1" strike="noStrike">
                         <a:solidFill>
@@ -52311,7 +52311,7 @@
                           </a:solidFill>
                           <a:latin typeface="Arial"/>
                         </a:rPr>
-                        <a:t>[цена]</a:t>
+                        <a:t>[price]</a:t>
                       </a:r>
                       <a:endParaRPr b="0" lang="en-US" sz="900" spc="-1" strike="noStrike">
                         <a:solidFill>
@@ -52369,7 +52369,7 @@
                           </a:solidFill>
                           <a:latin typeface="Arial"/>
                         </a:rPr>
-                        <a:t>[клиенты]</a:t>
+                        <a:t>[customers]</a:t>
                       </a:r>
                       <a:endParaRPr b="0" lang="en-US" sz="900" spc="-1" strike="noStrike">
                         <a:solidFill>
@@ -52427,7 +52427,7 @@
                           </a:solidFill>
                           <a:latin typeface="Arial"/>
                         </a:rPr>
-                        <a:t>[выручка]</a:t>
+                        <a:t>[revenue]</a:t>
                       </a:r>
                       <a:endParaRPr b="0" lang="en-US" sz="900" spc="-1" strike="noStrike">
                         <a:solidFill>
@@ -52485,7 +52485,7 @@
                           </a:solidFill>
                           <a:latin typeface="Arial"/>
                         </a:rPr>
-                        <a:t>[ключевые фичи]</a:t>
+                        <a:t>[key features]</a:t>
                       </a:r>
                       <a:endParaRPr b="0" lang="en-US" sz="900" spc="-1" strike="noStrike">
                         <a:solidFill>
@@ -52543,7 +52543,7 @@
                           </a:solidFill>
                           <a:latin typeface="Arial"/>
                         </a:rPr>
-                        <a:t>[слабость]</a:t>
+                        <a:t>[weakness]</a:t>
                       </a:r>
                       <a:endParaRPr b="0" lang="en-US" sz="900" spc="-1" strike="noStrike">
                         <a:solidFill>
@@ -52603,7 +52603,7 @@
                           </a:solidFill>
                           <a:latin typeface="Arial"/>
                         </a:rPr>
-                        <a:t>[Конкурент 3]</a:t>
+                        <a:t>[Competitor 3]</a:t>
                       </a:r>
                       <a:endParaRPr b="0" lang="en-US" sz="900" spc="-1" strike="noStrike">
                         <a:solidFill>
@@ -52661,7 +52661,7 @@
                           </a:solidFill>
                           <a:latin typeface="Arial"/>
                         </a:rPr>
-                        <a:t>[рынок / гео]</a:t>
+                        <a:t>[market / geo]</a:t>
                       </a:r>
                       <a:endParaRPr b="0" lang="en-US" sz="900" spc="-1" strike="noStrike">
                         <a:solidFill>
@@ -52719,7 +52719,7 @@
                           </a:solidFill>
                           <a:latin typeface="Arial"/>
                         </a:rPr>
-                        <a:t>[цена]</a:t>
+                        <a:t>[price]</a:t>
                       </a:r>
                       <a:endParaRPr b="0" lang="en-US" sz="900" spc="-1" strike="noStrike">
                         <a:solidFill>
@@ -52777,7 +52777,7 @@
                           </a:solidFill>
                           <a:latin typeface="Arial"/>
                         </a:rPr>
-                        <a:t>[клиенты]</a:t>
+                        <a:t>[customers]</a:t>
                       </a:r>
                       <a:endParaRPr b="0" lang="en-US" sz="900" spc="-1" strike="noStrike">
                         <a:solidFill>
@@ -52835,7 +52835,7 @@
                           </a:solidFill>
                           <a:latin typeface="Arial"/>
                         </a:rPr>
-                        <a:t>[выручка]</a:t>
+                        <a:t>[revenue]</a:t>
                       </a:r>
                       <a:endParaRPr b="0" lang="en-US" sz="900" spc="-1" strike="noStrike">
                         <a:solidFill>
@@ -52893,7 +52893,7 @@
                           </a:solidFill>
                           <a:latin typeface="Arial"/>
                         </a:rPr>
-                        <a:t>[ключевые фичи]</a:t>
+                        <a:t>[key features]</a:t>
                       </a:r>
                       <a:endParaRPr b="0" lang="en-US" sz="900" spc="-1" strike="noStrike">
                         <a:solidFill>
@@ -52951,7 +52951,7 @@
                           </a:solidFill>
                           <a:latin typeface="Arial"/>
                         </a:rPr>
-                        <a:t>[слабость]</a:t>
+                        <a:t>[weakness]</a:t>
                       </a:r>
                       <a:endParaRPr b="0" lang="en-US" sz="900" spc="-1" strike="noStrike">
                         <a:solidFill>
@@ -53011,7 +53011,7 @@
                           </a:solidFill>
                           <a:latin typeface="Arial"/>
                         </a:rPr>
-                        <a:t>[Конкурент 4]</a:t>
+                        <a:t>[Competitor 4]</a:t>
                       </a:r>
                       <a:endParaRPr b="0" lang="en-US" sz="900" spc="-1" strike="noStrike">
                         <a:solidFill>
@@ -53069,7 +53069,7 @@
                           </a:solidFill>
                           <a:latin typeface="Arial"/>
                         </a:rPr>
-                        <a:t>[рынок / гео]</a:t>
+                        <a:t>[market / geo]</a:t>
                       </a:r>
                       <a:endParaRPr b="0" lang="en-US" sz="900" spc="-1" strike="noStrike">
                         <a:solidFill>
@@ -53127,7 +53127,7 @@
                           </a:solidFill>
                           <a:latin typeface="Arial"/>
                         </a:rPr>
-                        <a:t>[цена]</a:t>
+                        <a:t>[price]</a:t>
                       </a:r>
                       <a:endParaRPr b="0" lang="en-US" sz="900" spc="-1" strike="noStrike">
                         <a:solidFill>
@@ -53185,7 +53185,7 @@
                           </a:solidFill>
                           <a:latin typeface="Arial"/>
                         </a:rPr>
-                        <a:t>[клиенты]</a:t>
+                        <a:t>[customers]</a:t>
                       </a:r>
                       <a:endParaRPr b="0" lang="en-US" sz="900" spc="-1" strike="noStrike">
                         <a:solidFill>
@@ -53243,7 +53243,7 @@
                           </a:solidFill>
                           <a:latin typeface="Arial"/>
                         </a:rPr>
-                        <a:t>[выручка]</a:t>
+                        <a:t>[revenue]</a:t>
                       </a:r>
                       <a:endParaRPr b="0" lang="en-US" sz="900" spc="-1" strike="noStrike">
                         <a:solidFill>
@@ -53301,7 +53301,7 @@
                           </a:solidFill>
                           <a:latin typeface="Arial"/>
                         </a:rPr>
-                        <a:t>[ключевые фичи]</a:t>
+                        <a:t>[key features]</a:t>
                       </a:r>
                       <a:endParaRPr b="0" lang="en-US" sz="900" spc="-1" strike="noStrike">
                         <a:solidFill>
@@ -53359,7 +53359,7 @@
                           </a:solidFill>
                           <a:latin typeface="Arial"/>
                         </a:rPr>
-                        <a:t>[слабость]</a:t>
+                        <a:t>[weakness]</a:t>
                       </a:r>
                       <a:endParaRPr b="0" lang="en-US" sz="900" spc="-1" strike="noStrike">
                         <a:solidFill>
@@ -53419,7 +53419,7 @@
                           </a:solidFill>
                           <a:latin typeface="Arial"/>
                         </a:rPr>
-                        <a:t>[Наш продукт]</a:t>
+                        <a:t>[Our product]</a:t>
                       </a:r>
                       <a:endParaRPr b="0" lang="en-US" sz="900" spc="-1" strike="noStrike">
                         <a:solidFill>
@@ -53477,7 +53477,7 @@
                           </a:solidFill>
                           <a:latin typeface="Arial"/>
                         </a:rPr>
-                        <a:t>[рынок / гео]</a:t>
+                        <a:t>[market / geo]</a:t>
                       </a:r>
                       <a:endParaRPr b="0" lang="en-US" sz="900" spc="-1" strike="noStrike">
                         <a:solidFill>
@@ -53535,7 +53535,7 @@
                           </a:solidFill>
                           <a:latin typeface="Arial"/>
                         </a:rPr>
-                        <a:t>[цена]</a:t>
+                        <a:t>[price]</a:t>
                       </a:r>
                       <a:endParaRPr b="0" lang="en-US" sz="900" spc="-1" strike="noStrike">
                         <a:solidFill>
@@ -53593,7 +53593,7 @@
                           </a:solidFill>
                           <a:latin typeface="Arial"/>
                         </a:rPr>
-                        <a:t>[клиенты]</a:t>
+                        <a:t>[customers]</a:t>
                       </a:r>
                       <a:endParaRPr b="0" lang="en-US" sz="900" spc="-1" strike="noStrike">
                         <a:solidFill>
@@ -53651,7 +53651,7 @@
                           </a:solidFill>
                           <a:latin typeface="Arial"/>
                         </a:rPr>
-                        <a:t>[выручка]</a:t>
+                        <a:t>[revenue]</a:t>
                       </a:r>
                       <a:endParaRPr b="0" lang="en-US" sz="900" spc="-1" strike="noStrike">
                         <a:solidFill>
@@ -53709,7 +53709,7 @@
                           </a:solidFill>
                           <a:latin typeface="Arial"/>
                         </a:rPr>
-                        <a:t>[ключевые фичи]</a:t>
+                        <a:t>[key features]</a:t>
                       </a:r>
                       <a:endParaRPr b="0" lang="en-US" sz="900" spc="-1" strike="noStrike">
                         <a:solidFill>
@@ -53767,7 +53767,7 @@
                           </a:solidFill>
                           <a:latin typeface="Arial"/>
                         </a:rPr>
-                        <a:t>[слабость]</a:t>
+                        <a:t>[weakness]</a:t>
                       </a:r>
                       <a:endParaRPr b="0" lang="en-US" sz="900" spc="-1" strike="noStrike">
                         <a:solidFill>
@@ -53854,7 +53854,7 @@
                 </a:solidFill>
                 <a:latin typeface="Arial"/>
               </a:rPr>
-              <a:t>Источники: G2, Crunchbase, SimilarWeb, отчёты компаний (задача 3, 4)</a:t>
+              <a:t>Sources: G2, Crunchbase, SimilarWeb, company reports (tasks 3, 4)</a:t>
             </a:r>
             <a:endParaRPr b="0" lang="en-US" sz="800" spc="-1" strike="noStrike">
               <a:solidFill>
@@ -53997,7 +53997,7 @@
                 <a:latin typeface="Calibri"/>
                 <a:ea typeface="Calibri"/>
               </a:rPr>
-              <a:t>Ключевой конкурент: [название]</a:t>
+              <a:t>Key competitor: [name]</a:t>
             </a:r>
             <a:endParaRPr b="0" lang="en-US" sz="1700" spc="-1" strike="noStrike">
               <a:solidFill>
@@ -54054,7 +54054,7 @@
                 <a:latin typeface="Calibri"/>
                 <a:ea typeface="Calibri"/>
               </a:rPr>
-              <a:t>АНАЛИЗ РЫНКА</a:t>
+              <a:t>MARKET ANALYSIS</a:t>
             </a:r>
             <a:endParaRPr b="0" lang="en-US" sz="800" spc="-1" strike="noStrike">
               <a:solidFill>
@@ -54160,7 +54160,7 @@
                 <a:latin typeface="Calibri"/>
                 <a:ea typeface="Calibri"/>
               </a:rPr>
-              <a:t>Источник: [сайт конкурента, отзывы, аналитика — задача 4]</a:t>
+              <a:t>Source: [the competitor's site, reviews, analytics — task 4]</a:t>
             </a:r>
             <a:endParaRPr b="0" lang="en-US" sz="800" spc="-1" strike="noStrike">
               <a:solidFill>
@@ -54217,7 +54217,7 @@
                 <a:latin typeface="Calibri"/>
                 <a:ea typeface="Calibri"/>
               </a:rPr>
-              <a:t>АНАЛИЗ ПО ВОРОНКЕ AARRR</a:t>
+              <a:t>AARRR FUNNEL ANALYSIS</a:t>
             </a:r>
             <a:endParaRPr b="0" lang="en-US" sz="1000" spc="-1" strike="noStrike">
               <a:solidFill>
@@ -54429,7 +54429,7 @@
                 <a:latin typeface="Calibri"/>
                 <a:ea typeface="Calibri"/>
               </a:rPr>
-              <a:t>Acquisition: [каналы с долями трафика]. Оценочный CAC / CPC: [значение]</a:t>
+              <a:t>Acquisition: [channels with traffic shares]. Estimated CAC / CPC: [value]</a:t>
             </a:r>
             <a:endParaRPr b="0" lang="en-US" sz="1000" spc="-1" strike="noStrike">
               <a:solidFill>
@@ -54641,7 +54641,7 @@
                 <a:latin typeface="Calibri"/>
                 <a:ea typeface="Calibri"/>
               </a:rPr>
-              <a:t>Activation: [механика онбординга]. Aha-moment: [момент]. Время до first value: [значение]</a:t>
+              <a:t>Activation: [onboarding mechanics]. Aha moment: [the moment]. Time to first value: [value]</a:t>
             </a:r>
             <a:endParaRPr b="0" lang="en-US" sz="1000" spc="-1" strike="noStrike">
               <a:solidFill>
@@ -54853,7 +54853,7 @@
                 <a:latin typeface="Calibri"/>
                 <a:ea typeface="Calibri"/>
               </a:rPr>
-              <a:t>Retention: [механизмы удержания]. Оценочный retention / repeat rate: [значение]</a:t>
+              <a:t>Retention: [retention mechanics]. Estimated retention / repeat rate: [value]</a:t>
             </a:r>
             <a:endParaRPr b="0" lang="en-US" sz="1000" spc="-1" strike="noStrike">
               <a:solidFill>
@@ -55065,7 +55065,7 @@
                 <a:latin typeface="Calibri"/>
                 <a:ea typeface="Calibri"/>
               </a:rPr>
-              <a:t>Revenue: [модель монетизации]. Средний чек: [значение]. Оценочная выручка: [значение]</a:t>
+              <a:t>Revenue: [monetisation model]. Average ticket: [value]. Estimated revenue: [value]</a:t>
             </a:r>
             <a:endParaRPr b="0" lang="en-US" sz="1000" spc="-1" strike="noStrike">
               <a:solidFill>
@@ -55277,7 +55277,7 @@
                 <a:latin typeface="Calibri"/>
                 <a:ea typeface="Calibri"/>
               </a:rPr>
-              <a:t>Referral: [программы и механики]. NPS: [значение или «не раскрывается»]. Слабость: [ключевая уязвимость]</a:t>
+              <a:t>Referral: [programmes and mechanics]. NPS: [value, or "not disclosed"]. Weakness: [the key vulnerability]</a:t>
             </a:r>
             <a:endParaRPr b="0" lang="en-US" sz="1000" spc="-1" strike="noStrike">
               <a:solidFill>
